--- a/docs/FocusBuddy_EN.pptx
+++ b/docs/FocusBuddy_EN.pptx
@@ -1,22 +1,23 @@
 
 <file path=ppt/presentation.xml><?xml version="1.0" encoding="utf-8"?>
-<p:presentation xmlns:a="http://schemas.openxmlformats.org/drawingml/2006/main" xmlns:r="http://schemas.openxmlformats.org/officeDocument/2006/relationships" xmlns:p="http://schemas.openxmlformats.org/presentationml/2006/main" autoCompressPictures="0">
+<p:presentation xmlns:a="http://schemas.openxmlformats.org/drawingml/2006/main" xmlns:r="http://schemas.openxmlformats.org/officeDocument/2006/relationships" xmlns:p="http://schemas.openxmlformats.org/presentationml/2006/main" saveSubsetFonts="1" autoCompressPictures="0">
   <p:sldMasterIdLst>
     <p:sldMasterId id="2147483648" r:id="rId1"/>
   </p:sldMasterIdLst>
   <p:sldIdLst>
-    <p:sldId id="256" r:id="rId3"/>
-    <p:sldId id="257" r:id="rId4"/>
-    <p:sldId id="258" r:id="rId5"/>
-    <p:sldId id="259" r:id="rId6"/>
-    <p:sldId id="260" r:id="rId7"/>
-    <p:sldId id="261" r:id="rId8"/>
-    <p:sldId id="262" r:id="rId9"/>
-    <p:sldId id="263" r:id="rId10"/>
-    <p:sldId id="264" r:id="rId11"/>
-    <p:sldId id="265" r:id="rId12"/>
+    <p:sldId id="256" r:id="rId7"/>
+    <p:sldId id="257" r:id="rId8"/>
+    <p:sldId id="258" r:id="rId9"/>
+    <p:sldId id="259" r:id="rId10"/>
+    <p:sldId id="260" r:id="rId11"/>
+    <p:sldId id="261" r:id="rId12"/>
+    <p:sldId id="262" r:id="rId13"/>
+    <p:sldId id="263" r:id="rId14"/>
+    <p:sldId id="264" r:id="rId15"/>
+    <p:sldId id="265" r:id="rId16"/>
+    <p:sldId id="266" r:id="rId17"/>
   </p:sldIdLst>
-  <p:sldSz cx="12191365" cy="6858000" type="screen4x3"/>
+  <p:sldSz cx="12191695" cy="6858000" type="screen4x3"/>
   <p:notesSz cx="6858000" cy="9144000"/>
   <p:defaultTextStyle>
     <a:defPPr>
@@ -113,22 +114,6 @@
       </a:defRPr>
     </a:lvl9pPr>
   </p:defaultTextStyle>
-  <p:extLst>
-    <p:ext uri="{EFAFB233-063F-42B5-8137-9DF3F51BA10A}">
-      <p15:sldGuideLst xmlns:p15="http://schemas.microsoft.com/office/powerpoint/2012/main">
-        <p15:guide id="1" orient="horz" pos="2160" userDrawn="1">
-          <p15:clr>
-            <a:srgbClr val="A4A3A4"/>
-          </p15:clr>
-        </p15:guide>
-        <p15:guide id="2" pos="2880" userDrawn="1">
-          <p15:clr>
-            <a:srgbClr val="A4A3A4"/>
-          </p15:clr>
-        </p15:guide>
-      </p15:sldGuideLst>
-    </p:ext>
-  </p:extLst>
 </p:presentation>
 </file>
 
@@ -313,6 +298,7 @@
           <a:p>
             <a:fld id="{5BCAD085-E8A6-8845-BD4E-CB4CCA059FC4}" type="datetimeFigureOut">
               <a:rPr lang="en-US" smtClean="0"/>
+              <a:t>1/27/13</a:t>
             </a:fld>
             <a:endParaRPr lang="en-US"/>
           </a:p>
@@ -354,12 +340,18 @@
           <a:p>
             <a:fld id="{C1FF6DA9-008F-8B48-92A6-B652298478BF}" type="slidenum">
               <a:rPr lang="en-US" smtClean="0"/>
+              <a:t>‹#›</a:t>
             </a:fld>
             <a:endParaRPr lang="en-US"/>
           </a:p>
         </p:txBody>
       </p:sp>
     </p:spTree>
+    <p:extLst>
+      <p:ext uri="{BB962C8B-B14F-4D97-AF65-F5344CB8AC3E}">
+        <p14:creationId xmlns:p14="http://schemas.microsoft.com/office/powerpoint/2010/main" val="3168075583"/>
+      </p:ext>
+    </p:extLst>
   </p:cSld>
   <p:clrMapOvr>
     <a:masterClrMapping/>
@@ -427,7 +419,6 @@
               <a:rPr lang="en-US" smtClean="0"/>
               <a:t>Click to edit Master text styles</a:t>
             </a:r>
-            <a:endParaRPr lang="en-US" smtClean="0"/>
           </a:p>
           <a:p>
             <a:pPr lvl="1"/>
@@ -435,7 +426,6 @@
               <a:rPr lang="en-US" smtClean="0"/>
               <a:t>Second level</a:t>
             </a:r>
-            <a:endParaRPr lang="en-US" smtClean="0"/>
           </a:p>
           <a:p>
             <a:pPr lvl="2"/>
@@ -443,7 +433,6 @@
               <a:rPr lang="en-US" smtClean="0"/>
               <a:t>Third level</a:t>
             </a:r>
-            <a:endParaRPr lang="en-US" smtClean="0"/>
           </a:p>
           <a:p>
             <a:pPr lvl="3"/>
@@ -451,7 +440,6 @@
               <a:rPr lang="en-US" smtClean="0"/>
               <a:t>Fourth level</a:t>
             </a:r>
-            <a:endParaRPr lang="en-US" smtClean="0"/>
           </a:p>
           <a:p>
             <a:pPr lvl="4"/>
@@ -480,6 +468,7 @@
           <a:p>
             <a:fld id="{5BCAD085-E8A6-8845-BD4E-CB4CCA059FC4}" type="datetimeFigureOut">
               <a:rPr lang="en-US" smtClean="0"/>
+              <a:t>1/27/13</a:t>
             </a:fld>
             <a:endParaRPr lang="en-US"/>
           </a:p>
@@ -521,12 +510,18 @@
           <a:p>
             <a:fld id="{C1FF6DA9-008F-8B48-92A6-B652298478BF}" type="slidenum">
               <a:rPr lang="en-US" smtClean="0"/>
+              <a:t>‹#›</a:t>
             </a:fld>
             <a:endParaRPr lang="en-US"/>
           </a:p>
         </p:txBody>
       </p:sp>
     </p:spTree>
+    <p:extLst>
+      <p:ext uri="{BB962C8B-B14F-4D97-AF65-F5344CB8AC3E}">
+        <p14:creationId xmlns:p14="http://schemas.microsoft.com/office/powerpoint/2010/main" val="2910927964"/>
+      </p:ext>
+    </p:extLst>
   </p:cSld>
   <p:clrMapOvr>
     <a:masterClrMapping/>
@@ -604,7 +599,6 @@
               <a:rPr lang="en-US" smtClean="0"/>
               <a:t>Click to edit Master text styles</a:t>
             </a:r>
-            <a:endParaRPr lang="en-US" smtClean="0"/>
           </a:p>
           <a:p>
             <a:pPr lvl="1"/>
@@ -612,7 +606,6 @@
               <a:rPr lang="en-US" smtClean="0"/>
               <a:t>Second level</a:t>
             </a:r>
-            <a:endParaRPr lang="en-US" smtClean="0"/>
           </a:p>
           <a:p>
             <a:pPr lvl="2"/>
@@ -620,7 +613,6 @@
               <a:rPr lang="en-US" smtClean="0"/>
               <a:t>Third level</a:t>
             </a:r>
-            <a:endParaRPr lang="en-US" smtClean="0"/>
           </a:p>
           <a:p>
             <a:pPr lvl="3"/>
@@ -628,7 +620,6 @@
               <a:rPr lang="en-US" smtClean="0"/>
               <a:t>Fourth level</a:t>
             </a:r>
-            <a:endParaRPr lang="en-US" smtClean="0"/>
           </a:p>
           <a:p>
             <a:pPr lvl="4"/>
@@ -657,6 +648,7 @@
           <a:p>
             <a:fld id="{5BCAD085-E8A6-8845-BD4E-CB4CCA059FC4}" type="datetimeFigureOut">
               <a:rPr lang="en-US" smtClean="0"/>
+              <a:t>1/27/13</a:t>
             </a:fld>
             <a:endParaRPr lang="en-US"/>
           </a:p>
@@ -698,12 +690,18 @@
           <a:p>
             <a:fld id="{C1FF6DA9-008F-8B48-92A6-B652298478BF}" type="slidenum">
               <a:rPr lang="en-US" smtClean="0"/>
+              <a:t>‹#›</a:t>
             </a:fld>
             <a:endParaRPr lang="en-US"/>
           </a:p>
         </p:txBody>
       </p:sp>
     </p:spTree>
+    <p:extLst>
+      <p:ext uri="{BB962C8B-B14F-4D97-AF65-F5344CB8AC3E}">
+        <p14:creationId xmlns:p14="http://schemas.microsoft.com/office/powerpoint/2010/main" val="3612223792"/>
+      </p:ext>
+    </p:extLst>
   </p:cSld>
   <p:clrMapOvr>
     <a:masterClrMapping/>
@@ -771,7 +769,6 @@
               <a:rPr lang="en-US" smtClean="0"/>
               <a:t>Click to edit Master text styles</a:t>
             </a:r>
-            <a:endParaRPr lang="en-US" smtClean="0"/>
           </a:p>
           <a:p>
             <a:pPr lvl="1"/>
@@ -779,7 +776,6 @@
               <a:rPr lang="en-US" smtClean="0"/>
               <a:t>Second level</a:t>
             </a:r>
-            <a:endParaRPr lang="en-US" smtClean="0"/>
           </a:p>
           <a:p>
             <a:pPr lvl="2"/>
@@ -787,7 +783,6 @@
               <a:rPr lang="en-US" smtClean="0"/>
               <a:t>Third level</a:t>
             </a:r>
-            <a:endParaRPr lang="en-US" smtClean="0"/>
           </a:p>
           <a:p>
             <a:pPr lvl="3"/>
@@ -795,7 +790,6 @@
               <a:rPr lang="en-US" smtClean="0"/>
               <a:t>Fourth level</a:t>
             </a:r>
-            <a:endParaRPr lang="en-US" smtClean="0"/>
           </a:p>
           <a:p>
             <a:pPr lvl="4"/>
@@ -824,6 +818,7 @@
           <a:p>
             <a:fld id="{5BCAD085-E8A6-8845-BD4E-CB4CCA059FC4}" type="datetimeFigureOut">
               <a:rPr lang="en-US" smtClean="0"/>
+              <a:t>1/27/13</a:t>
             </a:fld>
             <a:endParaRPr lang="en-US"/>
           </a:p>
@@ -865,12 +860,18 @@
           <a:p>
             <a:fld id="{C1FF6DA9-008F-8B48-92A6-B652298478BF}" type="slidenum">
               <a:rPr lang="en-US" smtClean="0"/>
+              <a:t>‹#›</a:t>
             </a:fld>
             <a:endParaRPr lang="en-US"/>
           </a:p>
         </p:txBody>
       </p:sp>
     </p:spTree>
+    <p:extLst>
+      <p:ext uri="{BB962C8B-B14F-4D97-AF65-F5344CB8AC3E}">
+        <p14:creationId xmlns:p14="http://schemas.microsoft.com/office/powerpoint/2010/main" val="2614314258"/>
+      </p:ext>
+    </p:extLst>
   </p:cSld>
   <p:clrMapOvr>
     <a:masterClrMapping/>
@@ -1043,7 +1044,6 @@
               <a:rPr lang="en-US" smtClean="0"/>
               <a:t>Click to edit Master text styles</a:t>
             </a:r>
-            <a:endParaRPr lang="en-US" smtClean="0"/>
           </a:p>
         </p:txBody>
       </p:sp>
@@ -1064,6 +1064,7 @@
           <a:p>
             <a:fld id="{5BCAD085-E8A6-8845-BD4E-CB4CCA059FC4}" type="datetimeFigureOut">
               <a:rPr lang="en-US" smtClean="0"/>
+              <a:t>1/27/13</a:t>
             </a:fld>
             <a:endParaRPr lang="en-US"/>
           </a:p>
@@ -1105,12 +1106,18 @@
           <a:p>
             <a:fld id="{C1FF6DA9-008F-8B48-92A6-B652298478BF}" type="slidenum">
               <a:rPr lang="en-US" smtClean="0"/>
+              <a:t>‹#›</a:t>
             </a:fld>
             <a:endParaRPr lang="en-US"/>
           </a:p>
         </p:txBody>
       </p:sp>
     </p:spTree>
+    <p:extLst>
+      <p:ext uri="{BB962C8B-B14F-4D97-AF65-F5344CB8AC3E}">
+        <p14:creationId xmlns:p14="http://schemas.microsoft.com/office/powerpoint/2010/main" val="960648375"/>
+      </p:ext>
+    </p:extLst>
   </p:cSld>
   <p:clrMapOvr>
     <a:masterClrMapping/>
@@ -1211,7 +1218,6 @@
               <a:rPr lang="en-US" smtClean="0"/>
               <a:t>Click to edit Master text styles</a:t>
             </a:r>
-            <a:endParaRPr lang="en-US" smtClean="0"/>
           </a:p>
           <a:p>
             <a:pPr lvl="1"/>
@@ -1219,7 +1225,6 @@
               <a:rPr lang="en-US" smtClean="0"/>
               <a:t>Second level</a:t>
             </a:r>
-            <a:endParaRPr lang="en-US" smtClean="0"/>
           </a:p>
           <a:p>
             <a:pPr lvl="2"/>
@@ -1227,7 +1232,6 @@
               <a:rPr lang="en-US" smtClean="0"/>
               <a:t>Third level</a:t>
             </a:r>
-            <a:endParaRPr lang="en-US" smtClean="0"/>
           </a:p>
           <a:p>
             <a:pPr lvl="3"/>
@@ -1235,7 +1239,6 @@
               <a:rPr lang="en-US" smtClean="0"/>
               <a:t>Fourth level</a:t>
             </a:r>
-            <a:endParaRPr lang="en-US" smtClean="0"/>
           </a:p>
           <a:p>
             <a:pPr lvl="4"/>
@@ -1300,7 +1303,6 @@
               <a:rPr lang="en-US" smtClean="0"/>
               <a:t>Click to edit Master text styles</a:t>
             </a:r>
-            <a:endParaRPr lang="en-US" smtClean="0"/>
           </a:p>
           <a:p>
             <a:pPr lvl="1"/>
@@ -1308,7 +1310,6 @@
               <a:rPr lang="en-US" smtClean="0"/>
               <a:t>Second level</a:t>
             </a:r>
-            <a:endParaRPr lang="en-US" smtClean="0"/>
           </a:p>
           <a:p>
             <a:pPr lvl="2"/>
@@ -1316,7 +1317,6 @@
               <a:rPr lang="en-US" smtClean="0"/>
               <a:t>Third level</a:t>
             </a:r>
-            <a:endParaRPr lang="en-US" smtClean="0"/>
           </a:p>
           <a:p>
             <a:pPr lvl="3"/>
@@ -1324,7 +1324,6 @@
               <a:rPr lang="en-US" smtClean="0"/>
               <a:t>Fourth level</a:t>
             </a:r>
-            <a:endParaRPr lang="en-US" smtClean="0"/>
           </a:p>
           <a:p>
             <a:pPr lvl="4"/>
@@ -1353,6 +1352,7 @@
           <a:p>
             <a:fld id="{5BCAD085-E8A6-8845-BD4E-CB4CCA059FC4}" type="datetimeFigureOut">
               <a:rPr lang="en-US" smtClean="0"/>
+              <a:t>1/27/13</a:t>
             </a:fld>
             <a:endParaRPr lang="en-US"/>
           </a:p>
@@ -1394,12 +1394,18 @@
           <a:p>
             <a:fld id="{C1FF6DA9-008F-8B48-92A6-B652298478BF}" type="slidenum">
               <a:rPr lang="en-US" smtClean="0"/>
+              <a:t>‹#›</a:t>
             </a:fld>
             <a:endParaRPr lang="en-US"/>
           </a:p>
         </p:txBody>
       </p:sp>
     </p:spTree>
+    <p:extLst>
+      <p:ext uri="{BB962C8B-B14F-4D97-AF65-F5344CB8AC3E}">
+        <p14:creationId xmlns:p14="http://schemas.microsoft.com/office/powerpoint/2010/main" val="2782244947"/>
+      </p:ext>
+    </p:extLst>
   </p:cSld>
   <p:clrMapOvr>
     <a:masterClrMapping/>
@@ -1513,7 +1519,6 @@
               <a:rPr lang="en-US" smtClean="0"/>
               <a:t>Click to edit Master text styles</a:t>
             </a:r>
-            <a:endParaRPr lang="en-US" smtClean="0"/>
           </a:p>
         </p:txBody>
       </p:sp>
@@ -1570,7 +1575,6 @@
               <a:rPr lang="en-US" smtClean="0"/>
               <a:t>Click to edit Master text styles</a:t>
             </a:r>
-            <a:endParaRPr lang="en-US" smtClean="0"/>
           </a:p>
           <a:p>
             <a:pPr lvl="1"/>
@@ -1578,7 +1582,6 @@
               <a:rPr lang="en-US" smtClean="0"/>
               <a:t>Second level</a:t>
             </a:r>
-            <a:endParaRPr lang="en-US" smtClean="0"/>
           </a:p>
           <a:p>
             <a:pPr lvl="2"/>
@@ -1586,7 +1589,6 @@
               <a:rPr lang="en-US" smtClean="0"/>
               <a:t>Third level</a:t>
             </a:r>
-            <a:endParaRPr lang="en-US" smtClean="0"/>
           </a:p>
           <a:p>
             <a:pPr lvl="3"/>
@@ -1594,7 +1596,6 @@
               <a:rPr lang="en-US" smtClean="0"/>
               <a:t>Fourth level</a:t>
             </a:r>
-            <a:endParaRPr lang="en-US" smtClean="0"/>
           </a:p>
           <a:p>
             <a:pPr lvl="4"/>
@@ -1668,7 +1669,6 @@
               <a:rPr lang="en-US" smtClean="0"/>
               <a:t>Click to edit Master text styles</a:t>
             </a:r>
-            <a:endParaRPr lang="en-US" smtClean="0"/>
           </a:p>
         </p:txBody>
       </p:sp>
@@ -1725,7 +1725,6 @@
               <a:rPr lang="en-US" smtClean="0"/>
               <a:t>Click to edit Master text styles</a:t>
             </a:r>
-            <a:endParaRPr lang="en-US" smtClean="0"/>
           </a:p>
           <a:p>
             <a:pPr lvl="1"/>
@@ -1733,7 +1732,6 @@
               <a:rPr lang="en-US" smtClean="0"/>
               <a:t>Second level</a:t>
             </a:r>
-            <a:endParaRPr lang="en-US" smtClean="0"/>
           </a:p>
           <a:p>
             <a:pPr lvl="2"/>
@@ -1741,7 +1739,6 @@
               <a:rPr lang="en-US" smtClean="0"/>
               <a:t>Third level</a:t>
             </a:r>
-            <a:endParaRPr lang="en-US" smtClean="0"/>
           </a:p>
           <a:p>
             <a:pPr lvl="3"/>
@@ -1749,7 +1746,6 @@
               <a:rPr lang="en-US" smtClean="0"/>
               <a:t>Fourth level</a:t>
             </a:r>
-            <a:endParaRPr lang="en-US" smtClean="0"/>
           </a:p>
           <a:p>
             <a:pPr lvl="4"/>
@@ -1778,6 +1774,7 @@
           <a:p>
             <a:fld id="{5BCAD085-E8A6-8845-BD4E-CB4CCA059FC4}" type="datetimeFigureOut">
               <a:rPr lang="en-US" smtClean="0"/>
+              <a:t>1/27/13</a:t>
             </a:fld>
             <a:endParaRPr lang="en-US"/>
           </a:p>
@@ -1819,12 +1816,18 @@
           <a:p>
             <a:fld id="{C1FF6DA9-008F-8B48-92A6-B652298478BF}" type="slidenum">
               <a:rPr lang="en-US" smtClean="0"/>
+              <a:t>‹#›</a:t>
             </a:fld>
             <a:endParaRPr lang="en-US"/>
           </a:p>
         </p:txBody>
       </p:sp>
     </p:spTree>
+    <p:extLst>
+      <p:ext uri="{BB962C8B-B14F-4D97-AF65-F5344CB8AC3E}">
+        <p14:creationId xmlns:p14="http://schemas.microsoft.com/office/powerpoint/2010/main" val="990158736"/>
+      </p:ext>
+    </p:extLst>
   </p:cSld>
   <p:clrMapOvr>
     <a:masterClrMapping/>
@@ -1889,6 +1892,7 @@
           <a:p>
             <a:fld id="{5BCAD085-E8A6-8845-BD4E-CB4CCA059FC4}" type="datetimeFigureOut">
               <a:rPr lang="en-US" smtClean="0"/>
+              <a:t>1/27/13</a:t>
             </a:fld>
             <a:endParaRPr lang="en-US"/>
           </a:p>
@@ -1930,12 +1934,18 @@
           <a:p>
             <a:fld id="{C1FF6DA9-008F-8B48-92A6-B652298478BF}" type="slidenum">
               <a:rPr lang="en-US" smtClean="0"/>
+              <a:t>‹#›</a:t>
             </a:fld>
             <a:endParaRPr lang="en-US"/>
           </a:p>
         </p:txBody>
       </p:sp>
     </p:spTree>
+    <p:extLst>
+      <p:ext uri="{BB962C8B-B14F-4D97-AF65-F5344CB8AC3E}">
+        <p14:creationId xmlns:p14="http://schemas.microsoft.com/office/powerpoint/2010/main" val="727027711"/>
+      </p:ext>
+    </p:extLst>
   </p:cSld>
   <p:clrMapOvr>
     <a:masterClrMapping/>
@@ -1977,6 +1987,7 @@
           <a:p>
             <a:fld id="{5BCAD085-E8A6-8845-BD4E-CB4CCA059FC4}" type="datetimeFigureOut">
               <a:rPr lang="en-US" smtClean="0"/>
+              <a:t>1/27/13</a:t>
             </a:fld>
             <a:endParaRPr lang="en-US"/>
           </a:p>
@@ -2018,12 +2029,18 @@
           <a:p>
             <a:fld id="{C1FF6DA9-008F-8B48-92A6-B652298478BF}" type="slidenum">
               <a:rPr lang="en-US" smtClean="0"/>
+              <a:t>‹#›</a:t>
             </a:fld>
             <a:endParaRPr lang="en-US"/>
           </a:p>
         </p:txBody>
       </p:sp>
     </p:spTree>
+    <p:extLst>
+      <p:ext uri="{BB962C8B-B14F-4D97-AF65-F5344CB8AC3E}">
+        <p14:creationId xmlns:p14="http://schemas.microsoft.com/office/powerpoint/2010/main" val="1212999818"/>
+      </p:ext>
+    </p:extLst>
   </p:cSld>
   <p:clrMapOvr>
     <a:masterClrMapping/>
@@ -2133,7 +2150,6 @@
               <a:rPr lang="en-US" smtClean="0"/>
               <a:t>Click to edit Master text styles</a:t>
             </a:r>
-            <a:endParaRPr lang="en-US" smtClean="0"/>
           </a:p>
           <a:p>
             <a:pPr lvl="1"/>
@@ -2141,7 +2157,6 @@
               <a:rPr lang="en-US" smtClean="0"/>
               <a:t>Second level</a:t>
             </a:r>
-            <a:endParaRPr lang="en-US" smtClean="0"/>
           </a:p>
           <a:p>
             <a:pPr lvl="2"/>
@@ -2149,7 +2164,6 @@
               <a:rPr lang="en-US" smtClean="0"/>
               <a:t>Third level</a:t>
             </a:r>
-            <a:endParaRPr lang="en-US" smtClean="0"/>
           </a:p>
           <a:p>
             <a:pPr lvl="3"/>
@@ -2157,7 +2171,6 @@
               <a:rPr lang="en-US" smtClean="0"/>
               <a:t>Fourth level</a:t>
             </a:r>
-            <a:endParaRPr lang="en-US" smtClean="0"/>
           </a:p>
           <a:p>
             <a:pPr lvl="4"/>
@@ -2231,7 +2244,6 @@
               <a:rPr lang="en-US" smtClean="0"/>
               <a:t>Click to edit Master text styles</a:t>
             </a:r>
-            <a:endParaRPr lang="en-US" smtClean="0"/>
           </a:p>
         </p:txBody>
       </p:sp>
@@ -2252,6 +2264,7 @@
           <a:p>
             <a:fld id="{5BCAD085-E8A6-8845-BD4E-CB4CCA059FC4}" type="datetimeFigureOut">
               <a:rPr lang="en-US" smtClean="0"/>
+              <a:t>1/27/13</a:t>
             </a:fld>
             <a:endParaRPr lang="en-US"/>
           </a:p>
@@ -2293,12 +2306,18 @@
           <a:p>
             <a:fld id="{C1FF6DA9-008F-8B48-92A6-B652298478BF}" type="slidenum">
               <a:rPr lang="en-US" smtClean="0"/>
+              <a:t>‹#›</a:t>
             </a:fld>
             <a:endParaRPr lang="en-US"/>
           </a:p>
         </p:txBody>
       </p:sp>
     </p:spTree>
+    <p:extLst>
+      <p:ext uri="{BB962C8B-B14F-4D97-AF65-F5344CB8AC3E}">
+        <p14:creationId xmlns:p14="http://schemas.microsoft.com/office/powerpoint/2010/main" val="1840726560"/>
+      </p:ext>
+    </p:extLst>
   </p:cSld>
   <p:clrMapOvr>
     <a:masterClrMapping/>
@@ -2478,7 +2497,6 @@
               <a:rPr lang="en-US" smtClean="0"/>
               <a:t>Click to edit Master text styles</a:t>
             </a:r>
-            <a:endParaRPr lang="en-US" smtClean="0"/>
           </a:p>
         </p:txBody>
       </p:sp>
@@ -2499,6 +2517,7 @@
           <a:p>
             <a:fld id="{5BCAD085-E8A6-8845-BD4E-CB4CCA059FC4}" type="datetimeFigureOut">
               <a:rPr lang="en-US" smtClean="0"/>
+              <a:t>1/27/13</a:t>
             </a:fld>
             <a:endParaRPr lang="en-US"/>
           </a:p>
@@ -2540,12 +2559,18 @@
           <a:p>
             <a:fld id="{C1FF6DA9-008F-8B48-92A6-B652298478BF}" type="slidenum">
               <a:rPr lang="en-US" smtClean="0"/>
+              <a:t>‹#›</a:t>
             </a:fld>
             <a:endParaRPr lang="en-US"/>
           </a:p>
         </p:txBody>
       </p:sp>
     </p:spTree>
+    <p:extLst>
+      <p:ext uri="{BB962C8B-B14F-4D97-AF65-F5344CB8AC3E}">
+        <p14:creationId xmlns:p14="http://schemas.microsoft.com/office/powerpoint/2010/main" val="3889236939"/>
+      </p:ext>
+    </p:extLst>
   </p:cSld>
   <p:clrMapOvr>
     <a:masterClrMapping/>
@@ -2638,7 +2663,6 @@
               <a:rPr lang="en-US" smtClean="0"/>
               <a:t>Click to edit Master text styles</a:t>
             </a:r>
-            <a:endParaRPr lang="en-US" smtClean="0"/>
           </a:p>
           <a:p>
             <a:pPr lvl="1"/>
@@ -2646,7 +2670,6 @@
               <a:rPr lang="en-US" smtClean="0"/>
               <a:t>Second level</a:t>
             </a:r>
-            <a:endParaRPr lang="en-US" smtClean="0"/>
           </a:p>
           <a:p>
             <a:pPr lvl="2"/>
@@ -2654,7 +2677,6 @@
               <a:rPr lang="en-US" smtClean="0"/>
               <a:t>Third level</a:t>
             </a:r>
-            <a:endParaRPr lang="en-US" smtClean="0"/>
           </a:p>
           <a:p>
             <a:pPr lvl="3"/>
@@ -2662,7 +2684,6 @@
               <a:rPr lang="en-US" smtClean="0"/>
               <a:t>Fourth level</a:t>
             </a:r>
-            <a:endParaRPr lang="en-US" smtClean="0"/>
           </a:p>
           <a:p>
             <a:pPr lvl="4"/>
@@ -2709,6 +2730,7 @@
           <a:p>
             <a:fld id="{5BCAD085-E8A6-8845-BD4E-CB4CCA059FC4}" type="datetimeFigureOut">
               <a:rPr lang="en-US" smtClean="0"/>
+              <a:t>1/27/13</a:t>
             </a:fld>
             <a:endParaRPr lang="en-US"/>
           </a:p>
@@ -2786,12 +2808,18 @@
           <a:p>
             <a:fld id="{C1FF6DA9-008F-8B48-92A6-B652298478BF}" type="slidenum">
               <a:rPr lang="en-US" smtClean="0"/>
+              <a:t>‹#›</a:t>
             </a:fld>
             <a:endParaRPr lang="en-US"/>
           </a:p>
         </p:txBody>
       </p:sp>
     </p:spTree>
+    <p:extLst>
+      <p:ext uri="{BB962C8B-B14F-4D97-AF65-F5344CB8AC3E}">
+        <p14:creationId xmlns:p14="http://schemas.microsoft.com/office/powerpoint/2010/main" val="2209977519"/>
+      </p:ext>
+    </p:extLst>
   </p:cSld>
   <p:clrMap bg1="lt1" tx1="dk1" bg2="lt2" tx2="dk2" accent1="accent1" accent2="accent2" accent3="accent3" accent4="accent4" accent5="accent5" accent6="accent6" hlink="hlink" folHlink="folHlink"/>
   <p:sldLayoutIdLst>
@@ -2829,7 +2857,7 @@
         <a:spcBef>
           <a:spcPct val="20000"/>
         </a:spcBef>
-        <a:buFont typeface="Arial" panose="020B0604020202020204"/>
+        <a:buFont typeface="Arial"/>
         <a:buChar char="•"/>
         <a:defRPr sz="3200" kern="1200">
           <a:solidFill>
@@ -2844,7 +2872,7 @@
         <a:spcBef>
           <a:spcPct val="20000"/>
         </a:spcBef>
-        <a:buFont typeface="Arial" panose="020B0604020202020204"/>
+        <a:buFont typeface="Arial"/>
         <a:buChar char="–"/>
         <a:defRPr sz="2800" kern="1200">
           <a:solidFill>
@@ -2859,7 +2887,7 @@
         <a:spcBef>
           <a:spcPct val="20000"/>
         </a:spcBef>
-        <a:buFont typeface="Arial" panose="020B0604020202020204"/>
+        <a:buFont typeface="Arial"/>
         <a:buChar char="•"/>
         <a:defRPr sz="2400" kern="1200">
           <a:solidFill>
@@ -2874,7 +2902,7 @@
         <a:spcBef>
           <a:spcPct val="20000"/>
         </a:spcBef>
-        <a:buFont typeface="Arial" panose="020B0604020202020204"/>
+        <a:buFont typeface="Arial"/>
         <a:buChar char="–"/>
         <a:defRPr sz="2000" kern="1200">
           <a:solidFill>
@@ -2889,7 +2917,7 @@
         <a:spcBef>
           <a:spcPct val="20000"/>
         </a:spcBef>
-        <a:buFont typeface="Arial" panose="020B0604020202020204"/>
+        <a:buFont typeface="Arial"/>
         <a:buChar char="»"/>
         <a:defRPr sz="2000" kern="1200">
           <a:solidFill>
@@ -2904,7 +2932,7 @@
         <a:spcBef>
           <a:spcPct val="20000"/>
         </a:spcBef>
-        <a:buFont typeface="Arial" panose="020B0604020202020204"/>
+        <a:buFont typeface="Arial"/>
         <a:buChar char="•"/>
         <a:defRPr sz="2000" kern="1200">
           <a:solidFill>
@@ -2919,7 +2947,7 @@
         <a:spcBef>
           <a:spcPct val="20000"/>
         </a:spcBef>
-        <a:buFont typeface="Arial" panose="020B0604020202020204"/>
+        <a:buFont typeface="Arial"/>
         <a:buChar char="•"/>
         <a:defRPr sz="2000" kern="1200">
           <a:solidFill>
@@ -2934,7 +2962,7 @@
         <a:spcBef>
           <a:spcPct val="20000"/>
         </a:spcBef>
-        <a:buFont typeface="Arial" panose="020B0604020202020204"/>
+        <a:buFont typeface="Arial"/>
         <a:buChar char="•"/>
         <a:defRPr sz="2000" kern="1200">
           <a:solidFill>
@@ -2949,7 +2977,7 @@
         <a:spcBef>
           <a:spcPct val="20000"/>
         </a:spcBef>
-        <a:buFont typeface="Arial" panose="020B0604020202020204"/>
+        <a:buFont typeface="Arial"/>
         <a:buChar char="•"/>
         <a:defRPr sz="2000" kern="1200">
           <a:solidFill>
@@ -3061,7 +3089,7 @@
 </file>
 
 <file path=ppt/slides/slide1.xml><?xml version="1.0" encoding="utf-8"?>
-<p:sld xmlns:a="http://schemas.openxmlformats.org/drawingml/2006/main" xmlns:r="http://schemas.openxmlformats.org/officeDocument/2006/relationships" xmlns:p="http://schemas.openxmlformats.org/presentationml/2006/main">
+<p:sld xmlns:a="http://schemas.openxmlformats.org/drawingml/2006/main" xmlns:p="http://schemas.openxmlformats.org/presentationml/2006/main" xmlns:r="http://schemas.openxmlformats.org/officeDocument/2006/relationships">
   <p:cSld>
     <p:bg>
       <p:bgPr>
@@ -3297,30 +3325,6 @@
           </a:p>
         </p:txBody>
       </p:sp>
-      <p:pic>
-        <p:nvPicPr>
-          <p:cNvPr id="8" name="图片 7" descr="Dream - 1"/>
-          <p:cNvPicPr>
-            <a:picLocks noChangeAspect="1"/>
-          </p:cNvPicPr>
-          <p:nvPr/>
-        </p:nvPicPr>
-        <p:blipFill>
-          <a:blip r:embed="rId1"/>
-          <a:stretch>
-            <a:fillRect/>
-          </a:stretch>
-        </p:blipFill>
-        <p:spPr>
-          <a:xfrm>
-            <a:off x="6906895" y="830580"/>
-            <a:ext cx="3782695" cy="3782695"/>
-          </a:xfrm>
-          <a:prstGeom prst="rect">
-            <a:avLst/>
-          </a:prstGeom>
-        </p:spPr>
-      </p:pic>
     </p:spTree>
   </p:cSld>
   <p:clrMapOvr>
@@ -3330,7 +3334,7 @@
 </file>
 
 <file path=ppt/slides/slide10.xml><?xml version="1.0" encoding="utf-8"?>
-<p:sld xmlns:a="http://schemas.openxmlformats.org/drawingml/2006/main" xmlns:r="http://schemas.openxmlformats.org/officeDocument/2006/relationships" xmlns:p="http://schemas.openxmlformats.org/presentationml/2006/main">
+<p:sld xmlns:a="http://schemas.openxmlformats.org/drawingml/2006/main" xmlns:p="http://schemas.openxmlformats.org/presentationml/2006/main" xmlns:r="http://schemas.openxmlformats.org/officeDocument/2006/relationships">
   <p:cSld>
     <p:bg>
       <p:bgPr>
@@ -3355,8 +3359,8 @@
         </p:nvSpPr>
         <p:spPr>
           <a:xfrm>
-            <a:off x="457200" y="6217920"/>
-            <a:ext cx="11247120" cy="36576"/>
+            <a:off x="457200" y="274320"/>
+            <a:ext cx="2926080" cy="548640"/>
           </a:xfrm>
           <a:prstGeom prst="roundRect">
             <a:avLst/>
@@ -3399,8 +3403,8 @@
         </p:nvSpPr>
         <p:spPr>
           <a:xfrm>
-            <a:off x="731520" y="1371600"/>
-            <a:ext cx="10058400" cy="914400"/>
+            <a:off x="640080" y="320040"/>
+            <a:ext cx="2743200" cy="457200"/>
           </a:xfrm>
           <a:prstGeom prst="rect">
             <a:avLst/>
@@ -3414,14 +3418,14 @@
           <a:lstStyle/>
           <a:p>
             <a:pPr algn="l">
-              <a:defRPr sz="4200" b="1">
-                <a:solidFill>
-                  <a:srgbClr val="FF6B35"/>
-                </a:solidFill>
-              </a:defRPr>
-            </a:pPr>
-            <a:r>
-              <a:t>Dream Team</a:t>
+              <a:defRPr sz="2200" b="1">
+                <a:solidFill>
+                  <a:srgbClr val="FFFFFF"/>
+                </a:solidFill>
+              </a:defRPr>
+            </a:pPr>
+            <a:r>
+              <a:t>Future Plans</a:t>
             </a:r>
           </a:p>
         </p:txBody>
@@ -3434,8 +3438,8 @@
         </p:nvSpPr>
         <p:spPr>
           <a:xfrm>
-            <a:off x="731520" y="2560320"/>
-            <a:ext cx="4572000" cy="548640"/>
+            <a:off x="731520" y="1097280"/>
+            <a:ext cx="10058400" cy="640080"/>
           </a:xfrm>
           <a:prstGeom prst="rect">
             <a:avLst/>
@@ -3451,12 +3455,12 @@
             <a:pPr algn="l">
               <a:defRPr sz="2800" b="1">
                 <a:solidFill>
-                  <a:srgbClr val="E0E0E0"/>
-                </a:solidFill>
-              </a:defRPr>
-            </a:pPr>
-            <a:r>
-              <a:t>Ryan</a:t>
+                  <a:srgbClr val="FF6B35"/>
+                </a:solidFill>
+              </a:defRPr>
+            </a:pPr>
+            <a:r>
+              <a:t>From Personal Tool to Learning Ecosystem</a:t>
             </a:r>
           </a:p>
         </p:txBody>
@@ -3469,8 +3473,8 @@
         </p:nvSpPr>
         <p:spPr>
           <a:xfrm>
-            <a:off x="731520" y="3108960"/>
-            <a:ext cx="4572000" cy="457200"/>
+            <a:off x="731520" y="1737360"/>
+            <a:ext cx="6400800" cy="4572000"/>
           </a:xfrm>
           <a:prstGeom prst="rect">
             <a:avLst/>
@@ -3483,29 +3487,192 @@
           </a:bodyPr>
           <a:lstStyle/>
           <a:p>
-            <a:pPr algn="l">
-              <a:defRPr sz="1600" b="0">
-                <a:solidFill>
-                  <a:srgbClr val="8892B0"/>
-                </a:solidFill>
-              </a:defRPr>
-            </a:pPr>
-            <a:r>
-              <a:t>Frontend: Pomodoro, Statistics, Settings, UI</a:t>
-            </a:r>
-          </a:p>
-        </p:txBody>
-      </p:sp>
-      <p:sp>
-        <p:nvSpPr>
-          <p:cNvPr id="6" name="TextBox 5"/>
+            <a:pPr>
+              <a:spcAft>
+                <a:spcPts val="600"/>
+              </a:spcAft>
+              <a:defRPr sz="1400">
+                <a:solidFill>
+                  <a:srgbClr val="E0E0E0"/>
+                </a:solidFill>
+              </a:defRPr>
+            </a:pPr>
+            <a:r>
+              <a:t>Multi-user study room — see friends focusing, motivate each other</a:t>
+            </a:r>
+          </a:p>
+          <a:p>
+            <a:pPr>
+              <a:spcAft>
+                <a:spcPts val="600"/>
+              </a:spcAft>
+              <a:defRPr sz="1400">
+                <a:solidFill>
+                  <a:srgbClr val="E0E0E0"/>
+                </a:solidFill>
+              </a:defRPr>
+            </a:pPr>
+            <a:r>
+              <a:t>Fatigue detection (yawning via MAR) — suggest breaks</a:t>
+            </a:r>
+          </a:p>
+          <a:p>
+            <a:pPr>
+              <a:spcAft>
+                <a:spcPts val="600"/>
+              </a:spcAft>
+              <a:defRPr sz="1400">
+                <a:solidFill>
+                  <a:srgbClr val="E0E0E0"/>
+                </a:solidFill>
+              </a:defRPr>
+            </a:pPr>
+            <a:r>
+              <a:t>AI daily report — auto-generated focus analysis + suggestions</a:t>
+            </a:r>
+          </a:p>
+          <a:p>
+            <a:pPr>
+              <a:spcAft>
+                <a:spcPts val="600"/>
+              </a:spcAft>
+              <a:defRPr sz="1400">
+                <a:solidFill>
+                  <a:srgbClr val="E0E0E0"/>
+                </a:solidFill>
+              </a:defRPr>
+            </a:pPr>
+            <a:r>
+              <a:t>Mobile responsive — phone + tablet support</a:t>
+            </a:r>
+          </a:p>
+          <a:p>
+            <a:pPr>
+              <a:spcAft>
+                <a:spcPts val="600"/>
+              </a:spcAft>
+              <a:defRPr sz="1400">
+                <a:solidFill>
+                  <a:srgbClr val="E0E0E0"/>
+                </a:solidFill>
+              </a:defRPr>
+            </a:pPr>
+            <a:r>
+              <a:t>More hardware integrations — vibration alerts, ambient lights</a:t>
+            </a:r>
+          </a:p>
+          <a:p>
+            <a:pPr>
+              <a:spcAft>
+                <a:spcPts val="600"/>
+              </a:spcAft>
+              <a:defRPr sz="1400">
+                <a:solidFill>
+                  <a:srgbClr val="E0E0E0"/>
+                </a:solidFill>
+              </a:defRPr>
+            </a:pPr>
+          </a:p>
+          <a:p>
+            <a:pPr>
+              <a:spcAft>
+                <a:spcPts val="600"/>
+              </a:spcAft>
+              <a:defRPr sz="1400">
+                <a:solidFill>
+                  <a:srgbClr val="E0E0E0"/>
+                </a:solidFill>
+              </a:defRPr>
+            </a:pPr>
+            <a:r>
+              <a:t>Long-term: Smart schedule engine — recommend best study times</a:t>
+            </a:r>
+          </a:p>
+          <a:p>
+            <a:pPr>
+              <a:spcAft>
+                <a:spcPts val="600"/>
+              </a:spcAft>
+              <a:defRPr sz="1400">
+                <a:solidFill>
+                  <a:srgbClr val="E0E0E0"/>
+                </a:solidFill>
+              </a:defRPr>
+            </a:pPr>
+          </a:p>
+          <a:p>
+            <a:pPr>
+              <a:spcAft>
+                <a:spcPts val="600"/>
+              </a:spcAft>
+              <a:defRPr sz="1400">
+                <a:solidFill>
+                  <a:srgbClr val="E0E0E0"/>
+                </a:solidFill>
+              </a:defRPr>
+            </a:pPr>
+            <a:r>
+              <a:t>Making FocusBuddy the desk companion for every learner</a:t>
+            </a:r>
+          </a:p>
+        </p:txBody>
+      </p:sp>
+      <p:sp>
+        <p:nvSpPr>
+          <p:cNvPr id="6" name="Rounded Rectangle 5"/>
+          <p:cNvSpPr/>
+          <p:nvPr/>
+        </p:nvSpPr>
+        <p:spPr>
+          <a:xfrm>
+            <a:off x="7498079" y="1371600"/>
+            <a:ext cx="4206240" cy="5029200"/>
+          </a:xfrm>
+          <a:prstGeom prst="roundRect">
+            <a:avLst/>
+          </a:prstGeom>
+          <a:solidFill>
+            <a:srgbClr val="202A44"/>
+          </a:solidFill>
+          <a:ln w="19050">
+            <a:solidFill>
+              <a:srgbClr val="8892B0"/>
+            </a:solidFill>
+          </a:ln>
+          <a:effectLst/>
+        </p:spPr>
+        <p:style>
+          <a:lnRef idx="1">
+            <a:schemeClr val="accent1"/>
+          </a:lnRef>
+          <a:fillRef idx="3">
+            <a:schemeClr val="accent1"/>
+          </a:fillRef>
+          <a:effectRef idx="2">
+            <a:schemeClr val="accent1"/>
+          </a:effectRef>
+          <a:fontRef idx="minor">
+            <a:schemeClr val="lt1"/>
+          </a:fontRef>
+        </p:style>
+        <p:txBody>
+          <a:bodyPr rtlCol="0" anchor="ctr"/>
+          <a:lstStyle/>
+          <a:p>
+            <a:pPr algn="ctr"/>
+          </a:p>
+        </p:txBody>
+      </p:sp>
+      <p:sp>
+        <p:nvSpPr>
+          <p:cNvPr id="7" name="TextBox 6"/>
           <p:cNvSpPr txBox="1"/>
           <p:nvPr/>
         </p:nvSpPr>
         <p:spPr>
           <a:xfrm>
-            <a:off x="731520" y="3840480"/>
-            <a:ext cx="4572000" cy="548640"/>
+            <a:off x="7498079" y="3611880"/>
+            <a:ext cx="4206240" cy="548640"/>
           </a:xfrm>
           <a:prstGeom prst="rect">
             <a:avLst/>
@@ -3518,120 +3685,19 @@
           </a:bodyPr>
           <a:lstStyle/>
           <a:p>
-            <a:pPr algn="l">
-              <a:defRPr sz="2800" b="1">
-                <a:solidFill>
-                  <a:srgbClr val="E0E0E0"/>
-                </a:solidFill>
-              </a:defRPr>
-            </a:pPr>
-            <a:r>
-              <a:t>Vickie</a:t>
-            </a:r>
-          </a:p>
-        </p:txBody>
-      </p:sp>
-      <p:sp>
-        <p:nvSpPr>
-          <p:cNvPr id="7" name="TextBox 6"/>
-          <p:cNvSpPr txBox="1"/>
-          <p:nvPr/>
-        </p:nvSpPr>
-        <p:spPr>
-          <a:xfrm>
-            <a:off x="731520" y="4389120"/>
-            <a:ext cx="4572000" cy="457200"/>
-          </a:xfrm>
-          <a:prstGeom prst="rect">
-            <a:avLst/>
-          </a:prstGeom>
-          <a:noFill/>
-        </p:spPr>
-        <p:txBody>
-          <a:bodyPr wrap="square">
-            <a:spAutoFit/>
-          </a:bodyPr>
-          <a:lstStyle/>
-          <a:p>
-            <a:pPr algn="l">
-              <a:defRPr sz="1600" b="0">
+            <a:pPr algn="ctr">
+              <a:defRPr sz="1400">
                 <a:solidFill>
                   <a:srgbClr val="8892B0"/>
                 </a:solidFill>
               </a:defRPr>
             </a:pPr>
             <a:r>
-              <a:t>Algorithm: FaceMesh, ESP32 firmware, State machine</a:t>
-            </a:r>
-          </a:p>
-        </p:txBody>
-      </p:sp>
-      <p:sp>
-        <p:nvSpPr>
-          <p:cNvPr id="8" name="TextBox 7"/>
-          <p:cNvSpPr txBox="1"/>
-          <p:nvPr/>
-        </p:nvSpPr>
-        <p:spPr>
-          <a:xfrm>
-            <a:off x="731520" y="5303520"/>
-            <a:ext cx="10058400" cy="457200"/>
-          </a:xfrm>
-          <a:prstGeom prst="rect">
-            <a:avLst/>
-          </a:prstGeom>
-          <a:noFill/>
-        </p:spPr>
-        <p:txBody>
-          <a:bodyPr wrap="square">
-            <a:spAutoFit/>
-          </a:bodyPr>
-          <a:lstStyle/>
-          <a:p>
-            <a:pPr algn="l">
-              <a:defRPr sz="1400" b="0">
-                <a:solidFill>
-                  <a:srgbClr val="8892B0"/>
-                </a:solidFill>
-              </a:defRPr>
-            </a:pPr>
-            <a:r>
-              <a:t>github.com/Sapnap67/FocusBuddy</a:t>
-            </a:r>
-          </a:p>
-        </p:txBody>
-      </p:sp>
-      <p:sp>
-        <p:nvSpPr>
-          <p:cNvPr id="9" name="TextBox 8"/>
-          <p:cNvSpPr txBox="1"/>
-          <p:nvPr/>
-        </p:nvSpPr>
-        <p:spPr>
-          <a:xfrm>
-            <a:off x="731520" y="5669280"/>
-            <a:ext cx="10058400" cy="457200"/>
-          </a:xfrm>
-          <a:prstGeom prst="rect">
-            <a:avLst/>
-          </a:prstGeom>
-          <a:noFill/>
-        </p:spPr>
-        <p:txBody>
-          <a:bodyPr wrap="square">
-            <a:spAutoFit/>
-          </a:bodyPr>
-          <a:lstStyle/>
-          <a:p>
-            <a:pPr algn="l">
-              <a:defRPr sz="2000" b="1">
-                <a:solidFill>
-                  <a:srgbClr val="FF6B35"/>
-                </a:solidFill>
-              </a:defRPr>
-            </a:pPr>
-            <a:r>
-              <a:t>Thank you, HHCC 2026 judges!</a:t>
+              <a:t>Multi-user Study Room</a:t>
+            </a:r>
+            <a:br/>
+            <a:r>
+              <a:t>Concept Design</a:t>
             </a:r>
           </a:p>
         </p:txBody>
@@ -3644,8 +3710,8 @@
 </p:sld>
 </file>
 
-<file path=ppt/slides/slide2.xml><?xml version="1.0" encoding="utf-8"?>
-<p:sld xmlns:a="http://schemas.openxmlformats.org/drawingml/2006/main" xmlns:r="http://schemas.openxmlformats.org/officeDocument/2006/relationships" xmlns:p="http://schemas.openxmlformats.org/presentationml/2006/main">
+<file path=ppt/slides/slide11.xml><?xml version="1.0" encoding="utf-8"?>
+<p:sld xmlns:a="http://schemas.openxmlformats.org/drawingml/2006/main" xmlns:p="http://schemas.openxmlformats.org/presentationml/2006/main" xmlns:r="http://schemas.openxmlformats.org/officeDocument/2006/relationships">
   <p:cSld>
     <p:bg>
       <p:bgPr>
@@ -3670,8 +3736,8 @@
         </p:nvSpPr>
         <p:spPr>
           <a:xfrm>
-            <a:off x="457200" y="274320"/>
-            <a:ext cx="2926080" cy="548640"/>
+            <a:off x="457200" y="6217920"/>
+            <a:ext cx="11247120" cy="36576"/>
           </a:xfrm>
           <a:prstGeom prst="roundRect">
             <a:avLst/>
@@ -3714,8 +3780,8 @@
         </p:nvSpPr>
         <p:spPr>
           <a:xfrm>
-            <a:off x="640080" y="320040"/>
-            <a:ext cx="2743200" cy="457200"/>
+            <a:off x="731520" y="1097280"/>
+            <a:ext cx="10058400" cy="731520"/>
           </a:xfrm>
           <a:prstGeom prst="rect">
             <a:avLst/>
@@ -3729,14 +3795,14 @@
           <a:lstStyle/>
           <a:p>
             <a:pPr algn="l">
-              <a:defRPr sz="2200" b="1">
-                <a:solidFill>
-                  <a:srgbClr val="FFFFFF"/>
-                </a:solidFill>
-              </a:defRPr>
-            </a:pPr>
-            <a:r>
-              <a:t>The Problem</a:t>
+              <a:defRPr sz="4200" b="1">
+                <a:solidFill>
+                  <a:srgbClr val="FF6B35"/>
+                </a:solidFill>
+              </a:defRPr>
+            </a:pPr>
+            <a:r>
+              <a:t>Dream Team</a:t>
             </a:r>
           </a:p>
         </p:txBody>
@@ -3749,8 +3815,8 @@
         </p:nvSpPr>
         <p:spPr>
           <a:xfrm>
-            <a:off x="731520" y="1371600"/>
-            <a:ext cx="10515600" cy="914400"/>
+            <a:off x="731520" y="2194560"/>
+            <a:ext cx="4572000" cy="548640"/>
           </a:xfrm>
           <a:prstGeom prst="rect">
             <a:avLst/>
@@ -3764,14 +3830,14 @@
           <a:lstStyle/>
           <a:p>
             <a:pPr algn="l">
-              <a:defRPr sz="3200" b="1">
-                <a:solidFill>
-                  <a:srgbClr val="FF6B35"/>
-                </a:solidFill>
-              </a:defRPr>
-            </a:pPr>
-            <a:r>
-              <a:t>Do you know how long you've been distracted?</a:t>
+              <a:defRPr sz="2800" b="1">
+                <a:solidFill>
+                  <a:srgbClr val="E0E0E0"/>
+                </a:solidFill>
+              </a:defRPr>
+            </a:pPr>
+            <a:r>
+              <a:t>Ryan</a:t>
             </a:r>
           </a:p>
         </p:txBody>
@@ -3784,8 +3850,8 @@
         </p:nvSpPr>
         <p:spPr>
           <a:xfrm>
-            <a:off x="731520" y="2377440"/>
-            <a:ext cx="10515600" cy="4114800"/>
+            <a:off x="731520" y="2743200"/>
+            <a:ext cx="4572000" cy="457200"/>
           </a:xfrm>
           <a:prstGeom prst="rect">
             <a:avLst/>
@@ -3798,105 +3864,271 @@
           </a:bodyPr>
           <a:lstStyle/>
           <a:p>
-            <a:pPr>
-              <a:spcAft>
-                <a:spcPts val="800"/>
-              </a:spcAft>
-              <a:defRPr sz="1600">
+            <a:pPr algn="l">
+              <a:defRPr sz="1600" b="0">
+                <a:solidFill>
+                  <a:srgbClr val="8892B0"/>
+                </a:solidFill>
+              </a:defRPr>
+            </a:pPr>
+            <a:r>
+              <a:t>Frontend: Pomodoro, Statistics, Settings, UI</a:t>
+            </a:r>
+          </a:p>
+        </p:txBody>
+      </p:sp>
+      <p:sp>
+        <p:nvSpPr>
+          <p:cNvPr id="6" name="TextBox 5"/>
+          <p:cNvSpPr txBox="1"/>
+          <p:nvPr/>
+        </p:nvSpPr>
+        <p:spPr>
+          <a:xfrm>
+            <a:off x="731520" y="3474720"/>
+            <a:ext cx="4572000" cy="548640"/>
+          </a:xfrm>
+          <a:prstGeom prst="rect">
+            <a:avLst/>
+          </a:prstGeom>
+          <a:noFill/>
+        </p:spPr>
+        <p:txBody>
+          <a:bodyPr wrap="square">
+            <a:spAutoFit/>
+          </a:bodyPr>
+          <a:lstStyle/>
+          <a:p>
+            <a:pPr algn="l">
+              <a:defRPr sz="2800" b="1">
                 <a:solidFill>
                   <a:srgbClr val="E0E0E0"/>
                 </a:solidFill>
               </a:defRPr>
             </a:pPr>
             <a:r>
-              <a:t>We get distracted without realizing it — pick up phone, lose 30 min</a:t>
-            </a:r>
-          </a:p>
-          <a:p>
-            <a:pPr>
-              <a:spcAft>
-                <a:spcPts val="800"/>
-              </a:spcAft>
-              <a:defRPr sz="1600">
-                <a:solidFill>
-                  <a:srgbClr val="E0E0E0"/>
-                </a:solidFill>
-              </a:defRPr>
-            </a:pPr>
-            <a:r>
-              <a:t>Pomodoro timers only count time, they don't check if you're focused</a:t>
-            </a:r>
-          </a:p>
-          <a:p>
-            <a:pPr>
-              <a:spcAft>
-                <a:spcPts val="800"/>
-              </a:spcAft>
-              <a:defRPr sz="1600">
-                <a:solidFill>
-                  <a:srgbClr val="E0E0E0"/>
-                </a:solidFill>
-              </a:defRPr>
-            </a:pPr>
-            <a:r>
-              <a:t>No data feedback — no idea how much you actually studied today</a:t>
-            </a:r>
-          </a:p>
-          <a:p>
-            <a:pPr>
-              <a:spcAft>
-                <a:spcPts val="800"/>
-              </a:spcAft>
-              <a:defRPr sz="1600">
-                <a:solidFill>
-                  <a:srgbClr val="E0E0E0"/>
-                </a:solidFill>
-              </a:defRPr>
-            </a:pPr>
-            <a:r>
-              <a:t>Phone reminders are annoying; we ignore or dismiss them</a:t>
-            </a:r>
-          </a:p>
-          <a:p>
-            <a:pPr>
-              <a:spcAft>
-                <a:spcPts val="800"/>
-              </a:spcAft>
-              <a:defRPr sz="1600">
-                <a:solidFill>
-                  <a:srgbClr val="E0E0E0"/>
-                </a:solidFill>
-              </a:defRPr>
-            </a:pPr>
-          </a:p>
-          <a:p>
-            <a:pPr>
-              <a:spcAft>
-                <a:spcPts val="800"/>
-              </a:spcAft>
-              <a:defRPr sz="1600">
-                <a:solidFill>
-                  <a:srgbClr val="E0E0E0"/>
-                </a:solidFill>
-              </a:defRPr>
-            </a:pPr>
-            <a:r>
-              <a:t>Average: 1 distraction every 15 minutes during self-study</a:t>
-            </a:r>
-          </a:p>
-          <a:p>
-            <a:pPr>
-              <a:spcAft>
-                <a:spcPts val="800"/>
-              </a:spcAft>
-              <a:defRPr sz="1600">
-                <a:solidFill>
-                  <a:srgbClr val="E0E0E0"/>
-                </a:solidFill>
-              </a:defRPr>
-            </a:pPr>
-            <a:r>
-              <a:t>Solution: A focus companion that gives REAL-TIME FEEDBACK</a:t>
+              <a:t>Vickie</a:t>
+            </a:r>
+          </a:p>
+        </p:txBody>
+      </p:sp>
+      <p:sp>
+        <p:nvSpPr>
+          <p:cNvPr id="7" name="TextBox 6"/>
+          <p:cNvSpPr txBox="1"/>
+          <p:nvPr/>
+        </p:nvSpPr>
+        <p:spPr>
+          <a:xfrm>
+            <a:off x="731520" y="4023360"/>
+            <a:ext cx="4572000" cy="457200"/>
+          </a:xfrm>
+          <a:prstGeom prst="rect">
+            <a:avLst/>
+          </a:prstGeom>
+          <a:noFill/>
+        </p:spPr>
+        <p:txBody>
+          <a:bodyPr wrap="square">
+            <a:spAutoFit/>
+          </a:bodyPr>
+          <a:lstStyle/>
+          <a:p>
+            <a:pPr algn="l">
+              <a:defRPr sz="1600" b="0">
+                <a:solidFill>
+                  <a:srgbClr val="8892B0"/>
+                </a:solidFill>
+              </a:defRPr>
+            </a:pPr>
+            <a:r>
+              <a:t>Algorithm: FaceMesh, ESP32 firmware, State machine</a:t>
+            </a:r>
+          </a:p>
+        </p:txBody>
+      </p:sp>
+      <p:sp>
+        <p:nvSpPr>
+          <p:cNvPr id="8" name="Rounded Rectangle 7"/>
+          <p:cNvSpPr/>
+          <p:nvPr/>
+        </p:nvSpPr>
+        <p:spPr>
+          <a:xfrm>
+            <a:off x="6400800" y="1828800"/>
+            <a:ext cx="5303520" cy="3840480"/>
+          </a:xfrm>
+          <a:prstGeom prst="roundRect">
+            <a:avLst/>
+          </a:prstGeom>
+          <a:solidFill>
+            <a:srgbClr val="202A44"/>
+          </a:solidFill>
+          <a:ln w="19050">
+            <a:solidFill>
+              <a:srgbClr val="8892B0"/>
+            </a:solidFill>
+          </a:ln>
+          <a:effectLst/>
+        </p:spPr>
+        <p:style>
+          <a:lnRef idx="1">
+            <a:schemeClr val="accent1"/>
+          </a:lnRef>
+          <a:fillRef idx="3">
+            <a:schemeClr val="accent1"/>
+          </a:fillRef>
+          <a:effectRef idx="2">
+            <a:schemeClr val="accent1"/>
+          </a:effectRef>
+          <a:fontRef idx="minor">
+            <a:schemeClr val="lt1"/>
+          </a:fontRef>
+        </p:style>
+        <p:txBody>
+          <a:bodyPr rtlCol="0" anchor="ctr"/>
+          <a:lstStyle/>
+          <a:p>
+            <a:pPr algn="ctr"/>
+          </a:p>
+        </p:txBody>
+      </p:sp>
+      <p:sp>
+        <p:nvSpPr>
+          <p:cNvPr id="9" name="TextBox 8"/>
+          <p:cNvSpPr txBox="1"/>
+          <p:nvPr/>
+        </p:nvSpPr>
+        <p:spPr>
+          <a:xfrm>
+            <a:off x="6400800" y="3474720"/>
+            <a:ext cx="5303520" cy="548640"/>
+          </a:xfrm>
+          <a:prstGeom prst="rect">
+            <a:avLst/>
+          </a:prstGeom>
+          <a:noFill/>
+        </p:spPr>
+        <p:txBody>
+          <a:bodyPr wrap="square">
+            <a:spAutoFit/>
+          </a:bodyPr>
+          <a:lstStyle/>
+          <a:p>
+            <a:pPr algn="ctr">
+              <a:defRPr sz="1400">
+                <a:solidFill>
+                  <a:srgbClr val="8892B0"/>
+                </a:solidFill>
+              </a:defRPr>
+            </a:pPr>
+            <a:r>
+              <a:t>Team Photo / Project Photo</a:t>
+            </a:r>
+          </a:p>
+        </p:txBody>
+      </p:sp>
+      <p:sp>
+        <p:nvSpPr>
+          <p:cNvPr id="10" name="TextBox 9"/>
+          <p:cNvSpPr txBox="1"/>
+          <p:nvPr/>
+        </p:nvSpPr>
+        <p:spPr>
+          <a:xfrm>
+            <a:off x="731520" y="4937760"/>
+            <a:ext cx="10058400" cy="457200"/>
+          </a:xfrm>
+          <a:prstGeom prst="rect">
+            <a:avLst/>
+          </a:prstGeom>
+          <a:noFill/>
+        </p:spPr>
+        <p:txBody>
+          <a:bodyPr wrap="square">
+            <a:spAutoFit/>
+          </a:bodyPr>
+          <a:lstStyle/>
+          <a:p>
+            <a:pPr algn="l">
+              <a:defRPr sz="1400" b="0">
+                <a:solidFill>
+                  <a:srgbClr val="8892B0"/>
+                </a:solidFill>
+              </a:defRPr>
+            </a:pPr>
+            <a:r>
+              <a:t>github.com/Sapnap67/FocusBuddy</a:t>
+            </a:r>
+          </a:p>
+        </p:txBody>
+      </p:sp>
+      <p:sp>
+        <p:nvSpPr>
+          <p:cNvPr id="11" name="TextBox 10"/>
+          <p:cNvSpPr txBox="1"/>
+          <p:nvPr/>
+        </p:nvSpPr>
+        <p:spPr>
+          <a:xfrm>
+            <a:off x="731520" y="5394960"/>
+            <a:ext cx="10058400" cy="457200"/>
+          </a:xfrm>
+          <a:prstGeom prst="rect">
+            <a:avLst/>
+          </a:prstGeom>
+          <a:noFill/>
+        </p:spPr>
+        <p:txBody>
+          <a:bodyPr wrap="square">
+            <a:spAutoFit/>
+          </a:bodyPr>
+          <a:lstStyle/>
+          <a:p>
+            <a:pPr algn="l">
+              <a:defRPr sz="2000" b="1">
+                <a:solidFill>
+                  <a:srgbClr val="FF6B35"/>
+                </a:solidFill>
+              </a:defRPr>
+            </a:pPr>
+            <a:r>
+              <a:t>Thank you, HHCC 2026 judges! 🐱</a:t>
+            </a:r>
+          </a:p>
+        </p:txBody>
+      </p:sp>
+      <p:sp>
+        <p:nvSpPr>
+          <p:cNvPr id="12" name="TextBox 11"/>
+          <p:cNvSpPr txBox="1"/>
+          <p:nvPr/>
+        </p:nvSpPr>
+        <p:spPr>
+          <a:xfrm>
+            <a:off x="731520" y="5760720"/>
+            <a:ext cx="10058400" cy="365760"/>
+          </a:xfrm>
+          <a:prstGeom prst="rect">
+            <a:avLst/>
+          </a:prstGeom>
+          <a:noFill/>
+        </p:spPr>
+        <p:txBody>
+          <a:bodyPr wrap="square">
+            <a:spAutoFit/>
+          </a:bodyPr>
+          <a:lstStyle/>
+          <a:p>
+            <a:pPr algn="l">
+              <a:defRPr sz="1200" b="0">
+                <a:solidFill>
+                  <a:srgbClr val="8892B0"/>
+                </a:solidFill>
+              </a:defRPr>
+            </a:pPr>
+            <a:r>
+              <a:t>Made with ❤️ by Dream Team · 2026</a:t>
             </a:r>
           </a:p>
         </p:txBody>
@@ -3909,8 +4141,8 @@
 </p:sld>
 </file>
 
-<file path=ppt/slides/slide3.xml><?xml version="1.0" encoding="utf-8"?>
-<p:sld xmlns:a="http://schemas.openxmlformats.org/drawingml/2006/main" xmlns:r="http://schemas.openxmlformats.org/officeDocument/2006/relationships" xmlns:p="http://schemas.openxmlformats.org/presentationml/2006/main">
+<file path=ppt/slides/slide2.xml><?xml version="1.0" encoding="utf-8"?>
+<p:sld xmlns:a="http://schemas.openxmlformats.org/drawingml/2006/main" xmlns:p="http://schemas.openxmlformats.org/presentationml/2006/main" xmlns:r="http://schemas.openxmlformats.org/officeDocument/2006/relationships">
   <p:cSld>
     <p:bg>
       <p:bgPr>
@@ -4001,7 +4233,7 @@
               </a:defRPr>
             </a:pPr>
             <a:r>
-              <a:t>Our Solution</a:t>
+              <a:t>The Problem</a:t>
             </a:r>
           </a:p>
         </p:txBody>
@@ -4014,8 +4246,8 @@
         </p:nvSpPr>
         <p:spPr>
           <a:xfrm>
-            <a:off x="731520" y="1280160"/>
-            <a:ext cx="10515600" cy="731520"/>
+            <a:off x="731520" y="1371600"/>
+            <a:ext cx="10515600" cy="914400"/>
           </a:xfrm>
           <a:prstGeom prst="rect">
             <a:avLst/>
@@ -4029,72 +4261,28 @@
           <a:lstStyle/>
           <a:p>
             <a:pPr algn="l">
-              <a:defRPr sz="2600" b="1">
+              <a:defRPr sz="3200" b="1">
                 <a:solidFill>
                   <a:srgbClr val="FF6B35"/>
                 </a:solidFill>
               </a:defRPr>
             </a:pPr>
             <a:r>
-              <a:t>FocusBuddy — a 3-in-1 closed loop: Detect + Timer + Feedback</a:t>
-            </a:r>
-          </a:p>
-        </p:txBody>
-      </p:sp>
-      <p:sp>
-        <p:nvSpPr>
-          <p:cNvPr id="5" name="Rounded Rectangle 4"/>
-          <p:cNvSpPr/>
-          <p:nvPr/>
-        </p:nvSpPr>
-        <p:spPr>
-          <a:xfrm>
-            <a:off x="457200" y="2377440"/>
-            <a:ext cx="3474720" cy="1097280"/>
-          </a:xfrm>
-          <a:prstGeom prst="roundRect">
-            <a:avLst/>
-          </a:prstGeom>
-          <a:solidFill>
-            <a:srgbClr val="F39C12"/>
-          </a:solidFill>
-          <a:ln>
-            <a:noFill/>
-          </a:ln>
-          <a:effectLst/>
-        </p:spPr>
-        <p:style>
-          <a:lnRef idx="1">
-            <a:schemeClr val="accent1"/>
-          </a:lnRef>
-          <a:fillRef idx="3">
-            <a:schemeClr val="accent1"/>
-          </a:fillRef>
-          <a:effectRef idx="2">
-            <a:schemeClr val="accent1"/>
-          </a:effectRef>
-          <a:fontRef idx="minor">
-            <a:schemeClr val="lt1"/>
-          </a:fontRef>
-        </p:style>
-        <p:txBody>
-          <a:bodyPr rtlCol="0" anchor="ctr"/>
-          <a:lstStyle/>
-          <a:p>
-            <a:pPr algn="ctr"/>
-          </a:p>
-        </p:txBody>
-      </p:sp>
-      <p:sp>
-        <p:nvSpPr>
-          <p:cNvPr id="6" name="TextBox 5"/>
+              <a:t>Do you know how long you've been distracted?</a:t>
+            </a:r>
+          </a:p>
+        </p:txBody>
+      </p:sp>
+      <p:sp>
+        <p:nvSpPr>
+          <p:cNvPr id="5" name="TextBox 4"/>
           <p:cNvSpPr txBox="1"/>
           <p:nvPr/>
         </p:nvSpPr>
         <p:spPr>
           <a:xfrm>
-            <a:off x="640080" y="2468880"/>
-            <a:ext cx="3108960" cy="457200"/>
+            <a:off x="731520" y="2377440"/>
+            <a:ext cx="10515600" cy="4572000"/>
           </a:xfrm>
           <a:prstGeom prst="rect">
             <a:avLst/>
@@ -4107,350 +4295,105 @@
           </a:bodyPr>
           <a:lstStyle/>
           <a:p>
-            <a:pPr algn="l">
-              <a:defRPr sz="1800" b="1">
-                <a:solidFill>
-                  <a:srgbClr val="F39C12"/>
-                </a:solidFill>
-              </a:defRPr>
-            </a:pPr>
-            <a:r>
-              <a:t>Camera Detection</a:t>
-            </a:r>
-          </a:p>
-        </p:txBody>
-      </p:sp>
-      <p:sp>
-        <p:nvSpPr>
-          <p:cNvPr id="7" name="TextBox 6"/>
-          <p:cNvSpPr txBox="1"/>
-          <p:nvPr/>
-        </p:nvSpPr>
-        <p:spPr>
-          <a:xfrm>
-            <a:off x="640080" y="2880360"/>
-            <a:ext cx="3108960" cy="548640"/>
-          </a:xfrm>
-          <a:prstGeom prst="rect">
-            <a:avLst/>
-          </a:prstGeom>
-          <a:noFill/>
-        </p:spPr>
-        <p:txBody>
-          <a:bodyPr wrap="square">
-            <a:spAutoFit/>
-          </a:bodyPr>
-          <a:lstStyle/>
-          <a:p>
-            <a:pPr algn="l">
-              <a:defRPr sz="1400" b="0">
-                <a:solidFill>
-                  <a:srgbClr val="E0E0E0"/>
-                </a:solidFill>
-              </a:defRPr>
-            </a:pPr>
-            <a:r>
-              <a:t>MediaPipe FaceMesh 468 landmarks</a:t>
-            </a:r>
-            <a:br/>
-            <a:r>
-              <a:t>Face orientation + Eye closure + Head turn</a:t>
-            </a:r>
-          </a:p>
-        </p:txBody>
-      </p:sp>
-      <p:sp>
-        <p:nvSpPr>
-          <p:cNvPr id="8" name="Rounded Rectangle 7"/>
-          <p:cNvSpPr/>
-          <p:nvPr/>
-        </p:nvSpPr>
-        <p:spPr>
-          <a:xfrm>
-            <a:off x="4389120" y="2377440"/>
-            <a:ext cx="3474720" cy="1097280"/>
-          </a:xfrm>
-          <a:prstGeom prst="roundRect">
-            <a:avLst/>
-          </a:prstGeom>
-          <a:solidFill>
-            <a:srgbClr val="3498DB"/>
-          </a:solidFill>
-          <a:ln>
-            <a:noFill/>
-          </a:ln>
-          <a:effectLst/>
-        </p:spPr>
-        <p:style>
-          <a:lnRef idx="1">
-            <a:schemeClr val="accent1"/>
-          </a:lnRef>
-          <a:fillRef idx="3">
-            <a:schemeClr val="accent1"/>
-          </a:fillRef>
-          <a:effectRef idx="2">
-            <a:schemeClr val="accent1"/>
-          </a:effectRef>
-          <a:fontRef idx="minor">
-            <a:schemeClr val="lt1"/>
-          </a:fontRef>
-        </p:style>
-        <p:txBody>
-          <a:bodyPr rtlCol="0" anchor="ctr"/>
-          <a:lstStyle/>
-          <a:p>
-            <a:pPr algn="ctr"/>
-          </a:p>
-        </p:txBody>
-      </p:sp>
-      <p:sp>
-        <p:nvSpPr>
-          <p:cNvPr id="9" name="TextBox 8"/>
-          <p:cNvSpPr txBox="1"/>
-          <p:nvPr/>
-        </p:nvSpPr>
-        <p:spPr>
-          <a:xfrm>
-            <a:off x="4572000" y="2468880"/>
-            <a:ext cx="3108960" cy="457200"/>
-          </a:xfrm>
-          <a:prstGeom prst="rect">
-            <a:avLst/>
-          </a:prstGeom>
-          <a:noFill/>
-        </p:spPr>
-        <p:txBody>
-          <a:bodyPr wrap="square">
-            <a:spAutoFit/>
-          </a:bodyPr>
-          <a:lstStyle/>
-          <a:p>
-            <a:pPr algn="l">
-              <a:defRPr sz="1800" b="1">
-                <a:solidFill>
-                  <a:srgbClr val="3498DB"/>
-                </a:solidFill>
-              </a:defRPr>
-            </a:pPr>
-            <a:r>
-              <a:t>Status Engine</a:t>
-            </a:r>
-          </a:p>
-        </p:txBody>
-      </p:sp>
-      <p:sp>
-        <p:nvSpPr>
-          <p:cNvPr id="10" name="TextBox 9"/>
-          <p:cNvSpPr txBox="1"/>
-          <p:nvPr/>
-        </p:nvSpPr>
-        <p:spPr>
-          <a:xfrm>
-            <a:off x="4572000" y="2880360"/>
-            <a:ext cx="3108960" cy="548640"/>
-          </a:xfrm>
-          <a:prstGeom prst="rect">
-            <a:avLst/>
-          </a:prstGeom>
-          <a:noFill/>
-        </p:spPr>
-        <p:txBody>
-          <a:bodyPr wrap="square">
-            <a:spAutoFit/>
-          </a:bodyPr>
-          <a:lstStyle/>
-          <a:p>
-            <a:pPr algn="l">
-              <a:defRPr sz="1400" b="0">
-                <a:solidFill>
-                  <a:srgbClr val="E0E0E0"/>
-                </a:solidFill>
-              </a:defRPr>
-            </a:pPr>
-            <a:r>
-              <a:t>Focused / Distracted / Away</a:t>
-            </a:r>
-          </a:p>
-        </p:txBody>
-      </p:sp>
-      <p:sp>
-        <p:nvSpPr>
-          <p:cNvPr id="11" name="Rounded Rectangle 10"/>
-          <p:cNvSpPr/>
-          <p:nvPr/>
-        </p:nvSpPr>
-        <p:spPr>
-          <a:xfrm>
-            <a:off x="8321040" y="2377440"/>
-            <a:ext cx="3474720" cy="1097280"/>
-          </a:xfrm>
-          <a:prstGeom prst="roundRect">
-            <a:avLst/>
-          </a:prstGeom>
-          <a:solidFill>
-            <a:srgbClr val="27AE60"/>
-          </a:solidFill>
-          <a:ln>
-            <a:noFill/>
-          </a:ln>
-          <a:effectLst/>
-        </p:spPr>
-        <p:style>
-          <a:lnRef idx="1">
-            <a:schemeClr val="accent1"/>
-          </a:lnRef>
-          <a:fillRef idx="3">
-            <a:schemeClr val="accent1"/>
-          </a:fillRef>
-          <a:effectRef idx="2">
-            <a:schemeClr val="accent1"/>
-          </a:effectRef>
-          <a:fontRef idx="minor">
-            <a:schemeClr val="lt1"/>
-          </a:fontRef>
-        </p:style>
-        <p:txBody>
-          <a:bodyPr rtlCol="0" anchor="ctr"/>
-          <a:lstStyle/>
-          <a:p>
-            <a:pPr algn="ctr"/>
-          </a:p>
-        </p:txBody>
-      </p:sp>
-      <p:sp>
-        <p:nvSpPr>
-          <p:cNvPr id="12" name="TextBox 11"/>
-          <p:cNvSpPr txBox="1"/>
-          <p:nvPr/>
-        </p:nvSpPr>
-        <p:spPr>
-          <a:xfrm>
-            <a:off x="8503920" y="2468880"/>
-            <a:ext cx="3108960" cy="457200"/>
-          </a:xfrm>
-          <a:prstGeom prst="rect">
-            <a:avLst/>
-          </a:prstGeom>
-          <a:noFill/>
-        </p:spPr>
-        <p:txBody>
-          <a:bodyPr wrap="square">
-            <a:spAutoFit/>
-          </a:bodyPr>
-          <a:lstStyle/>
-          <a:p>
-            <a:pPr algn="l">
-              <a:defRPr sz="1800" b="1">
-                <a:solidFill>
-                  <a:srgbClr val="27AE60"/>
-                </a:solidFill>
-              </a:defRPr>
-            </a:pPr>
-            <a:r>
-              <a:t>Triple Feedback</a:t>
-            </a:r>
-          </a:p>
-        </p:txBody>
-      </p:sp>
-      <p:sp>
-        <p:nvSpPr>
-          <p:cNvPr id="13" name="TextBox 12"/>
-          <p:cNvSpPr txBox="1"/>
-          <p:nvPr/>
-        </p:nvSpPr>
-        <p:spPr>
-          <a:xfrm>
-            <a:off x="8503920" y="2880360"/>
-            <a:ext cx="3108960" cy="548640"/>
-          </a:xfrm>
-          <a:prstGeom prst="rect">
-            <a:avLst/>
-          </a:prstGeom>
-          <a:noFill/>
-        </p:spPr>
-        <p:txBody>
-          <a:bodyPr wrap="square">
-            <a:spAutoFit/>
-          </a:bodyPr>
-          <a:lstStyle/>
-          <a:p>
-            <a:pPr algn="l">
-              <a:defRPr sz="1400" b="0">
-                <a:solidFill>
-                  <a:srgbClr val="E0E0E0"/>
-                </a:solidFill>
-              </a:defRPr>
-            </a:pPr>
-            <a:r>
-              <a:t>Pomodoro Timer + Pet Expression + Data Charts</a:t>
-            </a:r>
-          </a:p>
-        </p:txBody>
-      </p:sp>
-      <p:sp>
-        <p:nvSpPr>
-          <p:cNvPr id="14" name="TextBox 13"/>
-          <p:cNvSpPr txBox="1"/>
-          <p:nvPr/>
-        </p:nvSpPr>
-        <p:spPr>
-          <a:xfrm>
-            <a:off x="731520" y="3840480"/>
-            <a:ext cx="10515600" cy="4114800"/>
-          </a:xfrm>
-          <a:prstGeom prst="rect">
-            <a:avLst/>
-          </a:prstGeom>
-          <a:noFill/>
-        </p:spPr>
-        <p:txBody>
-          <a:bodyPr wrap="square">
-            <a:spAutoFit/>
-          </a:bodyPr>
-          <a:lstStyle/>
-          <a:p>
             <a:pPr>
               <a:spcAft>
-                <a:spcPts val="800"/>
+                <a:spcPts val="600"/>
               </a:spcAft>
-              <a:defRPr sz="1600">
+              <a:defRPr sz="1500">
                 <a:solidFill>
                   <a:srgbClr val="E0E0E0"/>
                 </a:solidFill>
               </a:defRPr>
             </a:pPr>
             <a:r>
-              <a:t>Not just a timer — it knows if you're actually watching the screen</a:t>
+              <a:t>We get distracted without realizing it — pick up phone, lose 30 min</a:t>
             </a:r>
           </a:p>
           <a:p>
             <a:pPr>
               <a:spcAft>
-                <a:spcPts val="800"/>
+                <a:spcPts val="600"/>
               </a:spcAft>
-              <a:defRPr sz="1600">
+              <a:defRPr sz="1500">
                 <a:solidFill>
                   <a:srgbClr val="E0E0E0"/>
                 </a:solidFill>
               </a:defRPr>
             </a:pPr>
             <a:r>
-              <a:t>Not just a camera — the pixel pet reacts when you get distracted</a:t>
+              <a:t>Pomodoro timers only count time, they don't check if you're focused</a:t>
             </a:r>
           </a:p>
           <a:p>
             <a:pPr>
               <a:spcAft>
-                <a:spcPts val="800"/>
+                <a:spcPts val="600"/>
               </a:spcAft>
-              <a:defRPr sz="1600">
+              <a:defRPr sz="1500">
                 <a:solidFill>
                   <a:srgbClr val="E0E0E0"/>
                 </a:solidFill>
               </a:defRPr>
             </a:pPr>
             <a:r>
-              <a:t>Detection + Feedback + Motivation — in one closed loop</a:t>
+              <a:t>No data feedback — no idea how much you actually studied today</a:t>
+            </a:r>
+          </a:p>
+          <a:p>
+            <a:pPr>
+              <a:spcAft>
+                <a:spcPts val="600"/>
+              </a:spcAft>
+              <a:defRPr sz="1500">
+                <a:solidFill>
+                  <a:srgbClr val="E0E0E0"/>
+                </a:solidFill>
+              </a:defRPr>
+            </a:pPr>
+            <a:r>
+              <a:t>Phone reminders are annoying; we ignore or dismiss them</a:t>
+            </a:r>
+          </a:p>
+          <a:p>
+            <a:pPr>
+              <a:spcAft>
+                <a:spcPts val="600"/>
+              </a:spcAft>
+              <a:defRPr sz="1500">
+                <a:solidFill>
+                  <a:srgbClr val="E0E0E0"/>
+                </a:solidFill>
+              </a:defRPr>
+            </a:pPr>
+          </a:p>
+          <a:p>
+            <a:pPr>
+              <a:spcAft>
+                <a:spcPts val="600"/>
+              </a:spcAft>
+              <a:defRPr sz="1500">
+                <a:solidFill>
+                  <a:srgbClr val="E0E0E0"/>
+                </a:solidFill>
+              </a:defRPr>
+            </a:pPr>
+            <a:r>
+              <a:t>Average: 1 distraction every 15 minutes during self-study</a:t>
+            </a:r>
+          </a:p>
+          <a:p>
+            <a:pPr>
+              <a:spcAft>
+                <a:spcPts val="600"/>
+              </a:spcAft>
+              <a:defRPr sz="1500">
+                <a:solidFill>
+                  <a:srgbClr val="E0E0E0"/>
+                </a:solidFill>
+              </a:defRPr>
+            </a:pPr>
+            <a:r>
+              <a:t>Solution: A focus companion that gives REAL-TIME FEEDBACK</a:t>
             </a:r>
           </a:p>
         </p:txBody>
@@ -4463,8 +4406,8 @@
 </p:sld>
 </file>
 
-<file path=ppt/slides/slide4.xml><?xml version="1.0" encoding="utf-8"?>
-<p:sld xmlns:a="http://schemas.openxmlformats.org/drawingml/2006/main" xmlns:r="http://schemas.openxmlformats.org/officeDocument/2006/relationships" xmlns:p="http://schemas.openxmlformats.org/presentationml/2006/main">
+<file path=ppt/slides/slide3.xml><?xml version="1.0" encoding="utf-8"?>
+<p:sld xmlns:a="http://schemas.openxmlformats.org/drawingml/2006/main" xmlns:p="http://schemas.openxmlformats.org/presentationml/2006/main" xmlns:r="http://schemas.openxmlformats.org/officeDocument/2006/relationships">
   <p:cSld>
     <p:bg>
       <p:bgPr>
@@ -4555,7 +4498,7 @@
               </a:defRPr>
             </a:pPr>
             <a:r>
-              <a:t>Web Dashboard</a:t>
+              <a:t>Our Solution</a:t>
             </a:r>
           </a:p>
         </p:txBody>
@@ -4568,8 +4511,8 @@
         </p:nvSpPr>
         <p:spPr>
           <a:xfrm>
-            <a:off x="731520" y="1188720"/>
-            <a:ext cx="10058400" cy="640080"/>
+            <a:off x="731520" y="1280160"/>
+            <a:ext cx="10515600" cy="731520"/>
           </a:xfrm>
           <a:prstGeom prst="rect">
             <a:avLst/>
@@ -4583,28 +4526,72 @@
           <a:lstStyle/>
           <a:p>
             <a:pPr algn="l">
-              <a:defRPr sz="2000" b="0">
+              <a:defRPr sz="2600" b="1">
                 <a:solidFill>
                   <a:srgbClr val="FF6B35"/>
                 </a:solidFill>
               </a:defRPr>
             </a:pPr>
             <a:r>
-              <a:t>Live Demo: Full flow from open to pomodoro complete</a:t>
-            </a:r>
-          </a:p>
-        </p:txBody>
-      </p:sp>
-      <p:sp>
-        <p:nvSpPr>
-          <p:cNvPr id="5" name="TextBox 4"/>
+              <a:t>FocusBuddy — a 3-in-1 closed loop: Detect + Timer + Feedback</a:t>
+            </a:r>
+          </a:p>
+        </p:txBody>
+      </p:sp>
+      <p:sp>
+        <p:nvSpPr>
+          <p:cNvPr id="5" name="Rounded Rectangle 4"/>
+          <p:cNvSpPr/>
+          <p:nvPr/>
+        </p:nvSpPr>
+        <p:spPr>
+          <a:xfrm>
+            <a:off x="457200" y="2194560"/>
+            <a:ext cx="3474720" cy="1280160"/>
+          </a:xfrm>
+          <a:prstGeom prst="roundRect">
+            <a:avLst/>
+          </a:prstGeom>
+          <a:solidFill>
+            <a:srgbClr val="F39C12"/>
+          </a:solidFill>
+          <a:ln>
+            <a:noFill/>
+          </a:ln>
+          <a:effectLst/>
+        </p:spPr>
+        <p:style>
+          <a:lnRef idx="1">
+            <a:schemeClr val="accent1"/>
+          </a:lnRef>
+          <a:fillRef idx="3">
+            <a:schemeClr val="accent1"/>
+          </a:fillRef>
+          <a:effectRef idx="2">
+            <a:schemeClr val="accent1"/>
+          </a:effectRef>
+          <a:fontRef idx="minor">
+            <a:schemeClr val="lt1"/>
+          </a:fontRef>
+        </p:style>
+        <p:txBody>
+          <a:bodyPr rtlCol="0" anchor="ctr"/>
+          <a:lstStyle/>
+          <a:p>
+            <a:pPr algn="ctr"/>
+          </a:p>
+        </p:txBody>
+      </p:sp>
+      <p:sp>
+        <p:nvSpPr>
+          <p:cNvPr id="6" name="TextBox 5"/>
           <p:cNvSpPr txBox="1"/>
           <p:nvPr/>
         </p:nvSpPr>
         <p:spPr>
           <a:xfrm>
-            <a:off x="731520" y="1828800"/>
-            <a:ext cx="10515600" cy="4114800"/>
+            <a:off x="640080" y="2331720"/>
+            <a:ext cx="3108960" cy="365760"/>
           </a:xfrm>
           <a:prstGeom prst="rect">
             <a:avLst/>
@@ -4617,108 +4604,431 @@
           </a:bodyPr>
           <a:lstStyle/>
           <a:p>
+            <a:pPr algn="l">
+              <a:defRPr sz="1700" b="1">
+                <a:solidFill>
+                  <a:srgbClr val="F39C12"/>
+                </a:solidFill>
+              </a:defRPr>
+            </a:pPr>
+            <a:r>
+              <a:t>Camera Detection</a:t>
+            </a:r>
+          </a:p>
+        </p:txBody>
+      </p:sp>
+      <p:sp>
+        <p:nvSpPr>
+          <p:cNvPr id="7" name="TextBox 6"/>
+          <p:cNvSpPr txBox="1"/>
+          <p:nvPr/>
+        </p:nvSpPr>
+        <p:spPr>
+          <a:xfrm>
+            <a:off x="640080" y="2697480"/>
+            <a:ext cx="3108960" cy="640080"/>
+          </a:xfrm>
+          <a:prstGeom prst="rect">
+            <a:avLst/>
+          </a:prstGeom>
+          <a:noFill/>
+        </p:spPr>
+        <p:txBody>
+          <a:bodyPr wrap="square">
+            <a:spAutoFit/>
+          </a:bodyPr>
+          <a:lstStyle/>
+          <a:p>
+            <a:pPr algn="l">
+              <a:defRPr sz="1300" b="0">
+                <a:solidFill>
+                  <a:srgbClr val="E0E0E0"/>
+                </a:solidFill>
+              </a:defRPr>
+            </a:pPr>
+            <a:r>
+              <a:t>MediaPipe FaceMesh 468 landmarks</a:t>
+            </a:r>
+            <a:br/>
+            <a:r>
+              <a:t>Face orientation + Eye closure + Head turn</a:t>
+            </a:r>
+          </a:p>
+        </p:txBody>
+      </p:sp>
+      <p:sp>
+        <p:nvSpPr>
+          <p:cNvPr id="8" name="Rounded Rectangle 7"/>
+          <p:cNvSpPr/>
+          <p:nvPr/>
+        </p:nvSpPr>
+        <p:spPr>
+          <a:xfrm>
+            <a:off x="4389120" y="2194560"/>
+            <a:ext cx="3474720" cy="1280160"/>
+          </a:xfrm>
+          <a:prstGeom prst="roundRect">
+            <a:avLst/>
+          </a:prstGeom>
+          <a:solidFill>
+            <a:srgbClr val="3498DB"/>
+          </a:solidFill>
+          <a:ln>
+            <a:noFill/>
+          </a:ln>
+          <a:effectLst/>
+        </p:spPr>
+        <p:style>
+          <a:lnRef idx="1">
+            <a:schemeClr val="accent1"/>
+          </a:lnRef>
+          <a:fillRef idx="3">
+            <a:schemeClr val="accent1"/>
+          </a:fillRef>
+          <a:effectRef idx="2">
+            <a:schemeClr val="accent1"/>
+          </a:effectRef>
+          <a:fontRef idx="minor">
+            <a:schemeClr val="lt1"/>
+          </a:fontRef>
+        </p:style>
+        <p:txBody>
+          <a:bodyPr rtlCol="0" anchor="ctr"/>
+          <a:lstStyle/>
+          <a:p>
+            <a:pPr algn="ctr"/>
+          </a:p>
+        </p:txBody>
+      </p:sp>
+      <p:sp>
+        <p:nvSpPr>
+          <p:cNvPr id="9" name="TextBox 8"/>
+          <p:cNvSpPr txBox="1"/>
+          <p:nvPr/>
+        </p:nvSpPr>
+        <p:spPr>
+          <a:xfrm>
+            <a:off x="4572000" y="2331720"/>
+            <a:ext cx="3108960" cy="365760"/>
+          </a:xfrm>
+          <a:prstGeom prst="rect">
+            <a:avLst/>
+          </a:prstGeom>
+          <a:noFill/>
+        </p:spPr>
+        <p:txBody>
+          <a:bodyPr wrap="square">
+            <a:spAutoFit/>
+          </a:bodyPr>
+          <a:lstStyle/>
+          <a:p>
+            <a:pPr algn="l">
+              <a:defRPr sz="1700" b="1">
+                <a:solidFill>
+                  <a:srgbClr val="3498DB"/>
+                </a:solidFill>
+              </a:defRPr>
+            </a:pPr>
+            <a:r>
+              <a:t>Status Engine</a:t>
+            </a:r>
+          </a:p>
+        </p:txBody>
+      </p:sp>
+      <p:sp>
+        <p:nvSpPr>
+          <p:cNvPr id="10" name="TextBox 9"/>
+          <p:cNvSpPr txBox="1"/>
+          <p:nvPr/>
+        </p:nvSpPr>
+        <p:spPr>
+          <a:xfrm>
+            <a:off x="4572000" y="2697480"/>
+            <a:ext cx="3108960" cy="640080"/>
+          </a:xfrm>
+          <a:prstGeom prst="rect">
+            <a:avLst/>
+          </a:prstGeom>
+          <a:noFill/>
+        </p:spPr>
+        <p:txBody>
+          <a:bodyPr wrap="square">
+            <a:spAutoFit/>
+          </a:bodyPr>
+          <a:lstStyle/>
+          <a:p>
+            <a:pPr algn="l">
+              <a:defRPr sz="1300" b="0">
+                <a:solidFill>
+                  <a:srgbClr val="E0E0E0"/>
+                </a:solidFill>
+              </a:defRPr>
+            </a:pPr>
+            <a:r>
+              <a:t>Focused / Distracted / Away</a:t>
+            </a:r>
+          </a:p>
+        </p:txBody>
+      </p:sp>
+      <p:sp>
+        <p:nvSpPr>
+          <p:cNvPr id="11" name="Rounded Rectangle 10"/>
+          <p:cNvSpPr/>
+          <p:nvPr/>
+        </p:nvSpPr>
+        <p:spPr>
+          <a:xfrm>
+            <a:off x="8321040" y="2194560"/>
+            <a:ext cx="3474720" cy="1280160"/>
+          </a:xfrm>
+          <a:prstGeom prst="roundRect">
+            <a:avLst/>
+          </a:prstGeom>
+          <a:solidFill>
+            <a:srgbClr val="27AE60"/>
+          </a:solidFill>
+          <a:ln>
+            <a:noFill/>
+          </a:ln>
+          <a:effectLst/>
+        </p:spPr>
+        <p:style>
+          <a:lnRef idx="1">
+            <a:schemeClr val="accent1"/>
+          </a:lnRef>
+          <a:fillRef idx="3">
+            <a:schemeClr val="accent1"/>
+          </a:fillRef>
+          <a:effectRef idx="2">
+            <a:schemeClr val="accent1"/>
+          </a:effectRef>
+          <a:fontRef idx="minor">
+            <a:schemeClr val="lt1"/>
+          </a:fontRef>
+        </p:style>
+        <p:txBody>
+          <a:bodyPr rtlCol="0" anchor="ctr"/>
+          <a:lstStyle/>
+          <a:p>
+            <a:pPr algn="ctr"/>
+          </a:p>
+        </p:txBody>
+      </p:sp>
+      <p:sp>
+        <p:nvSpPr>
+          <p:cNvPr id="12" name="TextBox 11"/>
+          <p:cNvSpPr txBox="1"/>
+          <p:nvPr/>
+        </p:nvSpPr>
+        <p:spPr>
+          <a:xfrm>
+            <a:off x="8503920" y="2331720"/>
+            <a:ext cx="3108960" cy="365760"/>
+          </a:xfrm>
+          <a:prstGeom prst="rect">
+            <a:avLst/>
+          </a:prstGeom>
+          <a:noFill/>
+        </p:spPr>
+        <p:txBody>
+          <a:bodyPr wrap="square">
+            <a:spAutoFit/>
+          </a:bodyPr>
+          <a:lstStyle/>
+          <a:p>
+            <a:pPr algn="l">
+              <a:defRPr sz="1700" b="1">
+                <a:solidFill>
+                  <a:srgbClr val="27AE60"/>
+                </a:solidFill>
+              </a:defRPr>
+            </a:pPr>
+            <a:r>
+              <a:t>Triple Feedback</a:t>
+            </a:r>
+          </a:p>
+        </p:txBody>
+      </p:sp>
+      <p:sp>
+        <p:nvSpPr>
+          <p:cNvPr id="13" name="TextBox 12"/>
+          <p:cNvSpPr txBox="1"/>
+          <p:nvPr/>
+        </p:nvSpPr>
+        <p:spPr>
+          <a:xfrm>
+            <a:off x="8503920" y="2697480"/>
+            <a:ext cx="3108960" cy="640080"/>
+          </a:xfrm>
+          <a:prstGeom prst="rect">
+            <a:avLst/>
+          </a:prstGeom>
+          <a:noFill/>
+        </p:spPr>
+        <p:txBody>
+          <a:bodyPr wrap="square">
+            <a:spAutoFit/>
+          </a:bodyPr>
+          <a:lstStyle/>
+          <a:p>
+            <a:pPr algn="l">
+              <a:defRPr sz="1300" b="0">
+                <a:solidFill>
+                  <a:srgbClr val="E0E0E0"/>
+                </a:solidFill>
+              </a:defRPr>
+            </a:pPr>
+            <a:r>
+              <a:t>Pomodoro Timer + Pet Expression + Data Charts</a:t>
+            </a:r>
+          </a:p>
+        </p:txBody>
+      </p:sp>
+      <p:sp>
+        <p:nvSpPr>
+          <p:cNvPr id="14" name="TextBox 13"/>
+          <p:cNvSpPr txBox="1"/>
+          <p:nvPr/>
+        </p:nvSpPr>
+        <p:spPr>
+          <a:xfrm>
+            <a:off x="731520" y="3749039"/>
+            <a:ext cx="10515600" cy="4572000"/>
+          </a:xfrm>
+          <a:prstGeom prst="rect">
+            <a:avLst/>
+          </a:prstGeom>
+          <a:noFill/>
+        </p:spPr>
+        <p:txBody>
+          <a:bodyPr wrap="square">
+            <a:spAutoFit/>
+          </a:bodyPr>
+          <a:lstStyle/>
+          <a:p>
             <a:pPr>
               <a:spcAft>
-                <a:spcPts val="800"/>
+                <a:spcPts val="600"/>
               </a:spcAft>
-              <a:defRPr sz="1600">
+              <a:defRPr sz="1400">
                 <a:solidFill>
                   <a:srgbClr val="E0E0E0"/>
                 </a:solidFill>
               </a:defRPr>
             </a:pPr>
             <a:r>
-              <a:t>Open page -&gt; camera permission -&gt; FaceMesh loads automatically</a:t>
+              <a:t>Not just a timer — it knows if you're actually watching the screen</a:t>
             </a:r>
           </a:p>
           <a:p>
             <a:pPr>
               <a:spcAft>
-                <a:spcPts val="800"/>
+                <a:spcPts val="600"/>
               </a:spcAft>
-              <a:defRPr sz="1600">
+              <a:defRPr sz="1400">
                 <a:solidFill>
                   <a:srgbClr val="E0E0E0"/>
                 </a:solidFill>
               </a:defRPr>
             </a:pPr>
             <a:r>
-              <a:t>Click Start Focus -&gt; Pomodoro timer 25:00 begins counting down</a:t>
+              <a:t>Not just a camera — the pixel pet reacts when you get distracted</a:t>
             </a:r>
           </a:p>
           <a:p>
             <a:pPr>
               <a:spcAft>
-                <a:spcPts val="800"/>
+                <a:spcPts val="600"/>
               </a:spcAft>
-              <a:defRPr sz="1600">
+              <a:defRPr sz="1400">
                 <a:solidFill>
                   <a:srgbClr val="E0E0E0"/>
                 </a:solidFill>
               </a:defRPr>
             </a:pPr>
             <a:r>
-              <a:t>Status indicator: Focused / Distracted / Away / Idle</a:t>
-            </a:r>
-          </a:p>
-          <a:p>
-            <a:pPr>
-              <a:spcAft>
-                <a:spcPts val="800"/>
-              </a:spcAft>
-              <a:defRPr sz="1600">
-                <a:solidFill>
-                  <a:srgbClr val="E0E0E0"/>
-                </a:solidFill>
-              </a:defRPr>
-            </a:pPr>
-            <a:r>
-              <a:t>Real-time stats: focus time, distraction count, completed pomodoros</a:t>
-            </a:r>
-          </a:p>
-          <a:p>
-            <a:pPr>
-              <a:spcAft>
-                <a:spcPts val="800"/>
-              </a:spcAft>
-              <a:defRPr sz="1600">
-                <a:solidFill>
-                  <a:srgbClr val="E0E0E0"/>
-                </a:solidFill>
-              </a:defRPr>
-            </a:pPr>
-            <a:r>
-              <a:t>Chart.js pie chart (Focus vs Distraction) + 7-day bar chart</a:t>
-            </a:r>
-          </a:p>
-          <a:p>
-            <a:pPr>
-              <a:spcAft>
-                <a:spcPts val="800"/>
-              </a:spcAft>
-              <a:defRPr sz="1600">
-                <a:solidFill>
-                  <a:srgbClr val="E0E0E0"/>
-                </a:solidFill>
-              </a:defRPr>
-            </a:pPr>
-            <a:r>
-              <a:t>Daily Plan: type prompts, auto-generate todo list with time estimates</a:t>
-            </a:r>
-          </a:p>
-          <a:p>
-            <a:pPr>
-              <a:spcAft>
-                <a:spcPts val="800"/>
-              </a:spcAft>
-              <a:defRPr sz="1600">
-                <a:solidFill>
-                  <a:srgbClr val="E0E0E0"/>
-                </a:solidFill>
-              </a:defRPr>
-            </a:pPr>
-            <a:r>
-              <a:t>Pomodoro complete -&gt; celebration animation + desktop notification</a:t>
+              <a:t>Detection + Feedback + Motivation — in one closed loop</a:t>
+            </a:r>
+          </a:p>
+        </p:txBody>
+      </p:sp>
+      <p:sp>
+        <p:nvSpPr>
+          <p:cNvPr id="15" name="Rounded Rectangle 14"/>
+          <p:cNvSpPr/>
+          <p:nvPr/>
+        </p:nvSpPr>
+        <p:spPr>
+          <a:xfrm>
+            <a:off x="731520" y="4389120"/>
+            <a:ext cx="10515600" cy="2011680"/>
+          </a:xfrm>
+          <a:prstGeom prst="roundRect">
+            <a:avLst/>
+          </a:prstGeom>
+          <a:solidFill>
+            <a:srgbClr val="202A44"/>
+          </a:solidFill>
+          <a:ln w="19050">
+            <a:solidFill>
+              <a:srgbClr val="8892B0"/>
+            </a:solidFill>
+          </a:ln>
+          <a:effectLst/>
+        </p:spPr>
+        <p:style>
+          <a:lnRef idx="1">
+            <a:schemeClr val="accent1"/>
+          </a:lnRef>
+          <a:fillRef idx="3">
+            <a:schemeClr val="accent1"/>
+          </a:fillRef>
+          <a:effectRef idx="2">
+            <a:schemeClr val="accent1"/>
+          </a:effectRef>
+          <a:fontRef idx="minor">
+            <a:schemeClr val="lt1"/>
+          </a:fontRef>
+        </p:style>
+        <p:txBody>
+          <a:bodyPr rtlCol="0" anchor="ctr"/>
+          <a:lstStyle/>
+          <a:p>
+            <a:pPr algn="ctr"/>
+          </a:p>
+        </p:txBody>
+      </p:sp>
+      <p:sp>
+        <p:nvSpPr>
+          <p:cNvPr id="16" name="TextBox 15"/>
+          <p:cNvSpPr txBox="1"/>
+          <p:nvPr/>
+        </p:nvSpPr>
+        <p:spPr>
+          <a:xfrm>
+            <a:off x="731520" y="5120640"/>
+            <a:ext cx="10515600" cy="548640"/>
+          </a:xfrm>
+          <a:prstGeom prst="rect">
+            <a:avLst/>
+          </a:prstGeom>
+          <a:noFill/>
+        </p:spPr>
+        <p:txBody>
+          <a:bodyPr wrap="square">
+            <a:spAutoFit/>
+          </a:bodyPr>
+          <a:lstStyle/>
+          <a:p>
+            <a:pPr algn="ctr">
+              <a:defRPr sz="1400">
+                <a:solidFill>
+                  <a:srgbClr val="8892B0"/>
+                </a:solidFill>
+              </a:defRPr>
+            </a:pPr>
+            <a:r>
+              <a:t>System Flow (Detection -&gt; Judgment -&gt; Feedback -&gt; Motivation)</a:t>
             </a:r>
           </a:p>
         </p:txBody>
@@ -4731,8 +5041,8 @@
 </p:sld>
 </file>
 
-<file path=ppt/slides/slide5.xml><?xml version="1.0" encoding="utf-8"?>
-<p:sld xmlns:a="http://schemas.openxmlformats.org/drawingml/2006/main" xmlns:r="http://schemas.openxmlformats.org/officeDocument/2006/relationships" xmlns:p="http://schemas.openxmlformats.org/presentationml/2006/main">
+<file path=ppt/slides/slide4.xml><?xml version="1.0" encoding="utf-8"?>
+<p:sld xmlns:a="http://schemas.openxmlformats.org/drawingml/2006/main" xmlns:p="http://schemas.openxmlformats.org/presentationml/2006/main" xmlns:r="http://schemas.openxmlformats.org/officeDocument/2006/relationships">
   <p:cSld>
     <p:bg>
       <p:bgPr>
@@ -4823,7 +5133,7 @@
               </a:defRPr>
             </a:pPr>
             <a:r>
-              <a:t>ESP32 Pixel Pet</a:t>
+              <a:t>Web Dashboard</a:t>
             </a:r>
           </a:p>
         </p:txBody>
@@ -4836,8 +5146,8 @@
         </p:nvSpPr>
         <p:spPr>
           <a:xfrm>
-            <a:off x="731520" y="1188720"/>
-            <a:ext cx="10058400" cy="640080"/>
+            <a:off x="731520" y="1097280"/>
+            <a:ext cx="10058400" cy="548640"/>
           </a:xfrm>
           <a:prstGeom prst="rect">
             <a:avLst/>
@@ -4858,7 +5168,7 @@
               </a:defRPr>
             </a:pPr>
             <a:r>
-              <a:t>Waveshare ESP32-S3-Matrix + 8x8 NeoPixel LED</a:t>
+              <a:t>Live Demo: Full flow from open to pomodoro complete</a:t>
             </a:r>
           </a:p>
         </p:txBody>
@@ -4871,8 +5181,8 @@
         </p:nvSpPr>
         <p:spPr>
           <a:xfrm>
-            <a:off x="731520" y="1828800"/>
-            <a:ext cx="10515600" cy="4114800"/>
+            <a:off x="731520" y="1645920"/>
+            <a:ext cx="5943600" cy="4572000"/>
           </a:xfrm>
           <a:prstGeom prst="rect">
             <a:avLst/>
@@ -4887,160 +5197,276 @@
           <a:p>
             <a:pPr>
               <a:spcAft>
-                <a:spcPts val="800"/>
+                <a:spcPts val="600"/>
               </a:spcAft>
-              <a:defRPr sz="1600">
+              <a:defRPr sz="1300">
                 <a:solidFill>
                   <a:srgbClr val="E0E0E0"/>
                 </a:solidFill>
               </a:defRPr>
             </a:pPr>
             <a:r>
-              <a:t>Happy (Green) — Focused -&gt; occasional blink animation</a:t>
+              <a:t>Open page -&gt; camera permission -&gt; FaceMesh loads automatically</a:t>
             </a:r>
           </a:p>
           <a:p>
             <a:pPr>
               <a:spcAft>
-                <a:spcPts val="800"/>
+                <a:spcPts val="600"/>
               </a:spcAft>
-              <a:defRPr sz="1600">
+              <a:defRPr sz="1300">
                 <a:solidFill>
                   <a:srgbClr val="E0E0E0"/>
                 </a:solidFill>
               </a:defRPr>
             </a:pPr>
             <a:r>
-              <a:t>Worried (Yellow) — Distracted/head turned -&gt; gentle reminder</a:t>
+              <a:t>Click Start Focus -&gt; Pomodoro timer 25:00 begins counting down</a:t>
             </a:r>
           </a:p>
           <a:p>
             <a:pPr>
               <a:spcAft>
-                <a:spcPts val="800"/>
+                <a:spcPts val="600"/>
               </a:spcAft>
-              <a:defRPr sz="1600">
+              <a:defRPr sz="1300">
                 <a:solidFill>
                   <a:srgbClr val="E0E0E0"/>
                 </a:solidFill>
               </a:defRPr>
             </a:pPr>
             <a:r>
-              <a:t>Angry (Red) — Warning -&gt; away &gt; 10 seconds, red flashing</a:t>
+              <a:t>Status indicator: Focused / Distracted / Away / Idle</a:t>
             </a:r>
           </a:p>
           <a:p>
             <a:pPr>
               <a:spcAft>
-                <a:spcPts val="800"/>
+                <a:spcPts val="600"/>
               </a:spcAft>
-              <a:defRPr sz="1600">
+              <a:defRPr sz="1300">
                 <a:solidFill>
                   <a:srgbClr val="E0E0E0"/>
                 </a:solidFill>
               </a:defRPr>
             </a:pPr>
             <a:r>
-              <a:t>Sleeping (Blue) — Away/Idle -&gt; quiet waiting</a:t>
+              <a:t>Real-time stats: focus time, distraction count, completed pomodoros</a:t>
             </a:r>
           </a:p>
           <a:p>
             <a:pPr>
               <a:spcAft>
-                <a:spcPts val="800"/>
+                <a:spcPts val="600"/>
               </a:spcAft>
-              <a:defRPr sz="1600">
+              <a:defRPr sz="1300">
                 <a:solidFill>
                   <a:srgbClr val="E0E0E0"/>
                 </a:solidFill>
               </a:defRPr>
             </a:pPr>
             <a:r>
-              <a:t>Celebrate (Orange) — Pomodoro complete -&gt; 3-frame animation loop (5s)</a:t>
+              <a:t>Chart.js pie chart (Focus vs Distraction) + 7-day bar chart</a:t>
             </a:r>
           </a:p>
           <a:p>
             <a:pPr>
               <a:spcAft>
-                <a:spcPts val="800"/>
+                <a:spcPts val="600"/>
               </a:spcAft>
-              <a:defRPr sz="1600">
+              <a:defRPr sz="1300">
                 <a:solidFill>
                   <a:srgbClr val="E0E0E0"/>
                 </a:solidFill>
               </a:defRPr>
             </a:pPr>
+            <a:r>
+              <a:t>Daily Plan: type prompts, auto-generate todo list with time estimates</a:t>
+            </a:r>
           </a:p>
           <a:p>
             <a:pPr>
               <a:spcAft>
-                <a:spcPts val="800"/>
+                <a:spcPts val="600"/>
               </a:spcAft>
-              <a:defRPr sz="1600">
+              <a:defRPr sz="1300">
                 <a:solidFill>
                   <a:srgbClr val="E0E0E0"/>
                 </a:solidFill>
               </a:defRPr>
             </a:pPr>
             <a:r>
-              <a:t>Digital countdown display — custom 5x3 pixel font rendering</a:t>
-            </a:r>
-          </a:p>
-          <a:p>
-            <a:pPr>
-              <a:spcAft>
-                <a:spcPts val="800"/>
-              </a:spcAft>
-              <a:defRPr sz="1600">
-                <a:solidFill>
-                  <a:srgbClr val="E0E0E0"/>
-                </a:solidFill>
-              </a:defRPr>
-            </a:pPr>
-            <a:r>
-              <a:t>   GET /timer?m=25&amp;s=00 -&gt; two digits + blinking colon</a:t>
-            </a:r>
-          </a:p>
-          <a:p>
-            <a:pPr>
-              <a:spcAft>
-                <a:spcPts val="800"/>
-              </a:spcAft>
-              <a:defRPr sz="1600">
-                <a:solidFill>
-                  <a:srgbClr val="E0E0E0"/>
-                </a:solidFill>
-              </a:defRPr>
-            </a:pPr>
-          </a:p>
-          <a:p>
-            <a:pPr>
-              <a:spcAft>
-                <a:spcPts val="800"/>
-              </a:spcAft>
-              <a:defRPr sz="1600">
-                <a:solidFill>
-                  <a:srgbClr val="E0E0E0"/>
-                </a:solidFill>
-              </a:defRPr>
-            </a:pPr>
-            <a:r>
-              <a:t>WiFi AP mode — SSID: FocusBuddy / IP: 10.10.10.1</a:t>
-            </a:r>
-          </a:p>
-          <a:p>
-            <a:pPr>
-              <a:spcAft>
-                <a:spcPts val="800"/>
-              </a:spcAft>
-              <a:defRPr sz="1600">
-                <a:solidFill>
-                  <a:srgbClr val="E0E0E0"/>
-                </a:solidFill>
-              </a:defRPr>
-            </a:pPr>
-            <a:r>
-              <a:t>   HTTP API: /pet /timer /alert /status</a:t>
+              <a:t>Pomodoro complete -&gt; celebration animation + desktop notification</a:t>
+            </a:r>
+          </a:p>
+        </p:txBody>
+      </p:sp>
+      <p:sp>
+        <p:nvSpPr>
+          <p:cNvPr id="6" name="Rounded Rectangle 5"/>
+          <p:cNvSpPr/>
+          <p:nvPr/>
+        </p:nvSpPr>
+        <p:spPr>
+          <a:xfrm>
+            <a:off x="7132320" y="1097280"/>
+            <a:ext cx="4572000" cy="2651760"/>
+          </a:xfrm>
+          <a:prstGeom prst="roundRect">
+            <a:avLst/>
+          </a:prstGeom>
+          <a:solidFill>
+            <a:srgbClr val="202A44"/>
+          </a:solidFill>
+          <a:ln w="19050">
+            <a:solidFill>
+              <a:srgbClr val="8892B0"/>
+            </a:solidFill>
+          </a:ln>
+          <a:effectLst/>
+        </p:spPr>
+        <p:style>
+          <a:lnRef idx="1">
+            <a:schemeClr val="accent1"/>
+          </a:lnRef>
+          <a:fillRef idx="3">
+            <a:schemeClr val="accent1"/>
+          </a:fillRef>
+          <a:effectRef idx="2">
+            <a:schemeClr val="accent1"/>
+          </a:effectRef>
+          <a:fontRef idx="minor">
+            <a:schemeClr val="lt1"/>
+          </a:fontRef>
+        </p:style>
+        <p:txBody>
+          <a:bodyPr rtlCol="0" anchor="ctr"/>
+          <a:lstStyle/>
+          <a:p>
+            <a:pPr algn="ctr"/>
+          </a:p>
+        </p:txBody>
+      </p:sp>
+      <p:sp>
+        <p:nvSpPr>
+          <p:cNvPr id="7" name="TextBox 6"/>
+          <p:cNvSpPr txBox="1"/>
+          <p:nvPr/>
+        </p:nvSpPr>
+        <p:spPr>
+          <a:xfrm>
+            <a:off x="7132320" y="2148840"/>
+            <a:ext cx="4572000" cy="548640"/>
+          </a:xfrm>
+          <a:prstGeom prst="rect">
+            <a:avLst/>
+          </a:prstGeom>
+          <a:noFill/>
+        </p:spPr>
+        <p:txBody>
+          <a:bodyPr wrap="square">
+            <a:spAutoFit/>
+          </a:bodyPr>
+          <a:lstStyle/>
+          <a:p>
+            <a:pPr algn="ctr">
+              <a:defRPr sz="1400">
+                <a:solidFill>
+                  <a:srgbClr val="8892B0"/>
+                </a:solidFill>
+              </a:defRPr>
+            </a:pPr>
+            <a:r>
+              <a:t>Main UI Screenshot</a:t>
+            </a:r>
+            <a:br/>
+            <a:r>
+              <a:t>(Camera + Timer + Pet)</a:t>
+            </a:r>
+          </a:p>
+        </p:txBody>
+      </p:sp>
+      <p:sp>
+        <p:nvSpPr>
+          <p:cNvPr id="8" name="Rounded Rectangle 7"/>
+          <p:cNvSpPr/>
+          <p:nvPr/>
+        </p:nvSpPr>
+        <p:spPr>
+          <a:xfrm>
+            <a:off x="7132320" y="3931920"/>
+            <a:ext cx="4572000" cy="2560320"/>
+          </a:xfrm>
+          <a:prstGeom prst="roundRect">
+            <a:avLst/>
+          </a:prstGeom>
+          <a:solidFill>
+            <a:srgbClr val="202A44"/>
+          </a:solidFill>
+          <a:ln w="19050">
+            <a:solidFill>
+              <a:srgbClr val="8892B0"/>
+            </a:solidFill>
+          </a:ln>
+          <a:effectLst/>
+        </p:spPr>
+        <p:style>
+          <a:lnRef idx="1">
+            <a:schemeClr val="accent1"/>
+          </a:lnRef>
+          <a:fillRef idx="3">
+            <a:schemeClr val="accent1"/>
+          </a:fillRef>
+          <a:effectRef idx="2">
+            <a:schemeClr val="accent1"/>
+          </a:effectRef>
+          <a:fontRef idx="minor">
+            <a:schemeClr val="lt1"/>
+          </a:fontRef>
+        </p:style>
+        <p:txBody>
+          <a:bodyPr rtlCol="0" anchor="ctr"/>
+          <a:lstStyle/>
+          <a:p>
+            <a:pPr algn="ctr"/>
+          </a:p>
+        </p:txBody>
+      </p:sp>
+      <p:sp>
+        <p:nvSpPr>
+          <p:cNvPr id="9" name="TextBox 8"/>
+          <p:cNvSpPr txBox="1"/>
+          <p:nvPr/>
+        </p:nvSpPr>
+        <p:spPr>
+          <a:xfrm>
+            <a:off x="7132320" y="4937760"/>
+            <a:ext cx="4572000" cy="548640"/>
+          </a:xfrm>
+          <a:prstGeom prst="rect">
+            <a:avLst/>
+          </a:prstGeom>
+          <a:noFill/>
+        </p:spPr>
+        <p:txBody>
+          <a:bodyPr wrap="square">
+            <a:spAutoFit/>
+          </a:bodyPr>
+          <a:lstStyle/>
+          <a:p>
+            <a:pPr algn="ctr">
+              <a:defRPr sz="1400">
+                <a:solidFill>
+                  <a:srgbClr val="8892B0"/>
+                </a:solidFill>
+              </a:defRPr>
+            </a:pPr>
+            <a:r>
+              <a:t>Statistics Screenshot</a:t>
+            </a:r>
+            <a:br/>
+            <a:r>
+              <a:t>(Charts + Daily Plan)</a:t>
             </a:r>
           </a:p>
         </p:txBody>
@@ -5053,8 +5479,8 @@
 </p:sld>
 </file>
 
-<file path=ppt/slides/slide6.xml><?xml version="1.0" encoding="utf-8"?>
-<p:sld xmlns:a="http://schemas.openxmlformats.org/drawingml/2006/main" xmlns:r="http://schemas.openxmlformats.org/officeDocument/2006/relationships" xmlns:p="http://schemas.openxmlformats.org/presentationml/2006/main">
+<file path=ppt/slides/slide5.xml><?xml version="1.0" encoding="utf-8"?>
+<p:sld xmlns:a="http://schemas.openxmlformats.org/drawingml/2006/main" xmlns:p="http://schemas.openxmlformats.org/presentationml/2006/main" xmlns:r="http://schemas.openxmlformats.org/officeDocument/2006/relationships">
   <p:cSld>
     <p:bg>
       <p:bgPr>
@@ -5145,7 +5571,7 @@
               </a:defRPr>
             </a:pPr>
             <a:r>
-              <a:t>Technology Stack</a:t>
+              <a:t>ESP32 Pixel Pet</a:t>
             </a:r>
           </a:p>
         </p:txBody>
@@ -5158,8 +5584,8 @@
         </p:nvSpPr>
         <p:spPr>
           <a:xfrm>
-            <a:off x="731520" y="1188720"/>
-            <a:ext cx="10058400" cy="640080"/>
+            <a:off x="731520" y="1005840"/>
+            <a:ext cx="10058400" cy="548640"/>
           </a:xfrm>
           <a:prstGeom prst="rect">
             <a:avLst/>
@@ -5180,21 +5606,115 @@
               </a:defRPr>
             </a:pPr>
             <a:r>
-              <a:t>Native JS + MediaPipe + ESP32 — Zero framework, Zero backend</a:t>
-            </a:r>
-          </a:p>
-        </p:txBody>
-      </p:sp>
-      <p:sp>
-        <p:nvSpPr>
-          <p:cNvPr id="5" name="TextBox 4"/>
+              <a:t>Waveshare ESP32-S3-Matrix + 8x8 NeoPixel LED</a:t>
+            </a:r>
+          </a:p>
+        </p:txBody>
+      </p:sp>
+      <p:pic>
+        <p:nvPicPr>
+          <p:cNvPr id="5" name="Picture 4" descr="happy.png"/>
+          <p:cNvPicPr>
+            <a:picLocks noChangeAspect="1"/>
+          </p:cNvPicPr>
+          <p:nvPr/>
+        </p:nvPicPr>
+        <p:blipFill>
+          <a:blip r:embed="rId2"/>
+          <a:stretch>
+            <a:fillRect/>
+          </a:stretch>
+        </p:blipFill>
+        <p:spPr>
+          <a:xfrm>
+            <a:off x="731520" y="1645920"/>
+            <a:ext cx="1371600" cy="1371600"/>
+          </a:xfrm>
+          <a:prstGeom prst="rect">
+            <a:avLst/>
+          </a:prstGeom>
+        </p:spPr>
+      </p:pic>
+      <p:pic>
+        <p:nvPicPr>
+          <p:cNvPr id="6" name="Picture 5" descr="angry.png"/>
+          <p:cNvPicPr>
+            <a:picLocks noChangeAspect="1"/>
+          </p:cNvPicPr>
+          <p:nvPr/>
+        </p:nvPicPr>
+        <p:blipFill>
+          <a:blip r:embed="rId3"/>
+          <a:stretch>
+            <a:fillRect/>
+          </a:stretch>
+        </p:blipFill>
+        <p:spPr>
+          <a:xfrm>
+            <a:off x="2377440" y="1645920"/>
+            <a:ext cx="1371600" cy="1371600"/>
+          </a:xfrm>
+          <a:prstGeom prst="rect">
+            <a:avLst/>
+          </a:prstGeom>
+        </p:spPr>
+      </p:pic>
+      <p:sp>
+        <p:nvSpPr>
+          <p:cNvPr id="7" name="Rounded Rectangle 6"/>
+          <p:cNvSpPr/>
+          <p:nvPr/>
+        </p:nvSpPr>
+        <p:spPr>
+          <a:xfrm>
+            <a:off x="4023360" y="1645920"/>
+            <a:ext cx="1371600" cy="1371600"/>
+          </a:xfrm>
+          <a:prstGeom prst="roundRect">
+            <a:avLst/>
+          </a:prstGeom>
+          <a:solidFill>
+            <a:srgbClr val="202A44"/>
+          </a:solidFill>
+          <a:ln w="19050">
+            <a:solidFill>
+              <a:srgbClr val="8892B0"/>
+            </a:solidFill>
+          </a:ln>
+          <a:effectLst/>
+        </p:spPr>
+        <p:style>
+          <a:lnRef idx="1">
+            <a:schemeClr val="accent1"/>
+          </a:lnRef>
+          <a:fillRef idx="3">
+            <a:schemeClr val="accent1"/>
+          </a:fillRef>
+          <a:effectRef idx="2">
+            <a:schemeClr val="accent1"/>
+          </a:effectRef>
+          <a:fontRef idx="minor">
+            <a:schemeClr val="lt1"/>
+          </a:fontRef>
+        </p:style>
+        <p:txBody>
+          <a:bodyPr rtlCol="0" anchor="ctr"/>
+          <a:lstStyle/>
+          <a:p>
+            <a:pPr algn="ctr"/>
+          </a:p>
+        </p:txBody>
+      </p:sp>
+      <p:sp>
+        <p:nvSpPr>
+          <p:cNvPr id="8" name="TextBox 7"/>
           <p:cNvSpPr txBox="1"/>
           <p:nvPr/>
         </p:nvSpPr>
         <p:spPr>
           <a:xfrm>
-            <a:off x="731520" y="1828800"/>
-            <a:ext cx="5303520" cy="4572000"/>
+            <a:off x="4023360" y="2057400"/>
+            <a:ext cx="1371600" cy="548640"/>
           </a:xfrm>
           <a:prstGeom prst="rect">
             <a:avLst/>
@@ -5207,179 +5727,75 @@
           </a:bodyPr>
           <a:lstStyle/>
           <a:p>
-            <a:pPr>
-              <a:spcAft>
-                <a:spcPts val="200"/>
-              </a:spcAft>
-              <a:defRPr sz="1300" b="1">
-                <a:solidFill>
-                  <a:srgbClr val="FF6B35"/>
-                </a:solidFill>
-              </a:defRPr>
-            </a:pPr>
-            <a:r>
-              <a:t>Vision Detection</a:t>
-            </a:r>
-          </a:p>
-          <a:p>
-            <a:pPr>
-              <a:spcAft>
-                <a:spcPts val="200"/>
-              </a:spcAft>
-              <a:defRPr sz="1300" b="0">
-                <a:solidFill>
-                  <a:srgbClr val="E0E0E0"/>
-                </a:solidFill>
-              </a:defRPr>
-            </a:pPr>
-            <a:r>
-              <a:t>  MediaPipe FaceMesh 468 pts</a:t>
-            </a:r>
-          </a:p>
-          <a:p>
-            <a:pPr>
-              <a:spcAft>
-                <a:spcPts val="200"/>
-              </a:spcAft>
-              <a:defRPr sz="1300" b="0">
-                <a:solidFill>
-                  <a:srgbClr val="E0E0E0"/>
-                </a:solidFill>
-              </a:defRPr>
-            </a:pPr>
-            <a:r>
-              <a:t>  EAR &lt; 0.22 + &gt;800ms -&gt; eyes closed</a:t>
-            </a:r>
-          </a:p>
-          <a:p>
-            <a:pPr>
-              <a:spcAft>
-                <a:spcPts val="200"/>
-              </a:spcAft>
-              <a:defRPr sz="1300" b="0">
-                <a:solidFill>
-                  <a:srgbClr val="E0E0E0"/>
-                </a:solidFill>
-              </a:defRPr>
-            </a:pPr>
-            <a:r>
-              <a:t>  headRatio &lt; 0.38 -&gt; looking down</a:t>
-            </a:r>
-          </a:p>
-          <a:p>
-            <a:pPr>
-              <a:spcAft>
-                <a:spcPts val="200"/>
-              </a:spcAft>
-              <a:defRPr sz="1300" b="0">
-                <a:solidFill>
-                  <a:srgbClr val="E0E0E0"/>
-                </a:solidFill>
-              </a:defRPr>
-            </a:pPr>
-            <a:r>
-              <a:t>  turnRatio &lt; 0.62 -&gt; looking away</a:t>
-            </a:r>
-          </a:p>
-          <a:p>
-            <a:pPr>
-              <a:spcAft>
-                <a:spcPts val="200"/>
-              </a:spcAft>
-              <a:defRPr sz="1300" b="0">
-                <a:solidFill>
-                  <a:srgbClr val="E0E0E0"/>
-                </a:solidFill>
-              </a:defRPr>
-            </a:pPr>
-            <a:r>
-              <a:t>  Focus score system (0-100)</a:t>
-            </a:r>
-          </a:p>
-          <a:p>
-            <a:pPr>
-              <a:spcAft>
-                <a:spcPts val="200"/>
-              </a:spcAft>
-              <a:defRPr sz="1300" b="1">
-                <a:solidFill>
-                  <a:srgbClr val="FF6B35"/>
-                </a:solidFill>
-              </a:defRPr>
-            </a:pPr>
-          </a:p>
-          <a:p>
-            <a:pPr>
-              <a:spcAft>
-                <a:spcPts val="200"/>
-              </a:spcAft>
-              <a:defRPr sz="1300" b="1">
-                <a:solidFill>
-                  <a:srgbClr val="FF6B35"/>
-                </a:solidFill>
-              </a:defRPr>
-            </a:pPr>
-            <a:r>
-              <a:t>Pomodoro + Statistics</a:t>
-            </a:r>
-          </a:p>
-          <a:p>
-            <a:pPr>
-              <a:spcAft>
-                <a:spcPts val="200"/>
-              </a:spcAft>
-              <a:defRPr sz="1300" b="0">
-                <a:solidFill>
-                  <a:srgbClr val="E0E0E0"/>
-                </a:solidFill>
-              </a:defRPr>
-            </a:pPr>
-            <a:r>
-              <a:t>  PomodoroTimer state machine</a:t>
-            </a:r>
-          </a:p>
-          <a:p>
-            <a:pPr>
-              <a:spcAft>
-                <a:spcPts val="200"/>
-              </a:spcAft>
-              <a:defRPr sz="1300" b="0">
-                <a:solidFill>
-                  <a:srgbClr val="E0E0E0"/>
-                </a:solidFill>
-              </a:defRPr>
-            </a:pPr>
-            <a:r>
-              <a:t>  localStorage persistence</a:t>
-            </a:r>
-          </a:p>
-          <a:p>
-            <a:pPr>
-              <a:spcAft>
-                <a:spcPts val="200"/>
-              </a:spcAft>
-              <a:defRPr sz="1300" b="0">
-                <a:solidFill>
-                  <a:srgbClr val="E0E0E0"/>
-                </a:solidFill>
-              </a:defRPr>
-            </a:pPr>
-            <a:r>
-              <a:t>  Chart.js pie + bar charts</a:t>
-            </a:r>
-          </a:p>
-        </p:txBody>
-      </p:sp>
-      <p:sp>
-        <p:nvSpPr>
-          <p:cNvPr id="6" name="TextBox 5"/>
+            <a:pPr algn="ctr">
+              <a:defRPr sz="1400">
+                <a:solidFill>
+                  <a:srgbClr val="8892B0"/>
+                </a:solidFill>
+              </a:defRPr>
+            </a:pPr>
+            <a:r>
+              <a:t>😊 happy</a:t>
+            </a:r>
+          </a:p>
+        </p:txBody>
+      </p:sp>
+      <p:sp>
+        <p:nvSpPr>
+          <p:cNvPr id="9" name="Rounded Rectangle 8"/>
+          <p:cNvSpPr/>
+          <p:nvPr/>
+        </p:nvSpPr>
+        <p:spPr>
+          <a:xfrm>
+            <a:off x="731520" y="3291840"/>
+            <a:ext cx="3474720" cy="1645920"/>
+          </a:xfrm>
+          <a:prstGeom prst="roundRect">
+            <a:avLst/>
+          </a:prstGeom>
+          <a:solidFill>
+            <a:srgbClr val="202A44"/>
+          </a:solidFill>
+          <a:ln w="19050">
+            <a:solidFill>
+              <a:srgbClr val="8892B0"/>
+            </a:solidFill>
+          </a:ln>
+          <a:effectLst/>
+        </p:spPr>
+        <p:style>
+          <a:lnRef idx="1">
+            <a:schemeClr val="accent1"/>
+          </a:lnRef>
+          <a:fillRef idx="3">
+            <a:schemeClr val="accent1"/>
+          </a:fillRef>
+          <a:effectRef idx="2">
+            <a:schemeClr val="accent1"/>
+          </a:effectRef>
+          <a:fontRef idx="minor">
+            <a:schemeClr val="lt1"/>
+          </a:fontRef>
+        </p:style>
+        <p:txBody>
+          <a:bodyPr rtlCol="0" anchor="ctr"/>
+          <a:lstStyle/>
+          <a:p>
+            <a:pPr algn="ctr"/>
+          </a:p>
+        </p:txBody>
+      </p:sp>
+      <p:sp>
+        <p:nvSpPr>
+          <p:cNvPr id="10" name="TextBox 9"/>
           <p:cNvSpPr txBox="1"/>
           <p:nvPr/>
         </p:nvSpPr>
         <p:spPr>
           <a:xfrm>
-            <a:off x="6400800" y="1828800"/>
-            <a:ext cx="5303520" cy="4572000"/>
+            <a:off x="731520" y="3840480"/>
+            <a:ext cx="3474720" cy="548640"/>
           </a:xfrm>
           <a:prstGeom prst="rect">
             <a:avLst/>
@@ -5392,180 +5808,255 @@
           </a:bodyPr>
           <a:lstStyle/>
           <a:p>
+            <a:pPr algn="ctr">
+              <a:defRPr sz="1400">
+                <a:solidFill>
+                  <a:srgbClr val="8892B0"/>
+                </a:solidFill>
+              </a:defRPr>
+            </a:pPr>
+            <a:r>
+              <a:t>ESP32 Device Photo</a:t>
+            </a:r>
+          </a:p>
+        </p:txBody>
+      </p:sp>
+      <p:sp>
+        <p:nvSpPr>
+          <p:cNvPr id="11" name="Rounded Rectangle 10"/>
+          <p:cNvSpPr/>
+          <p:nvPr/>
+        </p:nvSpPr>
+        <p:spPr>
+          <a:xfrm>
+            <a:off x="4389120" y="3291840"/>
+            <a:ext cx="1828800" cy="3108960"/>
+          </a:xfrm>
+          <a:prstGeom prst="roundRect">
+            <a:avLst/>
+          </a:prstGeom>
+          <a:solidFill>
+            <a:srgbClr val="202A44"/>
+          </a:solidFill>
+          <a:ln w="19050">
+            <a:solidFill>
+              <a:srgbClr val="8892B0"/>
+            </a:solidFill>
+          </a:ln>
+          <a:effectLst/>
+        </p:spPr>
+        <p:style>
+          <a:lnRef idx="1">
+            <a:schemeClr val="accent1"/>
+          </a:lnRef>
+          <a:fillRef idx="3">
+            <a:schemeClr val="accent1"/>
+          </a:fillRef>
+          <a:effectRef idx="2">
+            <a:schemeClr val="accent1"/>
+          </a:effectRef>
+          <a:fontRef idx="minor">
+            <a:schemeClr val="lt1"/>
+          </a:fontRef>
+        </p:style>
+        <p:txBody>
+          <a:bodyPr rtlCol="0" anchor="ctr"/>
+          <a:lstStyle/>
+          <a:p>
+            <a:pPr algn="ctr"/>
+          </a:p>
+        </p:txBody>
+      </p:sp>
+      <p:sp>
+        <p:nvSpPr>
+          <p:cNvPr id="12" name="TextBox 11"/>
+          <p:cNvSpPr txBox="1"/>
+          <p:nvPr/>
+        </p:nvSpPr>
+        <p:spPr>
+          <a:xfrm>
+            <a:off x="4389120" y="4572000"/>
+            <a:ext cx="1828800" cy="548640"/>
+          </a:xfrm>
+          <a:prstGeom prst="rect">
+            <a:avLst/>
+          </a:prstGeom>
+          <a:noFill/>
+        </p:spPr>
+        <p:txBody>
+          <a:bodyPr wrap="square">
+            <a:spAutoFit/>
+          </a:bodyPr>
+          <a:lstStyle/>
+          <a:p>
+            <a:pPr algn="ctr">
+              <a:defRPr sz="1400">
+                <a:solidFill>
+                  <a:srgbClr val="8892B0"/>
+                </a:solidFill>
+              </a:defRPr>
+            </a:pPr>
+            <a:r>
+              <a:t>8x8 Matrix</a:t>
+            </a:r>
+            <a:br/>
+            <a:r>
+              <a:t>Pixel Expression</a:t>
+            </a:r>
+          </a:p>
+        </p:txBody>
+      </p:sp>
+      <p:sp>
+        <p:nvSpPr>
+          <p:cNvPr id="13" name="TextBox 12"/>
+          <p:cNvSpPr txBox="1"/>
+          <p:nvPr/>
+        </p:nvSpPr>
+        <p:spPr>
+          <a:xfrm>
+            <a:off x="6583680" y="1463040"/>
+            <a:ext cx="5029200" cy="4572000"/>
+          </a:xfrm>
+          <a:prstGeom prst="rect">
+            <a:avLst/>
+          </a:prstGeom>
+          <a:noFill/>
+        </p:spPr>
+        <p:txBody>
+          <a:bodyPr wrap="square">
+            <a:spAutoFit/>
+          </a:bodyPr>
+          <a:lstStyle/>
+          <a:p>
             <a:pPr>
               <a:spcAft>
-                <a:spcPts val="200"/>
+                <a:spcPts val="600"/>
               </a:spcAft>
-              <a:defRPr sz="1300" b="1">
-                <a:solidFill>
-                  <a:srgbClr val="FF6B35"/>
-                </a:solidFill>
-              </a:defRPr>
-            </a:pPr>
-            <a:r>
-              <a:t>ESP32 Firmware</a:t>
+              <a:defRPr sz="1300">
+                <a:solidFill>
+                  <a:srgbClr val="E0E0E0"/>
+                </a:solidFill>
+              </a:defRPr>
+            </a:pPr>
+            <a:r>
+              <a:t>Happy (Green) — Focused -&gt; occasional blink animation</a:t>
             </a:r>
           </a:p>
           <a:p>
             <a:pPr>
               <a:spcAft>
-                <a:spcPts val="200"/>
+                <a:spcPts val="600"/>
               </a:spcAft>
-              <a:defRPr sz="1300" b="0">
+              <a:defRPr sz="1300">
                 <a:solidFill>
                   <a:srgbClr val="E0E0E0"/>
                 </a:solidFill>
               </a:defRPr>
             </a:pPr>
             <a:r>
-              <a:t>  WiFi AP: FocusBuddy</a:t>
+              <a:t>Worried (Yellow) — Distracted/head turned -&gt; gentle reminder</a:t>
             </a:r>
           </a:p>
           <a:p>
             <a:pPr>
               <a:spcAft>
-                <a:spcPts val="200"/>
+                <a:spcPts val="600"/>
               </a:spcAft>
-              <a:defRPr sz="1300" b="0">
+              <a:defRPr sz="1300">
                 <a:solidFill>
                   <a:srgbClr val="E0E0E0"/>
                 </a:solidFill>
               </a:defRPr>
             </a:pPr>
             <a:r>
-              <a:t>  HTTP Server (port 80)</a:t>
+              <a:t>Angry (Red) — Warning -&gt; away &gt; 10 seconds, red flashing</a:t>
             </a:r>
           </a:p>
           <a:p>
             <a:pPr>
               <a:spcAft>
-                <a:spcPts val="200"/>
+                <a:spcPts val="600"/>
               </a:spcAft>
-              <a:defRPr sz="1300" b="0">
+              <a:defRPr sz="1300">
                 <a:solidFill>
                   <a:srgbClr val="E0E0E0"/>
                 </a:solidFill>
               </a:defRPr>
             </a:pPr>
             <a:r>
-              <a:t>  4 pet expressions (8x8 bitmap)</a:t>
+              <a:t>Sleeping (Blue) — Away/Idle -&gt; quiet waiting</a:t>
             </a:r>
           </a:p>
           <a:p>
             <a:pPr>
               <a:spcAft>
-                <a:spcPts val="200"/>
+                <a:spcPts val="600"/>
               </a:spcAft>
-              <a:defRPr sz="1300" b="0">
+              <a:defRPr sz="1300">
                 <a:solidFill>
                   <a:srgbClr val="E0E0E0"/>
                 </a:solidFill>
               </a:defRPr>
             </a:pPr>
             <a:r>
-              <a:t>  5x3 digit countdown renderer</a:t>
+              <a:t>Celebrate (Orange) — Pomodoro complete -&gt; 3-frame loop (5s)</a:t>
             </a:r>
           </a:p>
           <a:p>
             <a:pPr>
               <a:spcAft>
-                <a:spcPts val="200"/>
+                <a:spcPts val="600"/>
               </a:spcAft>
-              <a:defRPr sz="1300" b="0">
+              <a:defRPr sz="1300">
                 <a:solidFill>
                   <a:srgbClr val="E0E0E0"/>
                 </a:solidFill>
               </a:defRPr>
             </a:pPr>
-            <a:r>
-              <a:t>  Alarm blink animation</a:t>
-            </a:r>
           </a:p>
           <a:p>
             <a:pPr>
               <a:spcAft>
-                <a:spcPts val="200"/>
+                <a:spcPts val="600"/>
               </a:spcAft>
-              <a:defRPr sz="1300" b="1">
-                <a:solidFill>
-                  <a:srgbClr val="FF6B35"/>
-                </a:solidFill>
-              </a:defRPr>
-            </a:pPr>
+              <a:defRPr sz="1300">
+                <a:solidFill>
+                  <a:srgbClr val="E0E0E0"/>
+                </a:solidFill>
+              </a:defRPr>
+            </a:pPr>
+            <a:r>
+              <a:t>Digital countdown display — custom 5x3 pixel font</a:t>
+            </a:r>
           </a:p>
           <a:p>
             <a:pPr>
               <a:spcAft>
-                <a:spcPts val="200"/>
+                <a:spcPts val="600"/>
               </a:spcAft>
-              <a:defRPr sz="1300" b="1">
-                <a:solidFill>
-                  <a:srgbClr val="FF6B35"/>
-                </a:solidFill>
-              </a:defRPr>
-            </a:pPr>
-            <a:r>
-              <a:t>Communication Protocol</a:t>
+              <a:defRPr sz="1300">
+                <a:solidFill>
+                  <a:srgbClr val="E0E0E0"/>
+                </a:solidFill>
+              </a:defRPr>
+            </a:pPr>
+            <a:r>
+              <a:t>WiFi AP mode — SSID: FocusBuddy / IP: 10.10.10.1</a:t>
             </a:r>
           </a:p>
           <a:p>
             <a:pPr>
               <a:spcAft>
-                <a:spcPts val="200"/>
+                <a:spcPts val="600"/>
               </a:spcAft>
-              <a:defRPr sz="1300" b="0">
+              <a:defRPr sz="1300">
                 <a:solidFill>
                   <a:srgbClr val="E0E0E0"/>
                 </a:solidFill>
               </a:defRPr>
             </a:pPr>
             <a:r>
-              <a:t>  GET /pet?state=happy</a:t>
-            </a:r>
-          </a:p>
-          <a:p>
-            <a:pPr>
-              <a:spcAft>
-                <a:spcPts val="200"/>
-              </a:spcAft>
-              <a:defRPr sz="1300" b="0">
-                <a:solidFill>
-                  <a:srgbClr val="E0E0E0"/>
-                </a:solidFill>
-              </a:defRPr>
-            </a:pPr>
-            <a:r>
-              <a:t>  GET /timer?m=25&amp;s=00</a:t>
-            </a:r>
-          </a:p>
-          <a:p>
-            <a:pPr>
-              <a:spcAft>
-                <a:spcPts val="200"/>
-              </a:spcAft>
-              <a:defRPr sz="1300" b="0">
-                <a:solidFill>
-                  <a:srgbClr val="E0E0E0"/>
-                </a:solidFill>
-              </a:defRPr>
-            </a:pPr>
-            <a:r>
-              <a:t>  GET /alert (3s blinking)</a:t>
-            </a:r>
-          </a:p>
-          <a:p>
-            <a:pPr>
-              <a:spcAft>
-                <a:spcPts val="200"/>
-              </a:spcAft>
-              <a:defRPr sz="1300" b="0">
-                <a:solidFill>
-                  <a:srgbClr val="E0E0E0"/>
-                </a:solidFill>
-              </a:defRPr>
-            </a:pPr>
-            <a:r>
-              <a:t>  GET /status (JSON)</a:t>
+              <a:t>   HTTP API: /pet /timer /alert /status</a:t>
             </a:r>
           </a:p>
         </p:txBody>
@@ -5578,8 +6069,8 @@
 </p:sld>
 </file>
 
-<file path=ppt/slides/slide7.xml><?xml version="1.0" encoding="utf-8"?>
-<p:sld xmlns:a="http://schemas.openxmlformats.org/drawingml/2006/main" xmlns:r="http://schemas.openxmlformats.org/officeDocument/2006/relationships" xmlns:p="http://schemas.openxmlformats.org/presentationml/2006/main">
+<file path=ppt/slides/slide6.xml><?xml version="1.0" encoding="utf-8"?>
+<p:sld xmlns:a="http://schemas.openxmlformats.org/drawingml/2006/main" xmlns:p="http://schemas.openxmlformats.org/presentationml/2006/main" xmlns:r="http://schemas.openxmlformats.org/officeDocument/2006/relationships">
   <p:cSld>
     <p:bg>
       <p:bgPr>
@@ -5670,30 +6161,452 @@
               </a:defRPr>
             </a:pPr>
             <a:r>
-              <a:t>Why Different?</a:t>
-            </a:r>
-          </a:p>
-        </p:txBody>
-      </p:sp>
-      <p:sp>
-        <p:nvSpPr>
-          <p:cNvPr id="4" name="Rounded Rectangle 3"/>
+              <a:t>Technology Stack</a:t>
+            </a:r>
+          </a:p>
+        </p:txBody>
+      </p:sp>
+      <p:sp>
+        <p:nvSpPr>
+          <p:cNvPr id="4" name="TextBox 3"/>
+          <p:cNvSpPr txBox="1"/>
+          <p:nvPr/>
+        </p:nvSpPr>
+        <p:spPr>
+          <a:xfrm>
+            <a:off x="731520" y="1005840"/>
+            <a:ext cx="10058400" cy="548640"/>
+          </a:xfrm>
+          <a:prstGeom prst="rect">
+            <a:avLst/>
+          </a:prstGeom>
+          <a:noFill/>
+        </p:spPr>
+        <p:txBody>
+          <a:bodyPr wrap="square">
+            <a:spAutoFit/>
+          </a:bodyPr>
+          <a:lstStyle/>
+          <a:p>
+            <a:pPr algn="l">
+              <a:defRPr sz="2000" b="0">
+                <a:solidFill>
+                  <a:srgbClr val="FF6B35"/>
+                </a:solidFill>
+              </a:defRPr>
+            </a:pPr>
+            <a:r>
+              <a:t>Native JS + MediaPipe + ESP32 — Zero framework, Zero backend</a:t>
+            </a:r>
+          </a:p>
+        </p:txBody>
+      </p:sp>
+      <p:sp>
+        <p:nvSpPr>
+          <p:cNvPr id="5" name="TextBox 4"/>
+          <p:cNvSpPr txBox="1"/>
+          <p:nvPr/>
+        </p:nvSpPr>
+        <p:spPr>
+          <a:xfrm>
+            <a:off x="731520" y="1645920"/>
+            <a:ext cx="5303520" cy="4572000"/>
+          </a:xfrm>
+          <a:prstGeom prst="rect">
+            <a:avLst/>
+          </a:prstGeom>
+          <a:noFill/>
+        </p:spPr>
+        <p:txBody>
+          <a:bodyPr wrap="square">
+            <a:spAutoFit/>
+          </a:bodyPr>
+          <a:lstStyle/>
+          <a:p>
+            <a:pPr>
+              <a:spcAft>
+                <a:spcPts val="200"/>
+              </a:spcAft>
+              <a:defRPr sz="1300" b="1">
+                <a:solidFill>
+                  <a:srgbClr val="FF6B35"/>
+                </a:solidFill>
+              </a:defRPr>
+            </a:pPr>
+            <a:r>
+              <a:t>Vision Detection</a:t>
+            </a:r>
+          </a:p>
+          <a:p>
+            <a:pPr>
+              <a:spcAft>
+                <a:spcPts val="200"/>
+              </a:spcAft>
+              <a:defRPr sz="1300" b="0">
+                <a:solidFill>
+                  <a:srgbClr val="E0E0E0"/>
+                </a:solidFill>
+              </a:defRPr>
+            </a:pPr>
+            <a:r>
+              <a:t>  MediaPipe FaceMesh 468 pts</a:t>
+            </a:r>
+          </a:p>
+          <a:p>
+            <a:pPr>
+              <a:spcAft>
+                <a:spcPts val="200"/>
+              </a:spcAft>
+              <a:defRPr sz="1300" b="0">
+                <a:solidFill>
+                  <a:srgbClr val="E0E0E0"/>
+                </a:solidFill>
+              </a:defRPr>
+            </a:pPr>
+            <a:r>
+              <a:t>  EAR &lt; 0.22 + &gt;800ms -&gt; eyes closed</a:t>
+            </a:r>
+          </a:p>
+          <a:p>
+            <a:pPr>
+              <a:spcAft>
+                <a:spcPts val="200"/>
+              </a:spcAft>
+              <a:defRPr sz="1300" b="0">
+                <a:solidFill>
+                  <a:srgbClr val="E0E0E0"/>
+                </a:solidFill>
+              </a:defRPr>
+            </a:pPr>
+            <a:r>
+              <a:t>  headRatio &lt; 0.38 -&gt; looking down</a:t>
+            </a:r>
+          </a:p>
+          <a:p>
+            <a:pPr>
+              <a:spcAft>
+                <a:spcPts val="200"/>
+              </a:spcAft>
+              <a:defRPr sz="1300" b="0">
+                <a:solidFill>
+                  <a:srgbClr val="E0E0E0"/>
+                </a:solidFill>
+              </a:defRPr>
+            </a:pPr>
+            <a:r>
+              <a:t>  turnRatio &lt; 0.62 -&gt; looking away</a:t>
+            </a:r>
+          </a:p>
+          <a:p>
+            <a:pPr>
+              <a:spcAft>
+                <a:spcPts val="200"/>
+              </a:spcAft>
+              <a:defRPr sz="1300" b="0">
+                <a:solidFill>
+                  <a:srgbClr val="E0E0E0"/>
+                </a:solidFill>
+              </a:defRPr>
+            </a:pPr>
+            <a:r>
+              <a:t>  Focus score system (0-100)</a:t>
+            </a:r>
+          </a:p>
+          <a:p>
+            <a:pPr>
+              <a:spcAft>
+                <a:spcPts val="200"/>
+              </a:spcAft>
+              <a:defRPr sz="1300" b="1">
+                <a:solidFill>
+                  <a:srgbClr val="FF6B35"/>
+                </a:solidFill>
+              </a:defRPr>
+            </a:pPr>
+          </a:p>
+          <a:p>
+            <a:pPr>
+              <a:spcAft>
+                <a:spcPts val="200"/>
+              </a:spcAft>
+              <a:defRPr sz="1300" b="1">
+                <a:solidFill>
+                  <a:srgbClr val="FF6B35"/>
+                </a:solidFill>
+              </a:defRPr>
+            </a:pPr>
+            <a:r>
+              <a:t>Pomodoro + Statistics</a:t>
+            </a:r>
+          </a:p>
+          <a:p>
+            <a:pPr>
+              <a:spcAft>
+                <a:spcPts val="200"/>
+              </a:spcAft>
+              <a:defRPr sz="1300" b="0">
+                <a:solidFill>
+                  <a:srgbClr val="E0E0E0"/>
+                </a:solidFill>
+              </a:defRPr>
+            </a:pPr>
+            <a:r>
+              <a:t>  PomodoroTimer state machine</a:t>
+            </a:r>
+          </a:p>
+          <a:p>
+            <a:pPr>
+              <a:spcAft>
+                <a:spcPts val="200"/>
+              </a:spcAft>
+              <a:defRPr sz="1300" b="0">
+                <a:solidFill>
+                  <a:srgbClr val="E0E0E0"/>
+                </a:solidFill>
+              </a:defRPr>
+            </a:pPr>
+            <a:r>
+              <a:t>  localStorage persistence</a:t>
+            </a:r>
+          </a:p>
+          <a:p>
+            <a:pPr>
+              <a:spcAft>
+                <a:spcPts val="200"/>
+              </a:spcAft>
+              <a:defRPr sz="1300" b="0">
+                <a:solidFill>
+                  <a:srgbClr val="E0E0E0"/>
+                </a:solidFill>
+              </a:defRPr>
+            </a:pPr>
+            <a:r>
+              <a:t>  Chart.js pie + bar charts</a:t>
+            </a:r>
+          </a:p>
+        </p:txBody>
+      </p:sp>
+      <p:sp>
+        <p:nvSpPr>
+          <p:cNvPr id="6" name="TextBox 5"/>
+          <p:cNvSpPr txBox="1"/>
+          <p:nvPr/>
+        </p:nvSpPr>
+        <p:spPr>
+          <a:xfrm>
+            <a:off x="6400800" y="1645920"/>
+            <a:ext cx="5303520" cy="4572000"/>
+          </a:xfrm>
+          <a:prstGeom prst="rect">
+            <a:avLst/>
+          </a:prstGeom>
+          <a:noFill/>
+        </p:spPr>
+        <p:txBody>
+          <a:bodyPr wrap="square">
+            <a:spAutoFit/>
+          </a:bodyPr>
+          <a:lstStyle/>
+          <a:p>
+            <a:pPr>
+              <a:spcAft>
+                <a:spcPts val="200"/>
+              </a:spcAft>
+              <a:defRPr sz="1300" b="1">
+                <a:solidFill>
+                  <a:srgbClr val="FF6B35"/>
+                </a:solidFill>
+              </a:defRPr>
+            </a:pPr>
+            <a:r>
+              <a:t>ESP32 Firmware</a:t>
+            </a:r>
+          </a:p>
+          <a:p>
+            <a:pPr>
+              <a:spcAft>
+                <a:spcPts val="200"/>
+              </a:spcAft>
+              <a:defRPr sz="1300" b="0">
+                <a:solidFill>
+                  <a:srgbClr val="E0E0E0"/>
+                </a:solidFill>
+              </a:defRPr>
+            </a:pPr>
+            <a:r>
+              <a:t>  WiFi AP: FocusBuddy</a:t>
+            </a:r>
+          </a:p>
+          <a:p>
+            <a:pPr>
+              <a:spcAft>
+                <a:spcPts val="200"/>
+              </a:spcAft>
+              <a:defRPr sz="1300" b="0">
+                <a:solidFill>
+                  <a:srgbClr val="E0E0E0"/>
+                </a:solidFill>
+              </a:defRPr>
+            </a:pPr>
+            <a:r>
+              <a:t>  HTTP Server (port 80)</a:t>
+            </a:r>
+          </a:p>
+          <a:p>
+            <a:pPr>
+              <a:spcAft>
+                <a:spcPts val="200"/>
+              </a:spcAft>
+              <a:defRPr sz="1300" b="0">
+                <a:solidFill>
+                  <a:srgbClr val="E0E0E0"/>
+                </a:solidFill>
+              </a:defRPr>
+            </a:pPr>
+            <a:r>
+              <a:t>  4 pet expressions (8x8 bitmap)</a:t>
+            </a:r>
+          </a:p>
+          <a:p>
+            <a:pPr>
+              <a:spcAft>
+                <a:spcPts val="200"/>
+              </a:spcAft>
+              <a:defRPr sz="1300" b="0">
+                <a:solidFill>
+                  <a:srgbClr val="E0E0E0"/>
+                </a:solidFill>
+              </a:defRPr>
+            </a:pPr>
+            <a:r>
+              <a:t>  5x3 digit countdown renderer</a:t>
+            </a:r>
+          </a:p>
+          <a:p>
+            <a:pPr>
+              <a:spcAft>
+                <a:spcPts val="200"/>
+              </a:spcAft>
+              <a:defRPr sz="1300" b="0">
+                <a:solidFill>
+                  <a:srgbClr val="E0E0E0"/>
+                </a:solidFill>
+              </a:defRPr>
+            </a:pPr>
+            <a:r>
+              <a:t>  Alarm blink animation</a:t>
+            </a:r>
+          </a:p>
+          <a:p>
+            <a:pPr>
+              <a:spcAft>
+                <a:spcPts val="200"/>
+              </a:spcAft>
+              <a:defRPr sz="1300" b="1">
+                <a:solidFill>
+                  <a:srgbClr val="FF6B35"/>
+                </a:solidFill>
+              </a:defRPr>
+            </a:pPr>
+          </a:p>
+          <a:p>
+            <a:pPr>
+              <a:spcAft>
+                <a:spcPts val="200"/>
+              </a:spcAft>
+              <a:defRPr sz="1300" b="1">
+                <a:solidFill>
+                  <a:srgbClr val="FF6B35"/>
+                </a:solidFill>
+              </a:defRPr>
+            </a:pPr>
+            <a:r>
+              <a:t>Communication Protocol</a:t>
+            </a:r>
+          </a:p>
+          <a:p>
+            <a:pPr>
+              <a:spcAft>
+                <a:spcPts val="200"/>
+              </a:spcAft>
+              <a:defRPr sz="1300" b="0">
+                <a:solidFill>
+                  <a:srgbClr val="E0E0E0"/>
+                </a:solidFill>
+              </a:defRPr>
+            </a:pPr>
+            <a:r>
+              <a:t>  GET /pet?state=happy</a:t>
+            </a:r>
+          </a:p>
+          <a:p>
+            <a:pPr>
+              <a:spcAft>
+                <a:spcPts val="200"/>
+              </a:spcAft>
+              <a:defRPr sz="1300" b="0">
+                <a:solidFill>
+                  <a:srgbClr val="E0E0E0"/>
+                </a:solidFill>
+              </a:defRPr>
+            </a:pPr>
+            <a:r>
+              <a:t>  GET /timer?m=25&amp;s=00</a:t>
+            </a:r>
+          </a:p>
+          <a:p>
+            <a:pPr>
+              <a:spcAft>
+                <a:spcPts val="200"/>
+              </a:spcAft>
+              <a:defRPr sz="1300" b="0">
+                <a:solidFill>
+                  <a:srgbClr val="E0E0E0"/>
+                </a:solidFill>
+              </a:defRPr>
+            </a:pPr>
+            <a:r>
+              <a:t>  GET /alert (3s blinking)</a:t>
+            </a:r>
+          </a:p>
+          <a:p>
+            <a:pPr>
+              <a:spcAft>
+                <a:spcPts val="200"/>
+              </a:spcAft>
+              <a:defRPr sz="1300" b="0">
+                <a:solidFill>
+                  <a:srgbClr val="E0E0E0"/>
+                </a:solidFill>
+              </a:defRPr>
+            </a:pPr>
+            <a:r>
+              <a:t>  GET /status (JSON)</a:t>
+            </a:r>
+          </a:p>
+        </p:txBody>
+      </p:sp>
+      <p:sp>
+        <p:nvSpPr>
+          <p:cNvPr id="7" name="Rounded Rectangle 6"/>
           <p:cNvSpPr/>
           <p:nvPr/>
         </p:nvSpPr>
         <p:spPr>
           <a:xfrm>
-            <a:off x="731520" y="1371600"/>
-            <a:ext cx="3474720" cy="548640"/>
+            <a:off x="731520" y="4206240"/>
+            <a:ext cx="10698480" cy="2194560"/>
           </a:xfrm>
           <a:prstGeom prst="roundRect">
             <a:avLst/>
           </a:prstGeom>
           <a:solidFill>
-            <a:srgbClr val="FF6B35"/>
+            <a:srgbClr val="202A44"/>
           </a:solidFill>
-          <a:ln>
-            <a:noFill/>
+          <a:ln w="19050">
+            <a:solidFill>
+              <a:srgbClr val="8892B0"/>
+            </a:solidFill>
           </a:ln>
           <a:effectLst/>
         </p:spPr>
@@ -5721,14 +6634,14 @@
       </p:sp>
       <p:sp>
         <p:nvSpPr>
-          <p:cNvPr id="5" name="TextBox 4"/>
+          <p:cNvPr id="8" name="TextBox 7"/>
           <p:cNvSpPr txBox="1"/>
           <p:nvPr/>
         </p:nvSpPr>
         <p:spPr>
           <a:xfrm>
-            <a:off x="914400" y="1417320"/>
-            <a:ext cx="3108960" cy="457200"/>
+            <a:off x="731520" y="5029200"/>
+            <a:ext cx="10698480" cy="548640"/>
           </a:xfrm>
           <a:prstGeom prst="rect">
             <a:avLst/>
@@ -5742,1594 +6655,14 @@
           <a:lstStyle/>
           <a:p>
             <a:pPr algn="ctr">
-              <a:defRPr sz="1600" b="1">
-                <a:solidFill>
-                  <a:srgbClr val="FFFFFF"/>
-                </a:solidFill>
-              </a:defRPr>
-            </a:pPr>
-            <a:r>
-              <a:t>Dimension</a:t>
-            </a:r>
-          </a:p>
-        </p:txBody>
-      </p:sp>
-      <p:sp>
-        <p:nvSpPr>
-          <p:cNvPr id="6" name="Rounded Rectangle 5"/>
-          <p:cNvSpPr/>
-          <p:nvPr/>
-        </p:nvSpPr>
-        <p:spPr>
-          <a:xfrm>
-            <a:off x="4389120" y="1371600"/>
-            <a:ext cx="3474720" cy="548640"/>
-          </a:xfrm>
-          <a:prstGeom prst="roundRect">
-            <a:avLst/>
-          </a:prstGeom>
-          <a:solidFill>
-            <a:srgbClr val="FF6B35"/>
-          </a:solidFill>
-          <a:ln>
-            <a:noFill/>
-          </a:ln>
-          <a:effectLst/>
-        </p:spPr>
-        <p:style>
-          <a:lnRef idx="1">
-            <a:schemeClr val="accent1"/>
-          </a:lnRef>
-          <a:fillRef idx="3">
-            <a:schemeClr val="accent1"/>
-          </a:fillRef>
-          <a:effectRef idx="2">
-            <a:schemeClr val="accent1"/>
-          </a:effectRef>
-          <a:fontRef idx="minor">
-            <a:schemeClr val="lt1"/>
-          </a:fontRef>
-        </p:style>
-        <p:txBody>
-          <a:bodyPr rtlCol="0" anchor="ctr"/>
-          <a:lstStyle/>
-          <a:p>
-            <a:pPr algn="ctr"/>
-          </a:p>
-        </p:txBody>
-      </p:sp>
-      <p:sp>
-        <p:nvSpPr>
-          <p:cNvPr id="7" name="TextBox 6"/>
-          <p:cNvSpPr txBox="1"/>
-          <p:nvPr/>
-        </p:nvSpPr>
-        <p:spPr>
-          <a:xfrm>
-            <a:off x="4572000" y="1417320"/>
-            <a:ext cx="3108960" cy="457200"/>
-          </a:xfrm>
-          <a:prstGeom prst="rect">
-            <a:avLst/>
-          </a:prstGeom>
-          <a:noFill/>
-        </p:spPr>
-        <p:txBody>
-          <a:bodyPr wrap="square">
-            <a:spAutoFit/>
-          </a:bodyPr>
-          <a:lstStyle/>
-          <a:p>
-            <a:pPr algn="ctr">
-              <a:defRPr sz="1600" b="1">
-                <a:solidFill>
-                  <a:srgbClr val="FFFFFF"/>
-                </a:solidFill>
-              </a:defRPr>
-            </a:pPr>
-            <a:r>
-              <a:t>Traditional Timer</a:t>
-            </a:r>
-          </a:p>
-        </p:txBody>
-      </p:sp>
-      <p:sp>
-        <p:nvSpPr>
-          <p:cNvPr id="8" name="Rounded Rectangle 7"/>
-          <p:cNvSpPr/>
-          <p:nvPr/>
-        </p:nvSpPr>
-        <p:spPr>
-          <a:xfrm>
-            <a:off x="8046720" y="1371600"/>
-            <a:ext cx="3474720" cy="548640"/>
-          </a:xfrm>
-          <a:prstGeom prst="roundRect">
-            <a:avLst/>
-          </a:prstGeom>
-          <a:solidFill>
-            <a:srgbClr val="FF6B35"/>
-          </a:solidFill>
-          <a:ln>
-            <a:noFill/>
-          </a:ln>
-          <a:effectLst/>
-        </p:spPr>
-        <p:style>
-          <a:lnRef idx="1">
-            <a:schemeClr val="accent1"/>
-          </a:lnRef>
-          <a:fillRef idx="3">
-            <a:schemeClr val="accent1"/>
-          </a:fillRef>
-          <a:effectRef idx="2">
-            <a:schemeClr val="accent1"/>
-          </a:effectRef>
-          <a:fontRef idx="minor">
-            <a:schemeClr val="lt1"/>
-          </a:fontRef>
-        </p:style>
-        <p:txBody>
-          <a:bodyPr rtlCol="0" anchor="ctr"/>
-          <a:lstStyle/>
-          <a:p>
-            <a:pPr algn="ctr"/>
-          </a:p>
-        </p:txBody>
-      </p:sp>
-      <p:sp>
-        <p:nvSpPr>
-          <p:cNvPr id="9" name="TextBox 8"/>
-          <p:cNvSpPr txBox="1"/>
-          <p:nvPr/>
-        </p:nvSpPr>
-        <p:spPr>
-          <a:xfrm>
-            <a:off x="8229600" y="1417320"/>
-            <a:ext cx="3108960" cy="457200"/>
-          </a:xfrm>
-          <a:prstGeom prst="rect">
-            <a:avLst/>
-          </a:prstGeom>
-          <a:noFill/>
-        </p:spPr>
-        <p:txBody>
-          <a:bodyPr wrap="square">
-            <a:spAutoFit/>
-          </a:bodyPr>
-          <a:lstStyle/>
-          <a:p>
-            <a:pPr algn="ctr">
-              <a:defRPr sz="1600" b="1">
-                <a:solidFill>
-                  <a:srgbClr val="FFFFFF"/>
-                </a:solidFill>
-              </a:defRPr>
-            </a:pPr>
-            <a:r>
-              <a:t>FocusBuddy</a:t>
-            </a:r>
-          </a:p>
-        </p:txBody>
-      </p:sp>
-      <p:sp>
-        <p:nvSpPr>
-          <p:cNvPr id="10" name="Rounded Rectangle 9"/>
-          <p:cNvSpPr/>
-          <p:nvPr/>
-        </p:nvSpPr>
-        <p:spPr>
-          <a:xfrm>
-            <a:off x="731520" y="2103120"/>
-            <a:ext cx="3474720" cy="502920"/>
-          </a:xfrm>
-          <a:prstGeom prst="roundRect">
-            <a:avLst/>
-          </a:prstGeom>
-          <a:solidFill>
-            <a:srgbClr val="22223E"/>
-          </a:solidFill>
-          <a:ln>
-            <a:noFill/>
-          </a:ln>
-          <a:effectLst/>
-        </p:spPr>
-        <p:style>
-          <a:lnRef idx="1">
-            <a:schemeClr val="accent1"/>
-          </a:lnRef>
-          <a:fillRef idx="3">
-            <a:schemeClr val="accent1"/>
-          </a:fillRef>
-          <a:effectRef idx="2">
-            <a:schemeClr val="accent1"/>
-          </a:effectRef>
-          <a:fontRef idx="minor">
-            <a:schemeClr val="lt1"/>
-          </a:fontRef>
-        </p:style>
-        <p:txBody>
-          <a:bodyPr rtlCol="0" anchor="ctr"/>
-          <a:lstStyle/>
-          <a:p>
-            <a:pPr algn="ctr"/>
-          </a:p>
-        </p:txBody>
-      </p:sp>
-      <p:sp>
-        <p:nvSpPr>
-          <p:cNvPr id="11" name="TextBox 10"/>
-          <p:cNvSpPr txBox="1"/>
-          <p:nvPr/>
-        </p:nvSpPr>
-        <p:spPr>
-          <a:xfrm>
-            <a:off x="914400" y="2176272"/>
-            <a:ext cx="3108960" cy="411480"/>
-          </a:xfrm>
-          <a:prstGeom prst="rect">
-            <a:avLst/>
-          </a:prstGeom>
-          <a:noFill/>
-        </p:spPr>
-        <p:txBody>
-          <a:bodyPr wrap="square">
-            <a:spAutoFit/>
-          </a:bodyPr>
-          <a:lstStyle/>
-          <a:p>
-            <a:pPr algn="l">
-              <a:defRPr sz="1400" b="0">
-                <a:solidFill>
-                  <a:srgbClr val="FF6B35"/>
-                </a:solidFill>
-              </a:defRPr>
-            </a:pPr>
-            <a:r>
-              <a:t>Detection</a:t>
-            </a:r>
-          </a:p>
-        </p:txBody>
-      </p:sp>
-      <p:sp>
-        <p:nvSpPr>
-          <p:cNvPr id="12" name="Rounded Rectangle 11"/>
-          <p:cNvSpPr/>
-          <p:nvPr/>
-        </p:nvSpPr>
-        <p:spPr>
-          <a:xfrm>
-            <a:off x="4389120" y="2103120"/>
-            <a:ext cx="3474720" cy="502920"/>
-          </a:xfrm>
-          <a:prstGeom prst="roundRect">
-            <a:avLst/>
-          </a:prstGeom>
-          <a:solidFill>
-            <a:srgbClr val="22223E"/>
-          </a:solidFill>
-          <a:ln>
-            <a:noFill/>
-          </a:ln>
-          <a:effectLst/>
-        </p:spPr>
-        <p:style>
-          <a:lnRef idx="1">
-            <a:schemeClr val="accent1"/>
-          </a:lnRef>
-          <a:fillRef idx="3">
-            <a:schemeClr val="accent1"/>
-          </a:fillRef>
-          <a:effectRef idx="2">
-            <a:schemeClr val="accent1"/>
-          </a:effectRef>
-          <a:fontRef idx="minor">
-            <a:schemeClr val="lt1"/>
-          </a:fontRef>
-        </p:style>
-        <p:txBody>
-          <a:bodyPr rtlCol="0" anchor="ctr"/>
-          <a:lstStyle/>
-          <a:p>
-            <a:pPr algn="ctr"/>
-          </a:p>
-        </p:txBody>
-      </p:sp>
-      <p:sp>
-        <p:nvSpPr>
-          <p:cNvPr id="13" name="TextBox 12"/>
-          <p:cNvSpPr txBox="1"/>
-          <p:nvPr/>
-        </p:nvSpPr>
-        <p:spPr>
-          <a:xfrm>
-            <a:off x="4572000" y="2176272"/>
-            <a:ext cx="3108960" cy="411480"/>
-          </a:xfrm>
-          <a:prstGeom prst="rect">
-            <a:avLst/>
-          </a:prstGeom>
-          <a:noFill/>
-        </p:spPr>
-        <p:txBody>
-          <a:bodyPr wrap="square">
-            <a:spAutoFit/>
-          </a:bodyPr>
-          <a:lstStyle/>
-          <a:p>
-            <a:pPr algn="l">
-              <a:defRPr sz="1400" b="0">
-                <a:solidFill>
-                  <a:srgbClr val="E0E0E0"/>
-                </a:solidFill>
-              </a:defRPr>
-            </a:pPr>
-            <a:r>
-              <a:t>None</a:t>
-            </a:r>
-          </a:p>
-        </p:txBody>
-      </p:sp>
-      <p:sp>
-        <p:nvSpPr>
-          <p:cNvPr id="14" name="Rounded Rectangle 13"/>
-          <p:cNvSpPr/>
-          <p:nvPr/>
-        </p:nvSpPr>
-        <p:spPr>
-          <a:xfrm>
-            <a:off x="8046720" y="2103120"/>
-            <a:ext cx="3474720" cy="502920"/>
-          </a:xfrm>
-          <a:prstGeom prst="roundRect">
-            <a:avLst/>
-          </a:prstGeom>
-          <a:solidFill>
-            <a:srgbClr val="22223E"/>
-          </a:solidFill>
-          <a:ln>
-            <a:noFill/>
-          </a:ln>
-          <a:effectLst/>
-        </p:spPr>
-        <p:style>
-          <a:lnRef idx="1">
-            <a:schemeClr val="accent1"/>
-          </a:lnRef>
-          <a:fillRef idx="3">
-            <a:schemeClr val="accent1"/>
-          </a:fillRef>
-          <a:effectRef idx="2">
-            <a:schemeClr val="accent1"/>
-          </a:effectRef>
-          <a:fontRef idx="minor">
-            <a:schemeClr val="lt1"/>
-          </a:fontRef>
-        </p:style>
-        <p:txBody>
-          <a:bodyPr rtlCol="0" anchor="ctr"/>
-          <a:lstStyle/>
-          <a:p>
-            <a:pPr algn="ctr"/>
-          </a:p>
-        </p:txBody>
-      </p:sp>
-      <p:sp>
-        <p:nvSpPr>
-          <p:cNvPr id="15" name="TextBox 14"/>
-          <p:cNvSpPr txBox="1"/>
-          <p:nvPr/>
-        </p:nvSpPr>
-        <p:spPr>
-          <a:xfrm>
-            <a:off x="8229600" y="2176272"/>
-            <a:ext cx="3108960" cy="411480"/>
-          </a:xfrm>
-          <a:prstGeom prst="rect">
-            <a:avLst/>
-          </a:prstGeom>
-          <a:noFill/>
-        </p:spPr>
-        <p:txBody>
-          <a:bodyPr wrap="square">
-            <a:spAutoFit/>
-          </a:bodyPr>
-          <a:lstStyle/>
-          <a:p>
-            <a:pPr algn="l">
-              <a:defRPr sz="1400" b="1">
-                <a:solidFill>
-                  <a:srgbClr val="E0E0E0"/>
-                </a:solidFill>
-              </a:defRPr>
-            </a:pPr>
-            <a:r>
-              <a:t>FaceMesh 468-pt face tracking</a:t>
-            </a:r>
-          </a:p>
-        </p:txBody>
-      </p:sp>
-      <p:sp>
-        <p:nvSpPr>
-          <p:cNvPr id="16" name="Rounded Rectangle 15"/>
-          <p:cNvSpPr/>
-          <p:nvPr/>
-        </p:nvSpPr>
-        <p:spPr>
-          <a:xfrm>
-            <a:off x="731520" y="2697479"/>
-            <a:ext cx="3474720" cy="502920"/>
-          </a:xfrm>
-          <a:prstGeom prst="roundRect">
-            <a:avLst/>
-          </a:prstGeom>
-          <a:solidFill>
-            <a:srgbClr val="1E1E3A"/>
-          </a:solidFill>
-          <a:ln>
-            <a:noFill/>
-          </a:ln>
-          <a:effectLst/>
-        </p:spPr>
-        <p:style>
-          <a:lnRef idx="1">
-            <a:schemeClr val="accent1"/>
-          </a:lnRef>
-          <a:fillRef idx="3">
-            <a:schemeClr val="accent1"/>
-          </a:fillRef>
-          <a:effectRef idx="2">
-            <a:schemeClr val="accent1"/>
-          </a:effectRef>
-          <a:fontRef idx="minor">
-            <a:schemeClr val="lt1"/>
-          </a:fontRef>
-        </p:style>
-        <p:txBody>
-          <a:bodyPr rtlCol="0" anchor="ctr"/>
-          <a:lstStyle/>
-          <a:p>
-            <a:pPr algn="ctr"/>
-          </a:p>
-        </p:txBody>
-      </p:sp>
-      <p:sp>
-        <p:nvSpPr>
-          <p:cNvPr id="17" name="TextBox 16"/>
-          <p:cNvSpPr txBox="1"/>
-          <p:nvPr/>
-        </p:nvSpPr>
-        <p:spPr>
-          <a:xfrm>
-            <a:off x="914400" y="2770631"/>
-            <a:ext cx="3108960" cy="411480"/>
-          </a:xfrm>
-          <a:prstGeom prst="rect">
-            <a:avLst/>
-          </a:prstGeom>
-          <a:noFill/>
-        </p:spPr>
-        <p:txBody>
-          <a:bodyPr wrap="square">
-            <a:spAutoFit/>
-          </a:bodyPr>
-          <a:lstStyle/>
-          <a:p>
-            <a:pPr algn="l">
-              <a:defRPr sz="1400" b="0">
-                <a:solidFill>
-                  <a:srgbClr val="FF6B35"/>
-                </a:solidFill>
-              </a:defRPr>
-            </a:pPr>
-            <a:r>
-              <a:t>Feedback</a:t>
-            </a:r>
-          </a:p>
-        </p:txBody>
-      </p:sp>
-      <p:sp>
-        <p:nvSpPr>
-          <p:cNvPr id="18" name="Rounded Rectangle 17"/>
-          <p:cNvSpPr/>
-          <p:nvPr/>
-        </p:nvSpPr>
-        <p:spPr>
-          <a:xfrm>
-            <a:off x="4389120" y="2697479"/>
-            <a:ext cx="3474720" cy="502920"/>
-          </a:xfrm>
-          <a:prstGeom prst="roundRect">
-            <a:avLst/>
-          </a:prstGeom>
-          <a:solidFill>
-            <a:srgbClr val="1E1E3A"/>
-          </a:solidFill>
-          <a:ln>
-            <a:noFill/>
-          </a:ln>
-          <a:effectLst/>
-        </p:spPr>
-        <p:style>
-          <a:lnRef idx="1">
-            <a:schemeClr val="accent1"/>
-          </a:lnRef>
-          <a:fillRef idx="3">
-            <a:schemeClr val="accent1"/>
-          </a:fillRef>
-          <a:effectRef idx="2">
-            <a:schemeClr val="accent1"/>
-          </a:effectRef>
-          <a:fontRef idx="minor">
-            <a:schemeClr val="lt1"/>
-          </a:fontRef>
-        </p:style>
-        <p:txBody>
-          <a:bodyPr rtlCol="0" anchor="ctr"/>
-          <a:lstStyle/>
-          <a:p>
-            <a:pPr algn="ctr"/>
-          </a:p>
-        </p:txBody>
-      </p:sp>
-      <p:sp>
-        <p:nvSpPr>
-          <p:cNvPr id="19" name="TextBox 18"/>
-          <p:cNvSpPr txBox="1"/>
-          <p:nvPr/>
-        </p:nvSpPr>
-        <p:spPr>
-          <a:xfrm>
-            <a:off x="4572000" y="2770631"/>
-            <a:ext cx="3108960" cy="411480"/>
-          </a:xfrm>
-          <a:prstGeom prst="rect">
-            <a:avLst/>
-          </a:prstGeom>
-          <a:noFill/>
-        </p:spPr>
-        <p:txBody>
-          <a:bodyPr wrap="square">
-            <a:spAutoFit/>
-          </a:bodyPr>
-          <a:lstStyle/>
-          <a:p>
-            <a:pPr algn="l">
-              <a:defRPr sz="1400" b="0">
-                <a:solidFill>
-                  <a:srgbClr val="E0E0E0"/>
-                </a:solidFill>
-              </a:defRPr>
-            </a:pPr>
-            <a:r>
-              <a:t>Phone alarm</a:t>
-            </a:r>
-          </a:p>
-        </p:txBody>
-      </p:sp>
-      <p:sp>
-        <p:nvSpPr>
-          <p:cNvPr id="20" name="Rounded Rectangle 19"/>
-          <p:cNvSpPr/>
-          <p:nvPr/>
-        </p:nvSpPr>
-        <p:spPr>
-          <a:xfrm>
-            <a:off x="8046720" y="2697479"/>
-            <a:ext cx="3474720" cy="502920"/>
-          </a:xfrm>
-          <a:prstGeom prst="roundRect">
-            <a:avLst/>
-          </a:prstGeom>
-          <a:solidFill>
-            <a:srgbClr val="1E1E3A"/>
-          </a:solidFill>
-          <a:ln>
-            <a:noFill/>
-          </a:ln>
-          <a:effectLst/>
-        </p:spPr>
-        <p:style>
-          <a:lnRef idx="1">
-            <a:schemeClr val="accent1"/>
-          </a:lnRef>
-          <a:fillRef idx="3">
-            <a:schemeClr val="accent1"/>
-          </a:fillRef>
-          <a:effectRef idx="2">
-            <a:schemeClr val="accent1"/>
-          </a:effectRef>
-          <a:fontRef idx="minor">
-            <a:schemeClr val="lt1"/>
-          </a:fontRef>
-        </p:style>
-        <p:txBody>
-          <a:bodyPr rtlCol="0" anchor="ctr"/>
-          <a:lstStyle/>
-          <a:p>
-            <a:pPr algn="ctr"/>
-          </a:p>
-        </p:txBody>
-      </p:sp>
-      <p:sp>
-        <p:nvSpPr>
-          <p:cNvPr id="21" name="TextBox 20"/>
-          <p:cNvSpPr txBox="1"/>
-          <p:nvPr/>
-        </p:nvSpPr>
-        <p:spPr>
-          <a:xfrm>
-            <a:off x="8229600" y="2770631"/>
-            <a:ext cx="3108960" cy="411480"/>
-          </a:xfrm>
-          <a:prstGeom prst="rect">
-            <a:avLst/>
-          </a:prstGeom>
-          <a:noFill/>
-        </p:spPr>
-        <p:txBody>
-          <a:bodyPr wrap="square">
-            <a:spAutoFit/>
-          </a:bodyPr>
-          <a:lstStyle/>
-          <a:p>
-            <a:pPr algn="l">
-              <a:defRPr sz="1400" b="1">
-                <a:solidFill>
-                  <a:srgbClr val="E0E0E0"/>
-                </a:solidFill>
-              </a:defRPr>
-            </a:pPr>
-            <a:r>
-              <a:t>LED pet + color status indicator</a:t>
-            </a:r>
-          </a:p>
-        </p:txBody>
-      </p:sp>
-      <p:sp>
-        <p:nvSpPr>
-          <p:cNvPr id="22" name="Rounded Rectangle 21"/>
-          <p:cNvSpPr/>
-          <p:nvPr/>
-        </p:nvSpPr>
-        <p:spPr>
-          <a:xfrm>
-            <a:off x="731520" y="3291839"/>
-            <a:ext cx="3474720" cy="502920"/>
-          </a:xfrm>
-          <a:prstGeom prst="roundRect">
-            <a:avLst/>
-          </a:prstGeom>
-          <a:solidFill>
-            <a:srgbClr val="22223E"/>
-          </a:solidFill>
-          <a:ln>
-            <a:noFill/>
-          </a:ln>
-          <a:effectLst/>
-        </p:spPr>
-        <p:style>
-          <a:lnRef idx="1">
-            <a:schemeClr val="accent1"/>
-          </a:lnRef>
-          <a:fillRef idx="3">
-            <a:schemeClr val="accent1"/>
-          </a:fillRef>
-          <a:effectRef idx="2">
-            <a:schemeClr val="accent1"/>
-          </a:effectRef>
-          <a:fontRef idx="minor">
-            <a:schemeClr val="lt1"/>
-          </a:fontRef>
-        </p:style>
-        <p:txBody>
-          <a:bodyPr rtlCol="0" anchor="ctr"/>
-          <a:lstStyle/>
-          <a:p>
-            <a:pPr algn="ctr"/>
-          </a:p>
-        </p:txBody>
-      </p:sp>
-      <p:sp>
-        <p:nvSpPr>
-          <p:cNvPr id="23" name="TextBox 22"/>
-          <p:cNvSpPr txBox="1"/>
-          <p:nvPr/>
-        </p:nvSpPr>
-        <p:spPr>
-          <a:xfrm>
-            <a:off x="914400" y="3364991"/>
-            <a:ext cx="3108960" cy="411480"/>
-          </a:xfrm>
-          <a:prstGeom prst="rect">
-            <a:avLst/>
-          </a:prstGeom>
-          <a:noFill/>
-        </p:spPr>
-        <p:txBody>
-          <a:bodyPr wrap="square">
-            <a:spAutoFit/>
-          </a:bodyPr>
-          <a:lstStyle/>
-          <a:p>
-            <a:pPr algn="l">
-              <a:defRPr sz="1400" b="0">
-                <a:solidFill>
-                  <a:srgbClr val="FF6B35"/>
-                </a:solidFill>
-              </a:defRPr>
-            </a:pPr>
-            <a:r>
-              <a:t>Data Logging</a:t>
-            </a:r>
-          </a:p>
-        </p:txBody>
-      </p:sp>
-      <p:sp>
-        <p:nvSpPr>
-          <p:cNvPr id="24" name="Rounded Rectangle 23"/>
-          <p:cNvSpPr/>
-          <p:nvPr/>
-        </p:nvSpPr>
-        <p:spPr>
-          <a:xfrm>
-            <a:off x="4389120" y="3291839"/>
-            <a:ext cx="3474720" cy="502920"/>
-          </a:xfrm>
-          <a:prstGeom prst="roundRect">
-            <a:avLst/>
-          </a:prstGeom>
-          <a:solidFill>
-            <a:srgbClr val="22223E"/>
-          </a:solidFill>
-          <a:ln>
-            <a:noFill/>
-          </a:ln>
-          <a:effectLst/>
-        </p:spPr>
-        <p:style>
-          <a:lnRef idx="1">
-            <a:schemeClr val="accent1"/>
-          </a:lnRef>
-          <a:fillRef idx="3">
-            <a:schemeClr val="accent1"/>
-          </a:fillRef>
-          <a:effectRef idx="2">
-            <a:schemeClr val="accent1"/>
-          </a:effectRef>
-          <a:fontRef idx="minor">
-            <a:schemeClr val="lt1"/>
-          </a:fontRef>
-        </p:style>
-        <p:txBody>
-          <a:bodyPr rtlCol="0" anchor="ctr"/>
-          <a:lstStyle/>
-          <a:p>
-            <a:pPr algn="ctr"/>
-          </a:p>
-        </p:txBody>
-      </p:sp>
-      <p:sp>
-        <p:nvSpPr>
-          <p:cNvPr id="25" name="TextBox 24"/>
-          <p:cNvSpPr txBox="1"/>
-          <p:nvPr/>
-        </p:nvSpPr>
-        <p:spPr>
-          <a:xfrm>
-            <a:off x="4572000" y="3364991"/>
-            <a:ext cx="3108960" cy="411480"/>
-          </a:xfrm>
-          <a:prstGeom prst="rect">
-            <a:avLst/>
-          </a:prstGeom>
-          <a:noFill/>
-        </p:spPr>
-        <p:txBody>
-          <a:bodyPr wrap="square">
-            <a:spAutoFit/>
-          </a:bodyPr>
-          <a:lstStyle/>
-          <a:p>
-            <a:pPr algn="l">
-              <a:defRPr sz="1400" b="0">
-                <a:solidFill>
-                  <a:srgbClr val="E0E0E0"/>
-                </a:solidFill>
-              </a:defRPr>
-            </a:pPr>
-            <a:r>
-              <a:t>None</a:t>
-            </a:r>
-          </a:p>
-        </p:txBody>
-      </p:sp>
-      <p:sp>
-        <p:nvSpPr>
-          <p:cNvPr id="26" name="Rounded Rectangle 25"/>
-          <p:cNvSpPr/>
-          <p:nvPr/>
-        </p:nvSpPr>
-        <p:spPr>
-          <a:xfrm>
-            <a:off x="8046720" y="3291839"/>
-            <a:ext cx="3474720" cy="502920"/>
-          </a:xfrm>
-          <a:prstGeom prst="roundRect">
-            <a:avLst/>
-          </a:prstGeom>
-          <a:solidFill>
-            <a:srgbClr val="22223E"/>
-          </a:solidFill>
-          <a:ln>
-            <a:noFill/>
-          </a:ln>
-          <a:effectLst/>
-        </p:spPr>
-        <p:style>
-          <a:lnRef idx="1">
-            <a:schemeClr val="accent1"/>
-          </a:lnRef>
-          <a:fillRef idx="3">
-            <a:schemeClr val="accent1"/>
-          </a:fillRef>
-          <a:effectRef idx="2">
-            <a:schemeClr val="accent1"/>
-          </a:effectRef>
-          <a:fontRef idx="minor">
-            <a:schemeClr val="lt1"/>
-          </a:fontRef>
-        </p:style>
-        <p:txBody>
-          <a:bodyPr rtlCol="0" anchor="ctr"/>
-          <a:lstStyle/>
-          <a:p>
-            <a:pPr algn="ctr"/>
-          </a:p>
-        </p:txBody>
-      </p:sp>
-      <p:sp>
-        <p:nvSpPr>
-          <p:cNvPr id="27" name="TextBox 26"/>
-          <p:cNvSpPr txBox="1"/>
-          <p:nvPr/>
-        </p:nvSpPr>
-        <p:spPr>
-          <a:xfrm>
-            <a:off x="8229600" y="3364991"/>
-            <a:ext cx="3108960" cy="411480"/>
-          </a:xfrm>
-          <a:prstGeom prst="rect">
-            <a:avLst/>
-          </a:prstGeom>
-          <a:noFill/>
-        </p:spPr>
-        <p:txBody>
-          <a:bodyPr wrap="square">
-            <a:spAutoFit/>
-          </a:bodyPr>
-          <a:lstStyle/>
-          <a:p>
-            <a:pPr algn="l">
-              <a:defRPr sz="1400" b="1">
-                <a:solidFill>
-                  <a:srgbClr val="E0E0E0"/>
-                </a:solidFill>
-              </a:defRPr>
-            </a:pPr>
-            <a:r>
-              <a:t>Focus rate + stats + 7-day trends</a:t>
-            </a:r>
-          </a:p>
-        </p:txBody>
-      </p:sp>
-      <p:sp>
-        <p:nvSpPr>
-          <p:cNvPr id="28" name="Rounded Rectangle 27"/>
-          <p:cNvSpPr/>
-          <p:nvPr/>
-        </p:nvSpPr>
-        <p:spPr>
-          <a:xfrm>
-            <a:off x="731520" y="3886200"/>
-            <a:ext cx="3474720" cy="502920"/>
-          </a:xfrm>
-          <a:prstGeom prst="roundRect">
-            <a:avLst/>
-          </a:prstGeom>
-          <a:solidFill>
-            <a:srgbClr val="1E1E3A"/>
-          </a:solidFill>
-          <a:ln>
-            <a:noFill/>
-          </a:ln>
-          <a:effectLst/>
-        </p:spPr>
-        <p:style>
-          <a:lnRef idx="1">
-            <a:schemeClr val="accent1"/>
-          </a:lnRef>
-          <a:fillRef idx="3">
-            <a:schemeClr val="accent1"/>
-          </a:fillRef>
-          <a:effectRef idx="2">
-            <a:schemeClr val="accent1"/>
-          </a:effectRef>
-          <a:fontRef idx="minor">
-            <a:schemeClr val="lt1"/>
-          </a:fontRef>
-        </p:style>
-        <p:txBody>
-          <a:bodyPr rtlCol="0" anchor="ctr"/>
-          <a:lstStyle/>
-          <a:p>
-            <a:pPr algn="ctr"/>
-          </a:p>
-        </p:txBody>
-      </p:sp>
-      <p:sp>
-        <p:nvSpPr>
-          <p:cNvPr id="29" name="TextBox 28"/>
-          <p:cNvSpPr txBox="1"/>
-          <p:nvPr/>
-        </p:nvSpPr>
-        <p:spPr>
-          <a:xfrm>
-            <a:off x="914400" y="3959352"/>
-            <a:ext cx="3108960" cy="411480"/>
-          </a:xfrm>
-          <a:prstGeom prst="rect">
-            <a:avLst/>
-          </a:prstGeom>
-          <a:noFill/>
-        </p:spPr>
-        <p:txBody>
-          <a:bodyPr wrap="square">
-            <a:spAutoFit/>
-          </a:bodyPr>
-          <a:lstStyle/>
-          <a:p>
-            <a:pPr algn="l">
-              <a:defRPr sz="1400" b="0">
-                <a:solidFill>
-                  <a:srgbClr val="FF6B35"/>
-                </a:solidFill>
-              </a:defRPr>
-            </a:pPr>
-            <a:r>
-              <a:t>Integration</a:t>
-            </a:r>
-          </a:p>
-        </p:txBody>
-      </p:sp>
-      <p:sp>
-        <p:nvSpPr>
-          <p:cNvPr id="30" name="Rounded Rectangle 29"/>
-          <p:cNvSpPr/>
-          <p:nvPr/>
-        </p:nvSpPr>
-        <p:spPr>
-          <a:xfrm>
-            <a:off x="4389120" y="3886200"/>
-            <a:ext cx="3474720" cy="502920"/>
-          </a:xfrm>
-          <a:prstGeom prst="roundRect">
-            <a:avLst/>
-          </a:prstGeom>
-          <a:solidFill>
-            <a:srgbClr val="1E1E3A"/>
-          </a:solidFill>
-          <a:ln>
-            <a:noFill/>
-          </a:ln>
-          <a:effectLst/>
-        </p:spPr>
-        <p:style>
-          <a:lnRef idx="1">
-            <a:schemeClr val="accent1"/>
-          </a:lnRef>
-          <a:fillRef idx="3">
-            <a:schemeClr val="accent1"/>
-          </a:fillRef>
-          <a:effectRef idx="2">
-            <a:schemeClr val="accent1"/>
-          </a:effectRef>
-          <a:fontRef idx="minor">
-            <a:schemeClr val="lt1"/>
-          </a:fontRef>
-        </p:style>
-        <p:txBody>
-          <a:bodyPr rtlCol="0" anchor="ctr"/>
-          <a:lstStyle/>
-          <a:p>
-            <a:pPr algn="ctr"/>
-          </a:p>
-        </p:txBody>
-      </p:sp>
-      <p:sp>
-        <p:nvSpPr>
-          <p:cNvPr id="31" name="TextBox 30"/>
-          <p:cNvSpPr txBox="1"/>
-          <p:nvPr/>
-        </p:nvSpPr>
-        <p:spPr>
-          <a:xfrm>
-            <a:off x="4572000" y="3959352"/>
-            <a:ext cx="3108960" cy="411480"/>
-          </a:xfrm>
-          <a:prstGeom prst="rect">
-            <a:avLst/>
-          </a:prstGeom>
-          <a:noFill/>
-        </p:spPr>
-        <p:txBody>
-          <a:bodyPr wrap="square">
-            <a:spAutoFit/>
-          </a:bodyPr>
-          <a:lstStyle/>
-          <a:p>
-            <a:pPr algn="l">
-              <a:defRPr sz="1400" b="0">
-                <a:solidFill>
-                  <a:srgbClr val="E0E0E0"/>
-                </a:solidFill>
-              </a:defRPr>
-            </a:pPr>
-            <a:r>
-              <a:t>Standalone</a:t>
-            </a:r>
-          </a:p>
-        </p:txBody>
-      </p:sp>
-      <p:sp>
-        <p:nvSpPr>
-          <p:cNvPr id="32" name="Rounded Rectangle 31"/>
-          <p:cNvSpPr/>
-          <p:nvPr/>
-        </p:nvSpPr>
-        <p:spPr>
-          <a:xfrm>
-            <a:off x="8046720" y="3886200"/>
-            <a:ext cx="3474720" cy="502920"/>
-          </a:xfrm>
-          <a:prstGeom prst="roundRect">
-            <a:avLst/>
-          </a:prstGeom>
-          <a:solidFill>
-            <a:srgbClr val="1E1E3A"/>
-          </a:solidFill>
-          <a:ln>
-            <a:noFill/>
-          </a:ln>
-          <a:effectLst/>
-        </p:spPr>
-        <p:style>
-          <a:lnRef idx="1">
-            <a:schemeClr val="accent1"/>
-          </a:lnRef>
-          <a:fillRef idx="3">
-            <a:schemeClr val="accent1"/>
-          </a:fillRef>
-          <a:effectRef idx="2">
-            <a:schemeClr val="accent1"/>
-          </a:effectRef>
-          <a:fontRef idx="minor">
-            <a:schemeClr val="lt1"/>
-          </a:fontRef>
-        </p:style>
-        <p:txBody>
-          <a:bodyPr rtlCol="0" anchor="ctr"/>
-          <a:lstStyle/>
-          <a:p>
-            <a:pPr algn="ctr"/>
-          </a:p>
-        </p:txBody>
-      </p:sp>
-      <p:sp>
-        <p:nvSpPr>
-          <p:cNvPr id="33" name="TextBox 32"/>
-          <p:cNvSpPr txBox="1"/>
-          <p:nvPr/>
-        </p:nvSpPr>
-        <p:spPr>
-          <a:xfrm>
-            <a:off x="8229600" y="3959352"/>
-            <a:ext cx="3108960" cy="411480"/>
-          </a:xfrm>
-          <a:prstGeom prst="rect">
-            <a:avLst/>
-          </a:prstGeom>
-          <a:noFill/>
-        </p:spPr>
-        <p:txBody>
-          <a:bodyPr wrap="square">
-            <a:spAutoFit/>
-          </a:bodyPr>
-          <a:lstStyle/>
-          <a:p>
-            <a:pPr algn="l">
-              <a:defRPr sz="1400" b="1">
-                <a:solidFill>
-                  <a:srgbClr val="E0E0E0"/>
-                </a:solidFill>
-              </a:defRPr>
-            </a:pPr>
-            <a:r>
-              <a:t>Detect + Timer + Pet linked</a:t>
-            </a:r>
-          </a:p>
-        </p:txBody>
-      </p:sp>
-      <p:sp>
-        <p:nvSpPr>
-          <p:cNvPr id="34" name="Rounded Rectangle 33"/>
-          <p:cNvSpPr/>
-          <p:nvPr/>
-        </p:nvSpPr>
-        <p:spPr>
-          <a:xfrm>
-            <a:off x="731520" y="4480560"/>
-            <a:ext cx="3474720" cy="502920"/>
-          </a:xfrm>
-          <a:prstGeom prst="roundRect">
-            <a:avLst/>
-          </a:prstGeom>
-          <a:solidFill>
-            <a:srgbClr val="22223E"/>
-          </a:solidFill>
-          <a:ln>
-            <a:noFill/>
-          </a:ln>
-          <a:effectLst/>
-        </p:spPr>
-        <p:style>
-          <a:lnRef idx="1">
-            <a:schemeClr val="accent1"/>
-          </a:lnRef>
-          <a:fillRef idx="3">
-            <a:schemeClr val="accent1"/>
-          </a:fillRef>
-          <a:effectRef idx="2">
-            <a:schemeClr val="accent1"/>
-          </a:effectRef>
-          <a:fontRef idx="minor">
-            <a:schemeClr val="lt1"/>
-          </a:fontRef>
-        </p:style>
-        <p:txBody>
-          <a:bodyPr rtlCol="0" anchor="ctr"/>
-          <a:lstStyle/>
-          <a:p>
-            <a:pPr algn="ctr"/>
-          </a:p>
-        </p:txBody>
-      </p:sp>
-      <p:sp>
-        <p:nvSpPr>
-          <p:cNvPr id="35" name="TextBox 34"/>
-          <p:cNvSpPr txBox="1"/>
-          <p:nvPr/>
-        </p:nvSpPr>
-        <p:spPr>
-          <a:xfrm>
-            <a:off x="914400" y="4553712"/>
-            <a:ext cx="3108960" cy="411480"/>
-          </a:xfrm>
-          <a:prstGeom prst="rect">
-            <a:avLst/>
-          </a:prstGeom>
-          <a:noFill/>
-        </p:spPr>
-        <p:txBody>
-          <a:bodyPr wrap="square">
-            <a:spAutoFit/>
-          </a:bodyPr>
-          <a:lstStyle/>
-          <a:p>
-            <a:pPr algn="l">
-              <a:defRPr sz="1400" b="0">
-                <a:solidFill>
-                  <a:srgbClr val="FF6B35"/>
-                </a:solidFill>
-              </a:defRPr>
-            </a:pPr>
-            <a:r>
-              <a:t>Hardware</a:t>
-            </a:r>
-          </a:p>
-        </p:txBody>
-      </p:sp>
-      <p:sp>
-        <p:nvSpPr>
-          <p:cNvPr id="36" name="Rounded Rectangle 35"/>
-          <p:cNvSpPr/>
-          <p:nvPr/>
-        </p:nvSpPr>
-        <p:spPr>
-          <a:xfrm>
-            <a:off x="4389120" y="4480560"/>
-            <a:ext cx="3474720" cy="502920"/>
-          </a:xfrm>
-          <a:prstGeom prst="roundRect">
-            <a:avLst/>
-          </a:prstGeom>
-          <a:solidFill>
-            <a:srgbClr val="22223E"/>
-          </a:solidFill>
-          <a:ln>
-            <a:noFill/>
-          </a:ln>
-          <a:effectLst/>
-        </p:spPr>
-        <p:style>
-          <a:lnRef idx="1">
-            <a:schemeClr val="accent1"/>
-          </a:lnRef>
-          <a:fillRef idx="3">
-            <a:schemeClr val="accent1"/>
-          </a:fillRef>
-          <a:effectRef idx="2">
-            <a:schemeClr val="accent1"/>
-          </a:effectRef>
-          <a:fontRef idx="minor">
-            <a:schemeClr val="lt1"/>
-          </a:fontRef>
-        </p:style>
-        <p:txBody>
-          <a:bodyPr rtlCol="0" anchor="ctr"/>
-          <a:lstStyle/>
-          <a:p>
-            <a:pPr algn="ctr"/>
-          </a:p>
-        </p:txBody>
-      </p:sp>
-      <p:sp>
-        <p:nvSpPr>
-          <p:cNvPr id="37" name="TextBox 36"/>
-          <p:cNvSpPr txBox="1"/>
-          <p:nvPr/>
-        </p:nvSpPr>
-        <p:spPr>
-          <a:xfrm>
-            <a:off x="4572000" y="4553712"/>
-            <a:ext cx="3108960" cy="411480"/>
-          </a:xfrm>
-          <a:prstGeom prst="rect">
-            <a:avLst/>
-          </a:prstGeom>
-          <a:noFill/>
-        </p:spPr>
-        <p:txBody>
-          <a:bodyPr wrap="square">
-            <a:spAutoFit/>
-          </a:bodyPr>
-          <a:lstStyle/>
-          <a:p>
-            <a:pPr algn="l">
-              <a:defRPr sz="1400" b="0">
-                <a:solidFill>
-                  <a:srgbClr val="E0E0E0"/>
-                </a:solidFill>
-              </a:defRPr>
-            </a:pPr>
-            <a:r>
-              <a:t>None</a:t>
-            </a:r>
-          </a:p>
-        </p:txBody>
-      </p:sp>
-      <p:sp>
-        <p:nvSpPr>
-          <p:cNvPr id="38" name="Rounded Rectangle 37"/>
-          <p:cNvSpPr/>
-          <p:nvPr/>
-        </p:nvSpPr>
-        <p:spPr>
-          <a:xfrm>
-            <a:off x="8046720" y="4480560"/>
-            <a:ext cx="3474720" cy="502920"/>
-          </a:xfrm>
-          <a:prstGeom prst="roundRect">
-            <a:avLst/>
-          </a:prstGeom>
-          <a:solidFill>
-            <a:srgbClr val="22223E"/>
-          </a:solidFill>
-          <a:ln>
-            <a:noFill/>
-          </a:ln>
-          <a:effectLst/>
-        </p:spPr>
-        <p:style>
-          <a:lnRef idx="1">
-            <a:schemeClr val="accent1"/>
-          </a:lnRef>
-          <a:fillRef idx="3">
-            <a:schemeClr val="accent1"/>
-          </a:fillRef>
-          <a:effectRef idx="2">
-            <a:schemeClr val="accent1"/>
-          </a:effectRef>
-          <a:fontRef idx="minor">
-            <a:schemeClr val="lt1"/>
-          </a:fontRef>
-        </p:style>
-        <p:txBody>
-          <a:bodyPr rtlCol="0" anchor="ctr"/>
-          <a:lstStyle/>
-          <a:p>
-            <a:pPr algn="ctr"/>
-          </a:p>
-        </p:txBody>
-      </p:sp>
-      <p:sp>
-        <p:nvSpPr>
-          <p:cNvPr id="39" name="TextBox 38"/>
-          <p:cNvSpPr txBox="1"/>
-          <p:nvPr/>
-        </p:nvSpPr>
-        <p:spPr>
-          <a:xfrm>
-            <a:off x="8229600" y="4553712"/>
-            <a:ext cx="3108960" cy="411480"/>
-          </a:xfrm>
-          <a:prstGeom prst="rect">
-            <a:avLst/>
-          </a:prstGeom>
-          <a:noFill/>
-        </p:spPr>
-        <p:txBody>
-          <a:bodyPr wrap="square">
-            <a:spAutoFit/>
-          </a:bodyPr>
-          <a:lstStyle/>
-          <a:p>
-            <a:pPr algn="l">
-              <a:defRPr sz="1400" b="1">
-                <a:solidFill>
-                  <a:srgbClr val="E0E0E0"/>
-                </a:solidFill>
-              </a:defRPr>
-            </a:pPr>
-            <a:r>
-              <a:t>ESP32-S3 8x8 LED Matrix</a:t>
-            </a:r>
-          </a:p>
-        </p:txBody>
-      </p:sp>
-      <p:sp>
-        <p:nvSpPr>
-          <p:cNvPr id="40" name="Rounded Rectangle 39"/>
-          <p:cNvSpPr/>
-          <p:nvPr/>
-        </p:nvSpPr>
-        <p:spPr>
-          <a:xfrm>
-            <a:off x="731520" y="5074920"/>
-            <a:ext cx="3474720" cy="502920"/>
-          </a:xfrm>
-          <a:prstGeom prst="roundRect">
-            <a:avLst/>
-          </a:prstGeom>
-          <a:solidFill>
-            <a:srgbClr val="1E1E3A"/>
-          </a:solidFill>
-          <a:ln>
-            <a:noFill/>
-          </a:ln>
-          <a:effectLst/>
-        </p:spPr>
-        <p:style>
-          <a:lnRef idx="1">
-            <a:schemeClr val="accent1"/>
-          </a:lnRef>
-          <a:fillRef idx="3">
-            <a:schemeClr val="accent1"/>
-          </a:fillRef>
-          <a:effectRef idx="2">
-            <a:schemeClr val="accent1"/>
-          </a:effectRef>
-          <a:fontRef idx="minor">
-            <a:schemeClr val="lt1"/>
-          </a:fontRef>
-        </p:style>
-        <p:txBody>
-          <a:bodyPr rtlCol="0" anchor="ctr"/>
-          <a:lstStyle/>
-          <a:p>
-            <a:pPr algn="ctr"/>
-          </a:p>
-        </p:txBody>
-      </p:sp>
-      <p:sp>
-        <p:nvSpPr>
-          <p:cNvPr id="41" name="TextBox 40"/>
-          <p:cNvSpPr txBox="1"/>
-          <p:nvPr/>
-        </p:nvSpPr>
-        <p:spPr>
-          <a:xfrm>
-            <a:off x="914400" y="5148072"/>
-            <a:ext cx="3108960" cy="411480"/>
-          </a:xfrm>
-          <a:prstGeom prst="rect">
-            <a:avLst/>
-          </a:prstGeom>
-          <a:noFill/>
-        </p:spPr>
-        <p:txBody>
-          <a:bodyPr wrap="square">
-            <a:spAutoFit/>
-          </a:bodyPr>
-          <a:lstStyle/>
-          <a:p>
-            <a:pPr algn="l">
-              <a:defRPr sz="1400" b="0">
-                <a:solidFill>
-                  <a:srgbClr val="FF6B35"/>
-                </a:solidFill>
-              </a:defRPr>
-            </a:pPr>
-            <a:r>
-              <a:t>Planning</a:t>
-            </a:r>
-          </a:p>
-        </p:txBody>
-      </p:sp>
-      <p:sp>
-        <p:nvSpPr>
-          <p:cNvPr id="42" name="Rounded Rectangle 41"/>
-          <p:cNvSpPr/>
-          <p:nvPr/>
-        </p:nvSpPr>
-        <p:spPr>
-          <a:xfrm>
-            <a:off x="4389120" y="5074920"/>
-            <a:ext cx="3474720" cy="502920"/>
-          </a:xfrm>
-          <a:prstGeom prst="roundRect">
-            <a:avLst/>
-          </a:prstGeom>
-          <a:solidFill>
-            <a:srgbClr val="1E1E3A"/>
-          </a:solidFill>
-          <a:ln>
-            <a:noFill/>
-          </a:ln>
-          <a:effectLst/>
-        </p:spPr>
-        <p:style>
-          <a:lnRef idx="1">
-            <a:schemeClr val="accent1"/>
-          </a:lnRef>
-          <a:fillRef idx="3">
-            <a:schemeClr val="accent1"/>
-          </a:fillRef>
-          <a:effectRef idx="2">
-            <a:schemeClr val="accent1"/>
-          </a:effectRef>
-          <a:fontRef idx="minor">
-            <a:schemeClr val="lt1"/>
-          </a:fontRef>
-        </p:style>
-        <p:txBody>
-          <a:bodyPr rtlCol="0" anchor="ctr"/>
-          <a:lstStyle/>
-          <a:p>
-            <a:pPr algn="ctr"/>
-          </a:p>
-        </p:txBody>
-      </p:sp>
-      <p:sp>
-        <p:nvSpPr>
-          <p:cNvPr id="43" name="TextBox 42"/>
-          <p:cNvSpPr txBox="1"/>
-          <p:nvPr/>
-        </p:nvSpPr>
-        <p:spPr>
-          <a:xfrm>
-            <a:off x="4572000" y="5148072"/>
-            <a:ext cx="3108960" cy="411480"/>
-          </a:xfrm>
-          <a:prstGeom prst="rect">
-            <a:avLst/>
-          </a:prstGeom>
-          <a:noFill/>
-        </p:spPr>
-        <p:txBody>
-          <a:bodyPr wrap="square">
-            <a:spAutoFit/>
-          </a:bodyPr>
-          <a:lstStyle/>
-          <a:p>
-            <a:pPr algn="l">
-              <a:defRPr sz="1400" b="0">
-                <a:solidFill>
-                  <a:srgbClr val="E0E0E0"/>
-                </a:solidFill>
-              </a:defRPr>
-            </a:pPr>
-            <a:r>
-              <a:t>None</a:t>
-            </a:r>
-          </a:p>
-        </p:txBody>
-      </p:sp>
-      <p:sp>
-        <p:nvSpPr>
-          <p:cNvPr id="44" name="Rounded Rectangle 43"/>
-          <p:cNvSpPr/>
-          <p:nvPr/>
-        </p:nvSpPr>
-        <p:spPr>
-          <a:xfrm>
-            <a:off x="8046720" y="5074920"/>
-            <a:ext cx="3474720" cy="502920"/>
-          </a:xfrm>
-          <a:prstGeom prst="roundRect">
-            <a:avLst/>
-          </a:prstGeom>
-          <a:solidFill>
-            <a:srgbClr val="1E1E3A"/>
-          </a:solidFill>
-          <a:ln>
-            <a:noFill/>
-          </a:ln>
-          <a:effectLst/>
-        </p:spPr>
-        <p:style>
-          <a:lnRef idx="1">
-            <a:schemeClr val="accent1"/>
-          </a:lnRef>
-          <a:fillRef idx="3">
-            <a:schemeClr val="accent1"/>
-          </a:fillRef>
-          <a:effectRef idx="2">
-            <a:schemeClr val="accent1"/>
-          </a:effectRef>
-          <a:fontRef idx="minor">
-            <a:schemeClr val="lt1"/>
-          </a:fontRef>
-        </p:style>
-        <p:txBody>
-          <a:bodyPr rtlCol="0" anchor="ctr"/>
-          <a:lstStyle/>
-          <a:p>
-            <a:pPr algn="ctr"/>
-          </a:p>
-        </p:txBody>
-      </p:sp>
-      <p:sp>
-        <p:nvSpPr>
-          <p:cNvPr id="45" name="TextBox 44"/>
-          <p:cNvSpPr txBox="1"/>
-          <p:nvPr/>
-        </p:nvSpPr>
-        <p:spPr>
-          <a:xfrm>
-            <a:off x="8229600" y="5148072"/>
-            <a:ext cx="3108960" cy="411480"/>
-          </a:xfrm>
-          <a:prstGeom prst="rect">
-            <a:avLst/>
-          </a:prstGeom>
-          <a:noFill/>
-        </p:spPr>
-        <p:txBody>
-          <a:bodyPr wrap="square">
-            <a:spAutoFit/>
-          </a:bodyPr>
-          <a:lstStyle/>
-          <a:p>
-            <a:pPr algn="l">
-              <a:defRPr sz="1400" b="1">
-                <a:solidFill>
-                  <a:srgbClr val="E0E0E0"/>
-                </a:solidFill>
-              </a:defRPr>
-            </a:pPr>
-            <a:r>
-              <a:t>Prompt -&gt; auto todo list</a:t>
+              <a:defRPr sz="1400">
+                <a:solidFill>
+                  <a:srgbClr val="8892B0"/>
+                </a:solidFill>
+              </a:defRPr>
+            </a:pPr>
+            <a:r>
+              <a:t>System Architecture Diagram (Browser -&gt; FaceMesh -&gt; ESP32 -&gt; WebSocket)</a:t>
             </a:r>
           </a:p>
         </p:txBody>
@@ -7342,8 +6675,8 @@
 </p:sld>
 </file>
 
-<file path=ppt/slides/slide8.xml><?xml version="1.0" encoding="utf-8"?>
-<p:sld xmlns:a="http://schemas.openxmlformats.org/drawingml/2006/main" xmlns:r="http://schemas.openxmlformats.org/officeDocument/2006/relationships" xmlns:p="http://schemas.openxmlformats.org/presentationml/2006/main">
+<file path=ppt/slides/slide7.xml><?xml version="1.0" encoding="utf-8"?>
+<p:sld xmlns:a="http://schemas.openxmlformats.org/drawingml/2006/main" xmlns:p="http://schemas.openxmlformats.org/presentationml/2006/main" xmlns:r="http://schemas.openxmlformats.org/officeDocument/2006/relationships">
   <p:cSld>
     <p:bg>
       <p:bgPr>
@@ -7434,21 +6767,65 @@
               </a:defRPr>
             </a:pPr>
             <a:r>
-              <a:t>Demo Video</a:t>
-            </a:r>
-          </a:p>
-        </p:txBody>
-      </p:sp>
-      <p:sp>
-        <p:nvSpPr>
-          <p:cNvPr id="4" name="TextBox 3"/>
+              <a:t>Why Different?</a:t>
+            </a:r>
+          </a:p>
+        </p:txBody>
+      </p:sp>
+      <p:sp>
+        <p:nvSpPr>
+          <p:cNvPr id="4" name="Rounded Rectangle 3"/>
+          <p:cNvSpPr/>
+          <p:nvPr/>
+        </p:nvSpPr>
+        <p:spPr>
+          <a:xfrm>
+            <a:off x="731520" y="1371600"/>
+            <a:ext cx="3474720" cy="548640"/>
+          </a:xfrm>
+          <a:prstGeom prst="roundRect">
+            <a:avLst/>
+          </a:prstGeom>
+          <a:solidFill>
+            <a:srgbClr val="FF6B35"/>
+          </a:solidFill>
+          <a:ln>
+            <a:noFill/>
+          </a:ln>
+          <a:effectLst/>
+        </p:spPr>
+        <p:style>
+          <a:lnRef idx="1">
+            <a:schemeClr val="accent1"/>
+          </a:lnRef>
+          <a:fillRef idx="3">
+            <a:schemeClr val="accent1"/>
+          </a:fillRef>
+          <a:effectRef idx="2">
+            <a:schemeClr val="accent1"/>
+          </a:effectRef>
+          <a:fontRef idx="minor">
+            <a:schemeClr val="lt1"/>
+          </a:fontRef>
+        </p:style>
+        <p:txBody>
+          <a:bodyPr rtlCol="0" anchor="ctr"/>
+          <a:lstStyle/>
+          <a:p>
+            <a:pPr algn="ctr"/>
+          </a:p>
+        </p:txBody>
+      </p:sp>
+      <p:sp>
+        <p:nvSpPr>
+          <p:cNvPr id="5" name="TextBox 4"/>
           <p:cNvSpPr txBox="1"/>
           <p:nvPr/>
         </p:nvSpPr>
         <p:spPr>
           <a:xfrm>
-            <a:off x="731520" y="1371600"/>
-            <a:ext cx="10058400" cy="914400"/>
+            <a:off x="914400" y="1417320"/>
+            <a:ext cx="3108960" cy="457200"/>
           </a:xfrm>
           <a:prstGeom prst="rect">
             <a:avLst/>
@@ -7461,29 +6838,73 @@
           </a:bodyPr>
           <a:lstStyle/>
           <a:p>
-            <a:pPr algn="l">
-              <a:defRPr sz="2800" b="1">
-                <a:solidFill>
-                  <a:srgbClr val="FF6B35"/>
-                </a:solidFill>
-              </a:defRPr>
-            </a:pPr>
-            <a:r>
-              <a:t>Full Usage Walkthrough (2 minutes)</a:t>
-            </a:r>
-          </a:p>
-        </p:txBody>
-      </p:sp>
-      <p:sp>
-        <p:nvSpPr>
-          <p:cNvPr id="5" name="TextBox 4"/>
+            <a:pPr algn="ctr">
+              <a:defRPr sz="1600" b="1">
+                <a:solidFill>
+                  <a:srgbClr val="FFFFFF"/>
+                </a:solidFill>
+              </a:defRPr>
+            </a:pPr>
+            <a:r>
+              <a:t>Dimension</a:t>
+            </a:r>
+          </a:p>
+        </p:txBody>
+      </p:sp>
+      <p:sp>
+        <p:nvSpPr>
+          <p:cNvPr id="6" name="Rounded Rectangle 5"/>
+          <p:cNvSpPr/>
+          <p:nvPr/>
+        </p:nvSpPr>
+        <p:spPr>
+          <a:xfrm>
+            <a:off x="4389120" y="1371600"/>
+            <a:ext cx="3474720" cy="548640"/>
+          </a:xfrm>
+          <a:prstGeom prst="roundRect">
+            <a:avLst/>
+          </a:prstGeom>
+          <a:solidFill>
+            <a:srgbClr val="FF6B35"/>
+          </a:solidFill>
+          <a:ln>
+            <a:noFill/>
+          </a:ln>
+          <a:effectLst/>
+        </p:spPr>
+        <p:style>
+          <a:lnRef idx="1">
+            <a:schemeClr val="accent1"/>
+          </a:lnRef>
+          <a:fillRef idx="3">
+            <a:schemeClr val="accent1"/>
+          </a:fillRef>
+          <a:effectRef idx="2">
+            <a:schemeClr val="accent1"/>
+          </a:effectRef>
+          <a:fontRef idx="minor">
+            <a:schemeClr val="lt1"/>
+          </a:fontRef>
+        </p:style>
+        <p:txBody>
+          <a:bodyPr rtlCol="0" anchor="ctr"/>
+          <a:lstStyle/>
+          <a:p>
+            <a:pPr algn="ctr"/>
+          </a:p>
+        </p:txBody>
+      </p:sp>
+      <p:sp>
+        <p:nvSpPr>
+          <p:cNvPr id="7" name="TextBox 6"/>
           <p:cNvSpPr txBox="1"/>
           <p:nvPr/>
         </p:nvSpPr>
         <p:spPr>
           <a:xfrm>
-            <a:off x="731520" y="2286000"/>
-            <a:ext cx="10515600" cy="4114800"/>
+            <a:off x="4572000" y="1417320"/>
+            <a:ext cx="3108960" cy="457200"/>
           </a:xfrm>
           <a:prstGeom prst="rect">
             <a:avLst/>
@@ -7496,135 +6917,1516 @@
           </a:bodyPr>
           <a:lstStyle/>
           <a:p>
-            <a:pPr>
-              <a:spcAft>
-                <a:spcPts val="800"/>
-              </a:spcAft>
-              <a:defRPr sz="1600">
+            <a:pPr algn="ctr">
+              <a:defRPr sz="1600" b="1">
+                <a:solidFill>
+                  <a:srgbClr val="FFFFFF"/>
+                </a:solidFill>
+              </a:defRPr>
+            </a:pPr>
+            <a:r>
+              <a:t>Traditional Timer</a:t>
+            </a:r>
+          </a:p>
+        </p:txBody>
+      </p:sp>
+      <p:sp>
+        <p:nvSpPr>
+          <p:cNvPr id="8" name="Rounded Rectangle 7"/>
+          <p:cNvSpPr/>
+          <p:nvPr/>
+        </p:nvSpPr>
+        <p:spPr>
+          <a:xfrm>
+            <a:off x="8046720" y="1371600"/>
+            <a:ext cx="3474720" cy="548640"/>
+          </a:xfrm>
+          <a:prstGeom prst="roundRect">
+            <a:avLst/>
+          </a:prstGeom>
+          <a:solidFill>
+            <a:srgbClr val="FF6B35"/>
+          </a:solidFill>
+          <a:ln>
+            <a:noFill/>
+          </a:ln>
+          <a:effectLst/>
+        </p:spPr>
+        <p:style>
+          <a:lnRef idx="1">
+            <a:schemeClr val="accent1"/>
+          </a:lnRef>
+          <a:fillRef idx="3">
+            <a:schemeClr val="accent1"/>
+          </a:fillRef>
+          <a:effectRef idx="2">
+            <a:schemeClr val="accent1"/>
+          </a:effectRef>
+          <a:fontRef idx="minor">
+            <a:schemeClr val="lt1"/>
+          </a:fontRef>
+        </p:style>
+        <p:txBody>
+          <a:bodyPr rtlCol="0" anchor="ctr"/>
+          <a:lstStyle/>
+          <a:p>
+            <a:pPr algn="ctr"/>
+          </a:p>
+        </p:txBody>
+      </p:sp>
+      <p:sp>
+        <p:nvSpPr>
+          <p:cNvPr id="9" name="TextBox 8"/>
+          <p:cNvSpPr txBox="1"/>
+          <p:nvPr/>
+        </p:nvSpPr>
+        <p:spPr>
+          <a:xfrm>
+            <a:off x="8229600" y="1417320"/>
+            <a:ext cx="3108960" cy="457200"/>
+          </a:xfrm>
+          <a:prstGeom prst="rect">
+            <a:avLst/>
+          </a:prstGeom>
+          <a:noFill/>
+        </p:spPr>
+        <p:txBody>
+          <a:bodyPr wrap="square">
+            <a:spAutoFit/>
+          </a:bodyPr>
+          <a:lstStyle/>
+          <a:p>
+            <a:pPr algn="ctr">
+              <a:defRPr sz="1600" b="1">
+                <a:solidFill>
+                  <a:srgbClr val="FFFFFF"/>
+                </a:solidFill>
+              </a:defRPr>
+            </a:pPr>
+            <a:r>
+              <a:t>FocusBuddy</a:t>
+            </a:r>
+          </a:p>
+        </p:txBody>
+      </p:sp>
+      <p:sp>
+        <p:nvSpPr>
+          <p:cNvPr id="10" name="Rounded Rectangle 9"/>
+          <p:cNvSpPr/>
+          <p:nvPr/>
+        </p:nvSpPr>
+        <p:spPr>
+          <a:xfrm>
+            <a:off x="731520" y="2103120"/>
+            <a:ext cx="3474720" cy="502920"/>
+          </a:xfrm>
+          <a:prstGeom prst="roundRect">
+            <a:avLst/>
+          </a:prstGeom>
+          <a:solidFill>
+            <a:srgbClr val="22223E"/>
+          </a:solidFill>
+          <a:ln>
+            <a:noFill/>
+          </a:ln>
+          <a:effectLst/>
+        </p:spPr>
+        <p:style>
+          <a:lnRef idx="1">
+            <a:schemeClr val="accent1"/>
+          </a:lnRef>
+          <a:fillRef idx="3">
+            <a:schemeClr val="accent1"/>
+          </a:fillRef>
+          <a:effectRef idx="2">
+            <a:schemeClr val="accent1"/>
+          </a:effectRef>
+          <a:fontRef idx="minor">
+            <a:schemeClr val="lt1"/>
+          </a:fontRef>
+        </p:style>
+        <p:txBody>
+          <a:bodyPr rtlCol="0" anchor="ctr"/>
+          <a:lstStyle/>
+          <a:p>
+            <a:pPr algn="ctr"/>
+          </a:p>
+        </p:txBody>
+      </p:sp>
+      <p:sp>
+        <p:nvSpPr>
+          <p:cNvPr id="11" name="TextBox 10"/>
+          <p:cNvSpPr txBox="1"/>
+          <p:nvPr/>
+        </p:nvSpPr>
+        <p:spPr>
+          <a:xfrm>
+            <a:off x="914400" y="2176272"/>
+            <a:ext cx="3108960" cy="411480"/>
+          </a:xfrm>
+          <a:prstGeom prst="rect">
+            <a:avLst/>
+          </a:prstGeom>
+          <a:noFill/>
+        </p:spPr>
+        <p:txBody>
+          <a:bodyPr wrap="square">
+            <a:spAutoFit/>
+          </a:bodyPr>
+          <a:lstStyle/>
+          <a:p>
+            <a:pPr algn="l">
+              <a:defRPr sz="1400" b="0">
+                <a:solidFill>
+                  <a:srgbClr val="FF6B35"/>
+                </a:solidFill>
+              </a:defRPr>
+            </a:pPr>
+            <a:r>
+              <a:t>Detection</a:t>
+            </a:r>
+          </a:p>
+        </p:txBody>
+      </p:sp>
+      <p:sp>
+        <p:nvSpPr>
+          <p:cNvPr id="12" name="Rounded Rectangle 11"/>
+          <p:cNvSpPr/>
+          <p:nvPr/>
+        </p:nvSpPr>
+        <p:spPr>
+          <a:xfrm>
+            <a:off x="4389120" y="2103120"/>
+            <a:ext cx="3474720" cy="502920"/>
+          </a:xfrm>
+          <a:prstGeom prst="roundRect">
+            <a:avLst/>
+          </a:prstGeom>
+          <a:solidFill>
+            <a:srgbClr val="22223E"/>
+          </a:solidFill>
+          <a:ln>
+            <a:noFill/>
+          </a:ln>
+          <a:effectLst/>
+        </p:spPr>
+        <p:style>
+          <a:lnRef idx="1">
+            <a:schemeClr val="accent1"/>
+          </a:lnRef>
+          <a:fillRef idx="3">
+            <a:schemeClr val="accent1"/>
+          </a:fillRef>
+          <a:effectRef idx="2">
+            <a:schemeClr val="accent1"/>
+          </a:effectRef>
+          <a:fontRef idx="minor">
+            <a:schemeClr val="lt1"/>
+          </a:fontRef>
+        </p:style>
+        <p:txBody>
+          <a:bodyPr rtlCol="0" anchor="ctr"/>
+          <a:lstStyle/>
+          <a:p>
+            <a:pPr algn="ctr"/>
+          </a:p>
+        </p:txBody>
+      </p:sp>
+      <p:sp>
+        <p:nvSpPr>
+          <p:cNvPr id="13" name="TextBox 12"/>
+          <p:cNvSpPr txBox="1"/>
+          <p:nvPr/>
+        </p:nvSpPr>
+        <p:spPr>
+          <a:xfrm>
+            <a:off x="4572000" y="2176272"/>
+            <a:ext cx="3108960" cy="411480"/>
+          </a:xfrm>
+          <a:prstGeom prst="rect">
+            <a:avLst/>
+          </a:prstGeom>
+          <a:noFill/>
+        </p:spPr>
+        <p:txBody>
+          <a:bodyPr wrap="square">
+            <a:spAutoFit/>
+          </a:bodyPr>
+          <a:lstStyle/>
+          <a:p>
+            <a:pPr algn="l">
+              <a:defRPr sz="1400" b="0">
                 <a:solidFill>
                   <a:srgbClr val="E0E0E0"/>
                 </a:solidFill>
               </a:defRPr>
             </a:pPr>
             <a:r>
-              <a:t>00:00  Open page -&gt; Allow camera -&gt; FaceMesh loading</a:t>
-            </a:r>
-          </a:p>
-          <a:p>
-            <a:pPr>
-              <a:spcAft>
-                <a:spcPts val="800"/>
-              </a:spcAft>
-              <a:defRPr sz="1600">
+              <a:t>None</a:t>
+            </a:r>
+          </a:p>
+        </p:txBody>
+      </p:sp>
+      <p:sp>
+        <p:nvSpPr>
+          <p:cNvPr id="14" name="Rounded Rectangle 13"/>
+          <p:cNvSpPr/>
+          <p:nvPr/>
+        </p:nvSpPr>
+        <p:spPr>
+          <a:xfrm>
+            <a:off x="8046720" y="2103120"/>
+            <a:ext cx="3474720" cy="502920"/>
+          </a:xfrm>
+          <a:prstGeom prst="roundRect">
+            <a:avLst/>
+          </a:prstGeom>
+          <a:solidFill>
+            <a:srgbClr val="22223E"/>
+          </a:solidFill>
+          <a:ln>
+            <a:noFill/>
+          </a:ln>
+          <a:effectLst/>
+        </p:spPr>
+        <p:style>
+          <a:lnRef idx="1">
+            <a:schemeClr val="accent1"/>
+          </a:lnRef>
+          <a:fillRef idx="3">
+            <a:schemeClr val="accent1"/>
+          </a:fillRef>
+          <a:effectRef idx="2">
+            <a:schemeClr val="accent1"/>
+          </a:effectRef>
+          <a:fontRef idx="minor">
+            <a:schemeClr val="lt1"/>
+          </a:fontRef>
+        </p:style>
+        <p:txBody>
+          <a:bodyPr rtlCol="0" anchor="ctr"/>
+          <a:lstStyle/>
+          <a:p>
+            <a:pPr algn="ctr"/>
+          </a:p>
+        </p:txBody>
+      </p:sp>
+      <p:sp>
+        <p:nvSpPr>
+          <p:cNvPr id="15" name="TextBox 14"/>
+          <p:cNvSpPr txBox="1"/>
+          <p:nvPr/>
+        </p:nvSpPr>
+        <p:spPr>
+          <a:xfrm>
+            <a:off x="8229600" y="2176272"/>
+            <a:ext cx="3108960" cy="411480"/>
+          </a:xfrm>
+          <a:prstGeom prst="rect">
+            <a:avLst/>
+          </a:prstGeom>
+          <a:noFill/>
+        </p:spPr>
+        <p:txBody>
+          <a:bodyPr wrap="square">
+            <a:spAutoFit/>
+          </a:bodyPr>
+          <a:lstStyle/>
+          <a:p>
+            <a:pPr algn="l">
+              <a:defRPr sz="1400" b="1">
                 <a:solidFill>
                   <a:srgbClr val="E0E0E0"/>
                 </a:solidFill>
               </a:defRPr>
             </a:pPr>
             <a:r>
-              <a:t>00:15  Click Start Focus -&gt; Pomodoro countdown + Happy pet</a:t>
-            </a:r>
-          </a:p>
-          <a:p>
-            <a:pPr>
-              <a:spcAft>
-                <a:spcPts val="800"/>
-              </a:spcAft>
-              <a:defRPr sz="1600">
+              <a:t>FaceMesh 468-pt face tracking</a:t>
+            </a:r>
+          </a:p>
+        </p:txBody>
+      </p:sp>
+      <p:sp>
+        <p:nvSpPr>
+          <p:cNvPr id="16" name="Rounded Rectangle 15"/>
+          <p:cNvSpPr/>
+          <p:nvPr/>
+        </p:nvSpPr>
+        <p:spPr>
+          <a:xfrm>
+            <a:off x="731520" y="2697479"/>
+            <a:ext cx="3474720" cy="502920"/>
+          </a:xfrm>
+          <a:prstGeom prst="roundRect">
+            <a:avLst/>
+          </a:prstGeom>
+          <a:solidFill>
+            <a:srgbClr val="1E1E3A"/>
+          </a:solidFill>
+          <a:ln>
+            <a:noFill/>
+          </a:ln>
+          <a:effectLst/>
+        </p:spPr>
+        <p:style>
+          <a:lnRef idx="1">
+            <a:schemeClr val="accent1"/>
+          </a:lnRef>
+          <a:fillRef idx="3">
+            <a:schemeClr val="accent1"/>
+          </a:fillRef>
+          <a:effectRef idx="2">
+            <a:schemeClr val="accent1"/>
+          </a:effectRef>
+          <a:fontRef idx="minor">
+            <a:schemeClr val="lt1"/>
+          </a:fontRef>
+        </p:style>
+        <p:txBody>
+          <a:bodyPr rtlCol="0" anchor="ctr"/>
+          <a:lstStyle/>
+          <a:p>
+            <a:pPr algn="ctr"/>
+          </a:p>
+        </p:txBody>
+      </p:sp>
+      <p:sp>
+        <p:nvSpPr>
+          <p:cNvPr id="17" name="TextBox 16"/>
+          <p:cNvSpPr txBox="1"/>
+          <p:nvPr/>
+        </p:nvSpPr>
+        <p:spPr>
+          <a:xfrm>
+            <a:off x="914400" y="2770631"/>
+            <a:ext cx="3108960" cy="411480"/>
+          </a:xfrm>
+          <a:prstGeom prst="rect">
+            <a:avLst/>
+          </a:prstGeom>
+          <a:noFill/>
+        </p:spPr>
+        <p:txBody>
+          <a:bodyPr wrap="square">
+            <a:spAutoFit/>
+          </a:bodyPr>
+          <a:lstStyle/>
+          <a:p>
+            <a:pPr algn="l">
+              <a:defRPr sz="1400" b="0">
+                <a:solidFill>
+                  <a:srgbClr val="FF6B35"/>
+                </a:solidFill>
+              </a:defRPr>
+            </a:pPr>
+            <a:r>
+              <a:t>Feedback</a:t>
+            </a:r>
+          </a:p>
+        </p:txBody>
+      </p:sp>
+      <p:sp>
+        <p:nvSpPr>
+          <p:cNvPr id="18" name="Rounded Rectangle 17"/>
+          <p:cNvSpPr/>
+          <p:nvPr/>
+        </p:nvSpPr>
+        <p:spPr>
+          <a:xfrm>
+            <a:off x="4389120" y="2697479"/>
+            <a:ext cx="3474720" cy="502920"/>
+          </a:xfrm>
+          <a:prstGeom prst="roundRect">
+            <a:avLst/>
+          </a:prstGeom>
+          <a:solidFill>
+            <a:srgbClr val="1E1E3A"/>
+          </a:solidFill>
+          <a:ln>
+            <a:noFill/>
+          </a:ln>
+          <a:effectLst/>
+        </p:spPr>
+        <p:style>
+          <a:lnRef idx="1">
+            <a:schemeClr val="accent1"/>
+          </a:lnRef>
+          <a:fillRef idx="3">
+            <a:schemeClr val="accent1"/>
+          </a:fillRef>
+          <a:effectRef idx="2">
+            <a:schemeClr val="accent1"/>
+          </a:effectRef>
+          <a:fontRef idx="minor">
+            <a:schemeClr val="lt1"/>
+          </a:fontRef>
+        </p:style>
+        <p:txBody>
+          <a:bodyPr rtlCol="0" anchor="ctr"/>
+          <a:lstStyle/>
+          <a:p>
+            <a:pPr algn="ctr"/>
+          </a:p>
+        </p:txBody>
+      </p:sp>
+      <p:sp>
+        <p:nvSpPr>
+          <p:cNvPr id="19" name="TextBox 18"/>
+          <p:cNvSpPr txBox="1"/>
+          <p:nvPr/>
+        </p:nvSpPr>
+        <p:spPr>
+          <a:xfrm>
+            <a:off x="4572000" y="2770631"/>
+            <a:ext cx="3108960" cy="411480"/>
+          </a:xfrm>
+          <a:prstGeom prst="rect">
+            <a:avLst/>
+          </a:prstGeom>
+          <a:noFill/>
+        </p:spPr>
+        <p:txBody>
+          <a:bodyPr wrap="square">
+            <a:spAutoFit/>
+          </a:bodyPr>
+          <a:lstStyle/>
+          <a:p>
+            <a:pPr algn="l">
+              <a:defRPr sz="1400" b="0">
                 <a:solidFill>
                   <a:srgbClr val="E0E0E0"/>
                 </a:solidFill>
               </a:defRPr>
             </a:pPr>
             <a:r>
-              <a:t>00:35  Look away -&gt; Pet turns Worried + Status turns yellow</a:t>
-            </a:r>
-          </a:p>
-          <a:p>
-            <a:pPr>
-              <a:spcAft>
-                <a:spcPts val="800"/>
-              </a:spcAft>
-              <a:defRPr sz="1600">
+              <a:t>Phone alarm</a:t>
+            </a:r>
+          </a:p>
+        </p:txBody>
+      </p:sp>
+      <p:sp>
+        <p:nvSpPr>
+          <p:cNvPr id="20" name="Rounded Rectangle 19"/>
+          <p:cNvSpPr/>
+          <p:nvPr/>
+        </p:nvSpPr>
+        <p:spPr>
+          <a:xfrm>
+            <a:off x="8046720" y="2697479"/>
+            <a:ext cx="3474720" cy="502920"/>
+          </a:xfrm>
+          <a:prstGeom prst="roundRect">
+            <a:avLst/>
+          </a:prstGeom>
+          <a:solidFill>
+            <a:srgbClr val="1E1E3A"/>
+          </a:solidFill>
+          <a:ln>
+            <a:noFill/>
+          </a:ln>
+          <a:effectLst/>
+        </p:spPr>
+        <p:style>
+          <a:lnRef idx="1">
+            <a:schemeClr val="accent1"/>
+          </a:lnRef>
+          <a:fillRef idx="3">
+            <a:schemeClr val="accent1"/>
+          </a:fillRef>
+          <a:effectRef idx="2">
+            <a:schemeClr val="accent1"/>
+          </a:effectRef>
+          <a:fontRef idx="minor">
+            <a:schemeClr val="lt1"/>
+          </a:fontRef>
+        </p:style>
+        <p:txBody>
+          <a:bodyPr rtlCol="0" anchor="ctr"/>
+          <a:lstStyle/>
+          <a:p>
+            <a:pPr algn="ctr"/>
+          </a:p>
+        </p:txBody>
+      </p:sp>
+      <p:sp>
+        <p:nvSpPr>
+          <p:cNvPr id="21" name="TextBox 20"/>
+          <p:cNvSpPr txBox="1"/>
+          <p:nvPr/>
+        </p:nvSpPr>
+        <p:spPr>
+          <a:xfrm>
+            <a:off x="8229600" y="2770631"/>
+            <a:ext cx="3108960" cy="411480"/>
+          </a:xfrm>
+          <a:prstGeom prst="rect">
+            <a:avLst/>
+          </a:prstGeom>
+          <a:noFill/>
+        </p:spPr>
+        <p:txBody>
+          <a:bodyPr wrap="square">
+            <a:spAutoFit/>
+          </a:bodyPr>
+          <a:lstStyle/>
+          <a:p>
+            <a:pPr algn="l">
+              <a:defRPr sz="1400" b="1">
                 <a:solidFill>
                   <a:srgbClr val="E0E0E0"/>
                 </a:solidFill>
               </a:defRPr>
             </a:pPr>
             <a:r>
-              <a:t>00:50  Leave desk -&gt; Timer pauses + Pet sleeps + Red flash</a:t>
-            </a:r>
-          </a:p>
-          <a:p>
-            <a:pPr>
-              <a:spcAft>
-                <a:spcPts val="800"/>
-              </a:spcAft>
-              <a:defRPr sz="1600">
+              <a:t>LED pet + color status indicator</a:t>
+            </a:r>
+          </a:p>
+        </p:txBody>
+      </p:sp>
+      <p:sp>
+        <p:nvSpPr>
+          <p:cNvPr id="22" name="Rounded Rectangle 21"/>
+          <p:cNvSpPr/>
+          <p:nvPr/>
+        </p:nvSpPr>
+        <p:spPr>
+          <a:xfrm>
+            <a:off x="731520" y="3291839"/>
+            <a:ext cx="3474720" cy="502920"/>
+          </a:xfrm>
+          <a:prstGeom prst="roundRect">
+            <a:avLst/>
+          </a:prstGeom>
+          <a:solidFill>
+            <a:srgbClr val="22223E"/>
+          </a:solidFill>
+          <a:ln>
+            <a:noFill/>
+          </a:ln>
+          <a:effectLst/>
+        </p:spPr>
+        <p:style>
+          <a:lnRef idx="1">
+            <a:schemeClr val="accent1"/>
+          </a:lnRef>
+          <a:fillRef idx="3">
+            <a:schemeClr val="accent1"/>
+          </a:fillRef>
+          <a:effectRef idx="2">
+            <a:schemeClr val="accent1"/>
+          </a:effectRef>
+          <a:fontRef idx="minor">
+            <a:schemeClr val="lt1"/>
+          </a:fontRef>
+        </p:style>
+        <p:txBody>
+          <a:bodyPr rtlCol="0" anchor="ctr"/>
+          <a:lstStyle/>
+          <a:p>
+            <a:pPr algn="ctr"/>
+          </a:p>
+        </p:txBody>
+      </p:sp>
+      <p:sp>
+        <p:nvSpPr>
+          <p:cNvPr id="23" name="TextBox 22"/>
+          <p:cNvSpPr txBox="1"/>
+          <p:nvPr/>
+        </p:nvSpPr>
+        <p:spPr>
+          <a:xfrm>
+            <a:off x="914400" y="3364991"/>
+            <a:ext cx="3108960" cy="411480"/>
+          </a:xfrm>
+          <a:prstGeom prst="rect">
+            <a:avLst/>
+          </a:prstGeom>
+          <a:noFill/>
+        </p:spPr>
+        <p:txBody>
+          <a:bodyPr wrap="square">
+            <a:spAutoFit/>
+          </a:bodyPr>
+          <a:lstStyle/>
+          <a:p>
+            <a:pPr algn="l">
+              <a:defRPr sz="1400" b="0">
+                <a:solidFill>
+                  <a:srgbClr val="FF6B35"/>
+                </a:solidFill>
+              </a:defRPr>
+            </a:pPr>
+            <a:r>
+              <a:t>Data Logging</a:t>
+            </a:r>
+          </a:p>
+        </p:txBody>
+      </p:sp>
+      <p:sp>
+        <p:nvSpPr>
+          <p:cNvPr id="24" name="Rounded Rectangle 23"/>
+          <p:cNvSpPr/>
+          <p:nvPr/>
+        </p:nvSpPr>
+        <p:spPr>
+          <a:xfrm>
+            <a:off x="4389120" y="3291839"/>
+            <a:ext cx="3474720" cy="502920"/>
+          </a:xfrm>
+          <a:prstGeom prst="roundRect">
+            <a:avLst/>
+          </a:prstGeom>
+          <a:solidFill>
+            <a:srgbClr val="22223E"/>
+          </a:solidFill>
+          <a:ln>
+            <a:noFill/>
+          </a:ln>
+          <a:effectLst/>
+        </p:spPr>
+        <p:style>
+          <a:lnRef idx="1">
+            <a:schemeClr val="accent1"/>
+          </a:lnRef>
+          <a:fillRef idx="3">
+            <a:schemeClr val="accent1"/>
+          </a:fillRef>
+          <a:effectRef idx="2">
+            <a:schemeClr val="accent1"/>
+          </a:effectRef>
+          <a:fontRef idx="minor">
+            <a:schemeClr val="lt1"/>
+          </a:fontRef>
+        </p:style>
+        <p:txBody>
+          <a:bodyPr rtlCol="0" anchor="ctr"/>
+          <a:lstStyle/>
+          <a:p>
+            <a:pPr algn="ctr"/>
+          </a:p>
+        </p:txBody>
+      </p:sp>
+      <p:sp>
+        <p:nvSpPr>
+          <p:cNvPr id="25" name="TextBox 24"/>
+          <p:cNvSpPr txBox="1"/>
+          <p:nvPr/>
+        </p:nvSpPr>
+        <p:spPr>
+          <a:xfrm>
+            <a:off x="4572000" y="3364991"/>
+            <a:ext cx="3108960" cy="411480"/>
+          </a:xfrm>
+          <a:prstGeom prst="rect">
+            <a:avLst/>
+          </a:prstGeom>
+          <a:noFill/>
+        </p:spPr>
+        <p:txBody>
+          <a:bodyPr wrap="square">
+            <a:spAutoFit/>
+          </a:bodyPr>
+          <a:lstStyle/>
+          <a:p>
+            <a:pPr algn="l">
+              <a:defRPr sz="1400" b="0">
                 <a:solidFill>
                   <a:srgbClr val="E0E0E0"/>
                 </a:solidFill>
               </a:defRPr>
             </a:pPr>
             <a:r>
-              <a:t>01:10  Return -&gt; Auto-resume focus mode</a:t>
-            </a:r>
-          </a:p>
-          <a:p>
-            <a:pPr>
-              <a:spcAft>
-                <a:spcPts val="800"/>
-              </a:spcAft>
-              <a:defRPr sz="1600">
+              <a:t>None</a:t>
+            </a:r>
+          </a:p>
+        </p:txBody>
+      </p:sp>
+      <p:sp>
+        <p:nvSpPr>
+          <p:cNvPr id="26" name="Rounded Rectangle 25"/>
+          <p:cNvSpPr/>
+          <p:nvPr/>
+        </p:nvSpPr>
+        <p:spPr>
+          <a:xfrm>
+            <a:off x="8046720" y="3291839"/>
+            <a:ext cx="3474720" cy="502920"/>
+          </a:xfrm>
+          <a:prstGeom prst="roundRect">
+            <a:avLst/>
+          </a:prstGeom>
+          <a:solidFill>
+            <a:srgbClr val="22223E"/>
+          </a:solidFill>
+          <a:ln>
+            <a:noFill/>
+          </a:ln>
+          <a:effectLst/>
+        </p:spPr>
+        <p:style>
+          <a:lnRef idx="1">
+            <a:schemeClr val="accent1"/>
+          </a:lnRef>
+          <a:fillRef idx="3">
+            <a:schemeClr val="accent1"/>
+          </a:fillRef>
+          <a:effectRef idx="2">
+            <a:schemeClr val="accent1"/>
+          </a:effectRef>
+          <a:fontRef idx="minor">
+            <a:schemeClr val="lt1"/>
+          </a:fontRef>
+        </p:style>
+        <p:txBody>
+          <a:bodyPr rtlCol="0" anchor="ctr"/>
+          <a:lstStyle/>
+          <a:p>
+            <a:pPr algn="ctr"/>
+          </a:p>
+        </p:txBody>
+      </p:sp>
+      <p:sp>
+        <p:nvSpPr>
+          <p:cNvPr id="27" name="TextBox 26"/>
+          <p:cNvSpPr txBox="1"/>
+          <p:nvPr/>
+        </p:nvSpPr>
+        <p:spPr>
+          <a:xfrm>
+            <a:off x="8229600" y="3364991"/>
+            <a:ext cx="3108960" cy="411480"/>
+          </a:xfrm>
+          <a:prstGeom prst="rect">
+            <a:avLst/>
+          </a:prstGeom>
+          <a:noFill/>
+        </p:spPr>
+        <p:txBody>
+          <a:bodyPr wrap="square">
+            <a:spAutoFit/>
+          </a:bodyPr>
+          <a:lstStyle/>
+          <a:p>
+            <a:pPr algn="l">
+              <a:defRPr sz="1400" b="1">
                 <a:solidFill>
                   <a:srgbClr val="E0E0E0"/>
                 </a:solidFill>
               </a:defRPr>
             </a:pPr>
             <a:r>
-              <a:t>01:25  Pomodoro complete -&gt; Celebration + Notification + Star</a:t>
-            </a:r>
-          </a:p>
-          <a:p>
-            <a:pPr>
-              <a:spcAft>
-                <a:spcPts val="800"/>
-              </a:spcAft>
-              <a:defRPr sz="1600">
+              <a:t>Focus rate + stats + 7-day trends</a:t>
+            </a:r>
+          </a:p>
+        </p:txBody>
+      </p:sp>
+      <p:sp>
+        <p:nvSpPr>
+          <p:cNvPr id="28" name="Rounded Rectangle 27"/>
+          <p:cNvSpPr/>
+          <p:nvPr/>
+        </p:nvSpPr>
+        <p:spPr>
+          <a:xfrm>
+            <a:off x="731520" y="3886200"/>
+            <a:ext cx="3474720" cy="502920"/>
+          </a:xfrm>
+          <a:prstGeom prst="roundRect">
+            <a:avLst/>
+          </a:prstGeom>
+          <a:solidFill>
+            <a:srgbClr val="1E1E3A"/>
+          </a:solidFill>
+          <a:ln>
+            <a:noFill/>
+          </a:ln>
+          <a:effectLst/>
+        </p:spPr>
+        <p:style>
+          <a:lnRef idx="1">
+            <a:schemeClr val="accent1"/>
+          </a:lnRef>
+          <a:fillRef idx="3">
+            <a:schemeClr val="accent1"/>
+          </a:fillRef>
+          <a:effectRef idx="2">
+            <a:schemeClr val="accent1"/>
+          </a:effectRef>
+          <a:fontRef idx="minor">
+            <a:schemeClr val="lt1"/>
+          </a:fontRef>
+        </p:style>
+        <p:txBody>
+          <a:bodyPr rtlCol="0" anchor="ctr"/>
+          <a:lstStyle/>
+          <a:p>
+            <a:pPr algn="ctr"/>
+          </a:p>
+        </p:txBody>
+      </p:sp>
+      <p:sp>
+        <p:nvSpPr>
+          <p:cNvPr id="29" name="TextBox 28"/>
+          <p:cNvSpPr txBox="1"/>
+          <p:nvPr/>
+        </p:nvSpPr>
+        <p:spPr>
+          <a:xfrm>
+            <a:off x="914400" y="3959352"/>
+            <a:ext cx="3108960" cy="411480"/>
+          </a:xfrm>
+          <a:prstGeom prst="rect">
+            <a:avLst/>
+          </a:prstGeom>
+          <a:noFill/>
+        </p:spPr>
+        <p:txBody>
+          <a:bodyPr wrap="square">
+            <a:spAutoFit/>
+          </a:bodyPr>
+          <a:lstStyle/>
+          <a:p>
+            <a:pPr algn="l">
+              <a:defRPr sz="1400" b="0">
+                <a:solidFill>
+                  <a:srgbClr val="FF6B35"/>
+                </a:solidFill>
+              </a:defRPr>
+            </a:pPr>
+            <a:r>
+              <a:t>Integration</a:t>
+            </a:r>
+          </a:p>
+        </p:txBody>
+      </p:sp>
+      <p:sp>
+        <p:nvSpPr>
+          <p:cNvPr id="30" name="Rounded Rectangle 29"/>
+          <p:cNvSpPr/>
+          <p:nvPr/>
+        </p:nvSpPr>
+        <p:spPr>
+          <a:xfrm>
+            <a:off x="4389120" y="3886200"/>
+            <a:ext cx="3474720" cy="502920"/>
+          </a:xfrm>
+          <a:prstGeom prst="roundRect">
+            <a:avLst/>
+          </a:prstGeom>
+          <a:solidFill>
+            <a:srgbClr val="1E1E3A"/>
+          </a:solidFill>
+          <a:ln>
+            <a:noFill/>
+          </a:ln>
+          <a:effectLst/>
+        </p:spPr>
+        <p:style>
+          <a:lnRef idx="1">
+            <a:schemeClr val="accent1"/>
+          </a:lnRef>
+          <a:fillRef idx="3">
+            <a:schemeClr val="accent1"/>
+          </a:fillRef>
+          <a:effectRef idx="2">
+            <a:schemeClr val="accent1"/>
+          </a:effectRef>
+          <a:fontRef idx="minor">
+            <a:schemeClr val="lt1"/>
+          </a:fontRef>
+        </p:style>
+        <p:txBody>
+          <a:bodyPr rtlCol="0" anchor="ctr"/>
+          <a:lstStyle/>
+          <a:p>
+            <a:pPr algn="ctr"/>
+          </a:p>
+        </p:txBody>
+      </p:sp>
+      <p:sp>
+        <p:nvSpPr>
+          <p:cNvPr id="31" name="TextBox 30"/>
+          <p:cNvSpPr txBox="1"/>
+          <p:nvPr/>
+        </p:nvSpPr>
+        <p:spPr>
+          <a:xfrm>
+            <a:off x="4572000" y="3959352"/>
+            <a:ext cx="3108960" cy="411480"/>
+          </a:xfrm>
+          <a:prstGeom prst="rect">
+            <a:avLst/>
+          </a:prstGeom>
+          <a:noFill/>
+        </p:spPr>
+        <p:txBody>
+          <a:bodyPr wrap="square">
+            <a:spAutoFit/>
+          </a:bodyPr>
+          <a:lstStyle/>
+          <a:p>
+            <a:pPr algn="l">
+              <a:defRPr sz="1400" b="0">
                 <a:solidFill>
                   <a:srgbClr val="E0E0E0"/>
                 </a:solidFill>
               </a:defRPr>
             </a:pPr>
             <a:r>
-              <a:t>01:40  View stats -&gt; Pie chart / Bar chart / Daily Plan</a:t>
-            </a:r>
-          </a:p>
-          <a:p>
-            <a:pPr>
-              <a:spcAft>
-                <a:spcPts val="800"/>
-              </a:spcAft>
-              <a:defRPr sz="1600">
+              <a:t>Standalone</a:t>
+            </a:r>
+          </a:p>
+        </p:txBody>
+      </p:sp>
+      <p:sp>
+        <p:nvSpPr>
+          <p:cNvPr id="32" name="Rounded Rectangle 31"/>
+          <p:cNvSpPr/>
+          <p:nvPr/>
+        </p:nvSpPr>
+        <p:spPr>
+          <a:xfrm>
+            <a:off x="8046720" y="3886200"/>
+            <a:ext cx="3474720" cy="502920"/>
+          </a:xfrm>
+          <a:prstGeom prst="roundRect">
+            <a:avLst/>
+          </a:prstGeom>
+          <a:solidFill>
+            <a:srgbClr val="1E1E3A"/>
+          </a:solidFill>
+          <a:ln>
+            <a:noFill/>
+          </a:ln>
+          <a:effectLst/>
+        </p:spPr>
+        <p:style>
+          <a:lnRef idx="1">
+            <a:schemeClr val="accent1"/>
+          </a:lnRef>
+          <a:fillRef idx="3">
+            <a:schemeClr val="accent1"/>
+          </a:fillRef>
+          <a:effectRef idx="2">
+            <a:schemeClr val="accent1"/>
+          </a:effectRef>
+          <a:fontRef idx="minor">
+            <a:schemeClr val="lt1"/>
+          </a:fontRef>
+        </p:style>
+        <p:txBody>
+          <a:bodyPr rtlCol="0" anchor="ctr"/>
+          <a:lstStyle/>
+          <a:p>
+            <a:pPr algn="ctr"/>
+          </a:p>
+        </p:txBody>
+      </p:sp>
+      <p:sp>
+        <p:nvSpPr>
+          <p:cNvPr id="33" name="TextBox 32"/>
+          <p:cNvSpPr txBox="1"/>
+          <p:nvPr/>
+        </p:nvSpPr>
+        <p:spPr>
+          <a:xfrm>
+            <a:off x="8229600" y="3959352"/>
+            <a:ext cx="3108960" cy="411480"/>
+          </a:xfrm>
+          <a:prstGeom prst="rect">
+            <a:avLst/>
+          </a:prstGeom>
+          <a:noFill/>
+        </p:spPr>
+        <p:txBody>
+          <a:bodyPr wrap="square">
+            <a:spAutoFit/>
+          </a:bodyPr>
+          <a:lstStyle/>
+          <a:p>
+            <a:pPr algn="l">
+              <a:defRPr sz="1400" b="1">
                 <a:solidFill>
                   <a:srgbClr val="E0E0E0"/>
                 </a:solidFill>
               </a:defRPr>
             </a:pPr>
-          </a:p>
-          <a:p>
-            <a:pPr>
-              <a:spcAft>
-                <a:spcPts val="800"/>
-              </a:spcAft>
-              <a:defRPr sz="1600">
+            <a:r>
+              <a:t>Detect + Timer + Pet linked</a:t>
+            </a:r>
+          </a:p>
+        </p:txBody>
+      </p:sp>
+      <p:sp>
+        <p:nvSpPr>
+          <p:cNvPr id="34" name="Rounded Rectangle 33"/>
+          <p:cNvSpPr/>
+          <p:nvPr/>
+        </p:nvSpPr>
+        <p:spPr>
+          <a:xfrm>
+            <a:off x="731520" y="4480560"/>
+            <a:ext cx="3474720" cy="502920"/>
+          </a:xfrm>
+          <a:prstGeom prst="roundRect">
+            <a:avLst/>
+          </a:prstGeom>
+          <a:solidFill>
+            <a:srgbClr val="22223E"/>
+          </a:solidFill>
+          <a:ln>
+            <a:noFill/>
+          </a:ln>
+          <a:effectLst/>
+        </p:spPr>
+        <p:style>
+          <a:lnRef idx="1">
+            <a:schemeClr val="accent1"/>
+          </a:lnRef>
+          <a:fillRef idx="3">
+            <a:schemeClr val="accent1"/>
+          </a:fillRef>
+          <a:effectRef idx="2">
+            <a:schemeClr val="accent1"/>
+          </a:effectRef>
+          <a:fontRef idx="minor">
+            <a:schemeClr val="lt1"/>
+          </a:fontRef>
+        </p:style>
+        <p:txBody>
+          <a:bodyPr rtlCol="0" anchor="ctr"/>
+          <a:lstStyle/>
+          <a:p>
+            <a:pPr algn="ctr"/>
+          </a:p>
+        </p:txBody>
+      </p:sp>
+      <p:sp>
+        <p:nvSpPr>
+          <p:cNvPr id="35" name="TextBox 34"/>
+          <p:cNvSpPr txBox="1"/>
+          <p:nvPr/>
+        </p:nvSpPr>
+        <p:spPr>
+          <a:xfrm>
+            <a:off x="914400" y="4553712"/>
+            <a:ext cx="3108960" cy="411480"/>
+          </a:xfrm>
+          <a:prstGeom prst="rect">
+            <a:avLst/>
+          </a:prstGeom>
+          <a:noFill/>
+        </p:spPr>
+        <p:txBody>
+          <a:bodyPr wrap="square">
+            <a:spAutoFit/>
+          </a:bodyPr>
+          <a:lstStyle/>
+          <a:p>
+            <a:pPr algn="l">
+              <a:defRPr sz="1400" b="0">
+                <a:solidFill>
+                  <a:srgbClr val="FF6B35"/>
+                </a:solidFill>
+              </a:defRPr>
+            </a:pPr>
+            <a:r>
+              <a:t>Hardware</a:t>
+            </a:r>
+          </a:p>
+        </p:txBody>
+      </p:sp>
+      <p:sp>
+        <p:nvSpPr>
+          <p:cNvPr id="36" name="Rounded Rectangle 35"/>
+          <p:cNvSpPr/>
+          <p:nvPr/>
+        </p:nvSpPr>
+        <p:spPr>
+          <a:xfrm>
+            <a:off x="4389120" y="4480560"/>
+            <a:ext cx="3474720" cy="502920"/>
+          </a:xfrm>
+          <a:prstGeom prst="roundRect">
+            <a:avLst/>
+          </a:prstGeom>
+          <a:solidFill>
+            <a:srgbClr val="22223E"/>
+          </a:solidFill>
+          <a:ln>
+            <a:noFill/>
+          </a:ln>
+          <a:effectLst/>
+        </p:spPr>
+        <p:style>
+          <a:lnRef idx="1">
+            <a:schemeClr val="accent1"/>
+          </a:lnRef>
+          <a:fillRef idx="3">
+            <a:schemeClr val="accent1"/>
+          </a:fillRef>
+          <a:effectRef idx="2">
+            <a:schemeClr val="accent1"/>
+          </a:effectRef>
+          <a:fontRef idx="minor">
+            <a:schemeClr val="lt1"/>
+          </a:fontRef>
+        </p:style>
+        <p:txBody>
+          <a:bodyPr rtlCol="0" anchor="ctr"/>
+          <a:lstStyle/>
+          <a:p>
+            <a:pPr algn="ctr"/>
+          </a:p>
+        </p:txBody>
+      </p:sp>
+      <p:sp>
+        <p:nvSpPr>
+          <p:cNvPr id="37" name="TextBox 36"/>
+          <p:cNvSpPr txBox="1"/>
+          <p:nvPr/>
+        </p:nvSpPr>
+        <p:spPr>
+          <a:xfrm>
+            <a:off x="4572000" y="4553712"/>
+            <a:ext cx="3108960" cy="411480"/>
+          </a:xfrm>
+          <a:prstGeom prst="rect">
+            <a:avLst/>
+          </a:prstGeom>
+          <a:noFill/>
+        </p:spPr>
+        <p:txBody>
+          <a:bodyPr wrap="square">
+            <a:spAutoFit/>
+          </a:bodyPr>
+          <a:lstStyle/>
+          <a:p>
+            <a:pPr algn="l">
+              <a:defRPr sz="1400" b="0">
                 <a:solidFill>
                   <a:srgbClr val="E0E0E0"/>
                 </a:solidFill>
               </a:defRPr>
             </a:pPr>
             <a:r>
-              <a:t>Backup: Pre-recorded screen capture in case of network issues</a:t>
+              <a:t>None</a:t>
+            </a:r>
+          </a:p>
+        </p:txBody>
+      </p:sp>
+      <p:sp>
+        <p:nvSpPr>
+          <p:cNvPr id="38" name="Rounded Rectangle 37"/>
+          <p:cNvSpPr/>
+          <p:nvPr/>
+        </p:nvSpPr>
+        <p:spPr>
+          <a:xfrm>
+            <a:off x="8046720" y="4480560"/>
+            <a:ext cx="3474720" cy="502920"/>
+          </a:xfrm>
+          <a:prstGeom prst="roundRect">
+            <a:avLst/>
+          </a:prstGeom>
+          <a:solidFill>
+            <a:srgbClr val="22223E"/>
+          </a:solidFill>
+          <a:ln>
+            <a:noFill/>
+          </a:ln>
+          <a:effectLst/>
+        </p:spPr>
+        <p:style>
+          <a:lnRef idx="1">
+            <a:schemeClr val="accent1"/>
+          </a:lnRef>
+          <a:fillRef idx="3">
+            <a:schemeClr val="accent1"/>
+          </a:fillRef>
+          <a:effectRef idx="2">
+            <a:schemeClr val="accent1"/>
+          </a:effectRef>
+          <a:fontRef idx="minor">
+            <a:schemeClr val="lt1"/>
+          </a:fontRef>
+        </p:style>
+        <p:txBody>
+          <a:bodyPr rtlCol="0" anchor="ctr"/>
+          <a:lstStyle/>
+          <a:p>
+            <a:pPr algn="ctr"/>
+          </a:p>
+        </p:txBody>
+      </p:sp>
+      <p:sp>
+        <p:nvSpPr>
+          <p:cNvPr id="39" name="TextBox 38"/>
+          <p:cNvSpPr txBox="1"/>
+          <p:nvPr/>
+        </p:nvSpPr>
+        <p:spPr>
+          <a:xfrm>
+            <a:off x="8229600" y="4553712"/>
+            <a:ext cx="3108960" cy="411480"/>
+          </a:xfrm>
+          <a:prstGeom prst="rect">
+            <a:avLst/>
+          </a:prstGeom>
+          <a:noFill/>
+        </p:spPr>
+        <p:txBody>
+          <a:bodyPr wrap="square">
+            <a:spAutoFit/>
+          </a:bodyPr>
+          <a:lstStyle/>
+          <a:p>
+            <a:pPr algn="l">
+              <a:defRPr sz="1400" b="1">
+                <a:solidFill>
+                  <a:srgbClr val="E0E0E0"/>
+                </a:solidFill>
+              </a:defRPr>
+            </a:pPr>
+            <a:r>
+              <a:t>ESP32-S3 8x8 LED Matrix</a:t>
+            </a:r>
+          </a:p>
+        </p:txBody>
+      </p:sp>
+      <p:sp>
+        <p:nvSpPr>
+          <p:cNvPr id="40" name="Rounded Rectangle 39"/>
+          <p:cNvSpPr/>
+          <p:nvPr/>
+        </p:nvSpPr>
+        <p:spPr>
+          <a:xfrm>
+            <a:off x="731520" y="5074920"/>
+            <a:ext cx="3474720" cy="502920"/>
+          </a:xfrm>
+          <a:prstGeom prst="roundRect">
+            <a:avLst/>
+          </a:prstGeom>
+          <a:solidFill>
+            <a:srgbClr val="1E1E3A"/>
+          </a:solidFill>
+          <a:ln>
+            <a:noFill/>
+          </a:ln>
+          <a:effectLst/>
+        </p:spPr>
+        <p:style>
+          <a:lnRef idx="1">
+            <a:schemeClr val="accent1"/>
+          </a:lnRef>
+          <a:fillRef idx="3">
+            <a:schemeClr val="accent1"/>
+          </a:fillRef>
+          <a:effectRef idx="2">
+            <a:schemeClr val="accent1"/>
+          </a:effectRef>
+          <a:fontRef idx="minor">
+            <a:schemeClr val="lt1"/>
+          </a:fontRef>
+        </p:style>
+        <p:txBody>
+          <a:bodyPr rtlCol="0" anchor="ctr"/>
+          <a:lstStyle/>
+          <a:p>
+            <a:pPr algn="ctr"/>
+          </a:p>
+        </p:txBody>
+      </p:sp>
+      <p:sp>
+        <p:nvSpPr>
+          <p:cNvPr id="41" name="TextBox 40"/>
+          <p:cNvSpPr txBox="1"/>
+          <p:nvPr/>
+        </p:nvSpPr>
+        <p:spPr>
+          <a:xfrm>
+            <a:off x="914400" y="5148072"/>
+            <a:ext cx="3108960" cy="411480"/>
+          </a:xfrm>
+          <a:prstGeom prst="rect">
+            <a:avLst/>
+          </a:prstGeom>
+          <a:noFill/>
+        </p:spPr>
+        <p:txBody>
+          <a:bodyPr wrap="square">
+            <a:spAutoFit/>
+          </a:bodyPr>
+          <a:lstStyle/>
+          <a:p>
+            <a:pPr algn="l">
+              <a:defRPr sz="1400" b="0">
+                <a:solidFill>
+                  <a:srgbClr val="FF6B35"/>
+                </a:solidFill>
+              </a:defRPr>
+            </a:pPr>
+            <a:r>
+              <a:t>Planning</a:t>
+            </a:r>
+          </a:p>
+        </p:txBody>
+      </p:sp>
+      <p:sp>
+        <p:nvSpPr>
+          <p:cNvPr id="42" name="Rounded Rectangle 41"/>
+          <p:cNvSpPr/>
+          <p:nvPr/>
+        </p:nvSpPr>
+        <p:spPr>
+          <a:xfrm>
+            <a:off x="4389120" y="5074920"/>
+            <a:ext cx="3474720" cy="502920"/>
+          </a:xfrm>
+          <a:prstGeom prst="roundRect">
+            <a:avLst/>
+          </a:prstGeom>
+          <a:solidFill>
+            <a:srgbClr val="1E1E3A"/>
+          </a:solidFill>
+          <a:ln>
+            <a:noFill/>
+          </a:ln>
+          <a:effectLst/>
+        </p:spPr>
+        <p:style>
+          <a:lnRef idx="1">
+            <a:schemeClr val="accent1"/>
+          </a:lnRef>
+          <a:fillRef idx="3">
+            <a:schemeClr val="accent1"/>
+          </a:fillRef>
+          <a:effectRef idx="2">
+            <a:schemeClr val="accent1"/>
+          </a:effectRef>
+          <a:fontRef idx="minor">
+            <a:schemeClr val="lt1"/>
+          </a:fontRef>
+        </p:style>
+        <p:txBody>
+          <a:bodyPr rtlCol="0" anchor="ctr"/>
+          <a:lstStyle/>
+          <a:p>
+            <a:pPr algn="ctr"/>
+          </a:p>
+        </p:txBody>
+      </p:sp>
+      <p:sp>
+        <p:nvSpPr>
+          <p:cNvPr id="43" name="TextBox 42"/>
+          <p:cNvSpPr txBox="1"/>
+          <p:nvPr/>
+        </p:nvSpPr>
+        <p:spPr>
+          <a:xfrm>
+            <a:off x="4572000" y="5148072"/>
+            <a:ext cx="3108960" cy="411480"/>
+          </a:xfrm>
+          <a:prstGeom prst="rect">
+            <a:avLst/>
+          </a:prstGeom>
+          <a:noFill/>
+        </p:spPr>
+        <p:txBody>
+          <a:bodyPr wrap="square">
+            <a:spAutoFit/>
+          </a:bodyPr>
+          <a:lstStyle/>
+          <a:p>
+            <a:pPr algn="l">
+              <a:defRPr sz="1400" b="0">
+                <a:solidFill>
+                  <a:srgbClr val="E0E0E0"/>
+                </a:solidFill>
+              </a:defRPr>
+            </a:pPr>
+            <a:r>
+              <a:t>None</a:t>
+            </a:r>
+          </a:p>
+        </p:txBody>
+      </p:sp>
+      <p:sp>
+        <p:nvSpPr>
+          <p:cNvPr id="44" name="Rounded Rectangle 43"/>
+          <p:cNvSpPr/>
+          <p:nvPr/>
+        </p:nvSpPr>
+        <p:spPr>
+          <a:xfrm>
+            <a:off x="8046720" y="5074920"/>
+            <a:ext cx="3474720" cy="502920"/>
+          </a:xfrm>
+          <a:prstGeom prst="roundRect">
+            <a:avLst/>
+          </a:prstGeom>
+          <a:solidFill>
+            <a:srgbClr val="1E1E3A"/>
+          </a:solidFill>
+          <a:ln>
+            <a:noFill/>
+          </a:ln>
+          <a:effectLst/>
+        </p:spPr>
+        <p:style>
+          <a:lnRef idx="1">
+            <a:schemeClr val="accent1"/>
+          </a:lnRef>
+          <a:fillRef idx="3">
+            <a:schemeClr val="accent1"/>
+          </a:fillRef>
+          <a:effectRef idx="2">
+            <a:schemeClr val="accent1"/>
+          </a:effectRef>
+          <a:fontRef idx="minor">
+            <a:schemeClr val="lt1"/>
+          </a:fontRef>
+        </p:style>
+        <p:txBody>
+          <a:bodyPr rtlCol="0" anchor="ctr"/>
+          <a:lstStyle/>
+          <a:p>
+            <a:pPr algn="ctr"/>
+          </a:p>
+        </p:txBody>
+      </p:sp>
+      <p:sp>
+        <p:nvSpPr>
+          <p:cNvPr id="45" name="TextBox 44"/>
+          <p:cNvSpPr txBox="1"/>
+          <p:nvPr/>
+        </p:nvSpPr>
+        <p:spPr>
+          <a:xfrm>
+            <a:off x="8229600" y="5148072"/>
+            <a:ext cx="3108960" cy="411480"/>
+          </a:xfrm>
+          <a:prstGeom prst="rect">
+            <a:avLst/>
+          </a:prstGeom>
+          <a:noFill/>
+        </p:spPr>
+        <p:txBody>
+          <a:bodyPr wrap="square">
+            <a:spAutoFit/>
+          </a:bodyPr>
+          <a:lstStyle/>
+          <a:p>
+            <a:pPr algn="l">
+              <a:defRPr sz="1400" b="1">
+                <a:solidFill>
+                  <a:srgbClr val="E0E0E0"/>
+                </a:solidFill>
+              </a:defRPr>
+            </a:pPr>
+            <a:r>
+              <a:t>Prompt -&gt; auto todo list</a:t>
             </a:r>
           </a:p>
         </p:txBody>
@@ -7637,8 +8439,8 @@
 </p:sld>
 </file>
 
-<file path=ppt/slides/slide9.xml><?xml version="1.0" encoding="utf-8"?>
-<p:sld xmlns:a="http://schemas.openxmlformats.org/drawingml/2006/main" xmlns:r="http://schemas.openxmlformats.org/officeDocument/2006/relationships" xmlns:p="http://schemas.openxmlformats.org/presentationml/2006/main">
+<file path=ppt/slides/slide8.xml><?xml version="1.0" encoding="utf-8"?>
+<p:sld xmlns:a="http://schemas.openxmlformats.org/drawingml/2006/main" xmlns:p="http://schemas.openxmlformats.org/presentationml/2006/main" xmlns:r="http://schemas.openxmlformats.org/officeDocument/2006/relationships">
   <p:cSld>
     <p:bg>
       <p:bgPr>
@@ -7729,7 +8531,7 @@
               </a:defRPr>
             </a:pPr>
             <a:r>
-              <a:t>Future Plans</a:t>
+              <a:t>Demo Video</a:t>
             </a:r>
           </a:p>
         </p:txBody>
@@ -7742,8 +8544,8 @@
         </p:nvSpPr>
         <p:spPr>
           <a:xfrm>
-            <a:off x="731520" y="1371600"/>
-            <a:ext cx="10058400" cy="731520"/>
+            <a:off x="731520" y="1097280"/>
+            <a:ext cx="10058400" cy="640080"/>
           </a:xfrm>
           <a:prstGeom prst="rect">
             <a:avLst/>
@@ -7764,7 +8566,7 @@
               </a:defRPr>
             </a:pPr>
             <a:r>
-              <a:t>From Personal Tool to Learning Ecosystem</a:t>
+              <a:t>Full Usage Walkthrough (2 minutes)</a:t>
             </a:r>
           </a:p>
         </p:txBody>
@@ -7777,8 +8579,8 @@
         </p:nvSpPr>
         <p:spPr>
           <a:xfrm>
-            <a:off x="731520" y="2286000"/>
-            <a:ext cx="10515600" cy="4114800"/>
+            <a:off x="731520" y="1737360"/>
+            <a:ext cx="6400800" cy="4572000"/>
           </a:xfrm>
           <a:prstGeom prst="rect">
             <a:avLst/>
@@ -7793,103 +8595,1193 @@
           <a:p>
             <a:pPr>
               <a:spcAft>
-                <a:spcPts val="800"/>
+                <a:spcPts val="600"/>
               </a:spcAft>
-              <a:defRPr sz="1600">
+              <a:defRPr sz="1400">
                 <a:solidFill>
                   <a:srgbClr val="E0E0E0"/>
                 </a:solidFill>
               </a:defRPr>
             </a:pPr>
             <a:r>
-              <a:t>Multi-user study room — see friends focusing, motivate each other</a:t>
+              <a:t>00:00  Open page -&gt; Allow camera -&gt; FaceMesh loading</a:t>
             </a:r>
           </a:p>
           <a:p>
             <a:pPr>
               <a:spcAft>
-                <a:spcPts val="800"/>
+                <a:spcPts val="600"/>
               </a:spcAft>
-              <a:defRPr sz="1600">
+              <a:defRPr sz="1400">
                 <a:solidFill>
                   <a:srgbClr val="E0E0E0"/>
                 </a:solidFill>
               </a:defRPr>
             </a:pPr>
             <a:r>
-              <a:t>Fatigue detection (yawning via MAR) — suggest breaks</a:t>
+              <a:t>00:15  Click Start Focus -&gt; Pomodoro countdown + Happy pet</a:t>
             </a:r>
           </a:p>
           <a:p>
             <a:pPr>
               <a:spcAft>
-                <a:spcPts val="800"/>
+                <a:spcPts val="600"/>
               </a:spcAft>
-              <a:defRPr sz="1600">
+              <a:defRPr sz="1400">
                 <a:solidFill>
                   <a:srgbClr val="E0E0E0"/>
                 </a:solidFill>
               </a:defRPr>
             </a:pPr>
             <a:r>
-              <a:t>AI daily report — auto-generated focus analysis + suggestions</a:t>
+              <a:t>00:35  Look away -&gt; Pet turns Worried + Status turns yellow</a:t>
             </a:r>
           </a:p>
           <a:p>
             <a:pPr>
               <a:spcAft>
-                <a:spcPts val="800"/>
+                <a:spcPts val="600"/>
               </a:spcAft>
-              <a:defRPr sz="1600">
+              <a:defRPr sz="1400">
                 <a:solidFill>
                   <a:srgbClr val="E0E0E0"/>
                 </a:solidFill>
               </a:defRPr>
             </a:pPr>
             <a:r>
-              <a:t>Mobile responsive — phone + tablet support</a:t>
+              <a:t>00:50  Leave desk -&gt; Timer pauses + Pet sleeps + Red flash</a:t>
             </a:r>
           </a:p>
           <a:p>
             <a:pPr>
               <a:spcAft>
-                <a:spcPts val="800"/>
+                <a:spcPts val="600"/>
               </a:spcAft>
-              <a:defRPr sz="1600">
+              <a:defRPr sz="1400">
                 <a:solidFill>
                   <a:srgbClr val="E0E0E0"/>
                 </a:solidFill>
               </a:defRPr>
             </a:pPr>
             <a:r>
-              <a:t>More hardware integrations — vibration alerts, ambient lights</a:t>
+              <a:t>01:10  Return -&gt; Auto-resume focus mode</a:t>
             </a:r>
           </a:p>
           <a:p>
             <a:pPr>
               <a:spcAft>
-                <a:spcPts val="800"/>
+                <a:spcPts val="600"/>
               </a:spcAft>
-              <a:defRPr sz="1600">
+              <a:defRPr sz="1400">
                 <a:solidFill>
                   <a:srgbClr val="E0E0E0"/>
                 </a:solidFill>
               </a:defRPr>
             </a:pPr>
+            <a:r>
+              <a:t>01:25  Pomodoro complete -&gt; Celebration + Notification + Star</a:t>
+            </a:r>
           </a:p>
           <a:p>
             <a:pPr>
               <a:spcAft>
-                <a:spcPts val="800"/>
+                <a:spcPts val="600"/>
               </a:spcAft>
-              <a:defRPr sz="1600">
+              <a:defRPr sz="1400">
                 <a:solidFill>
                   <a:srgbClr val="E0E0E0"/>
                 </a:solidFill>
               </a:defRPr>
             </a:pPr>
             <a:r>
-              <a:t>Making FocusBuddy the desk companion for every learner</a:t>
+              <a:t>01:40  View stats -&gt; Pie chart / Bar chart / Daily Plan</a:t>
+            </a:r>
+          </a:p>
+          <a:p>
+            <a:pPr>
+              <a:spcAft>
+                <a:spcPts val="600"/>
+              </a:spcAft>
+              <a:defRPr sz="1400">
+                <a:solidFill>
+                  <a:srgbClr val="E0E0E0"/>
+                </a:solidFill>
+              </a:defRPr>
+            </a:pPr>
+          </a:p>
+          <a:p>
+            <a:pPr>
+              <a:spcAft>
+                <a:spcPts val="600"/>
+              </a:spcAft>
+              <a:defRPr sz="1400">
+                <a:solidFill>
+                  <a:srgbClr val="E0E0E0"/>
+                </a:solidFill>
+              </a:defRPr>
+            </a:pPr>
+            <a:r>
+              <a:t>Backup: Pre-recorded screen capture in case of network issues</a:t>
+            </a:r>
+          </a:p>
+        </p:txBody>
+      </p:sp>
+      <p:sp>
+        <p:nvSpPr>
+          <p:cNvPr id="6" name="Rounded Rectangle 5"/>
+          <p:cNvSpPr/>
+          <p:nvPr/>
+        </p:nvSpPr>
+        <p:spPr>
+          <a:xfrm>
+            <a:off x="7498079" y="1645920"/>
+            <a:ext cx="4206240" cy="2560320"/>
+          </a:xfrm>
+          <a:prstGeom prst="roundRect">
+            <a:avLst/>
+          </a:prstGeom>
+          <a:solidFill>
+            <a:srgbClr val="202A44"/>
+          </a:solidFill>
+          <a:ln w="19050">
+            <a:solidFill>
+              <a:srgbClr val="8892B0"/>
+            </a:solidFill>
+          </a:ln>
+          <a:effectLst/>
+        </p:spPr>
+        <p:style>
+          <a:lnRef idx="1">
+            <a:schemeClr val="accent1"/>
+          </a:lnRef>
+          <a:fillRef idx="3">
+            <a:schemeClr val="accent1"/>
+          </a:fillRef>
+          <a:effectRef idx="2">
+            <a:schemeClr val="accent1"/>
+          </a:effectRef>
+          <a:fontRef idx="minor">
+            <a:schemeClr val="lt1"/>
+          </a:fontRef>
+        </p:style>
+        <p:txBody>
+          <a:bodyPr rtlCol="0" anchor="ctr"/>
+          <a:lstStyle/>
+          <a:p>
+            <a:pPr algn="ctr"/>
+          </a:p>
+        </p:txBody>
+      </p:sp>
+      <p:sp>
+        <p:nvSpPr>
+          <p:cNvPr id="7" name="TextBox 6"/>
+          <p:cNvSpPr txBox="1"/>
+          <p:nvPr/>
+        </p:nvSpPr>
+        <p:spPr>
+          <a:xfrm>
+            <a:off x="7498079" y="2651760"/>
+            <a:ext cx="4206240" cy="548640"/>
+          </a:xfrm>
+          <a:prstGeom prst="rect">
+            <a:avLst/>
+          </a:prstGeom>
+          <a:noFill/>
+        </p:spPr>
+        <p:txBody>
+          <a:bodyPr wrap="square">
+            <a:spAutoFit/>
+          </a:bodyPr>
+          <a:lstStyle/>
+          <a:p>
+            <a:pPr algn="ctr">
+              <a:defRPr sz="1400">
+                <a:solidFill>
+                  <a:srgbClr val="8892B0"/>
+                </a:solidFill>
+              </a:defRPr>
+            </a:pPr>
+            <a:r>
+              <a:t>Demo Video Screenshot</a:t>
+            </a:r>
+          </a:p>
+        </p:txBody>
+      </p:sp>
+      <p:sp>
+        <p:nvSpPr>
+          <p:cNvPr id="8" name="Rounded Rectangle 7"/>
+          <p:cNvSpPr/>
+          <p:nvPr/>
+        </p:nvSpPr>
+        <p:spPr>
+          <a:xfrm>
+            <a:off x="7498079" y="4389120"/>
+            <a:ext cx="4206240" cy="2011680"/>
+          </a:xfrm>
+          <a:prstGeom prst="roundRect">
+            <a:avLst/>
+          </a:prstGeom>
+          <a:solidFill>
+            <a:srgbClr val="202A44"/>
+          </a:solidFill>
+          <a:ln w="19050">
+            <a:solidFill>
+              <a:srgbClr val="8892B0"/>
+            </a:solidFill>
+          </a:ln>
+          <a:effectLst/>
+        </p:spPr>
+        <p:style>
+          <a:lnRef idx="1">
+            <a:schemeClr val="accent1"/>
+          </a:lnRef>
+          <a:fillRef idx="3">
+            <a:schemeClr val="accent1"/>
+          </a:fillRef>
+          <a:effectRef idx="2">
+            <a:schemeClr val="accent1"/>
+          </a:effectRef>
+          <a:fontRef idx="minor">
+            <a:schemeClr val="lt1"/>
+          </a:fontRef>
+        </p:style>
+        <p:txBody>
+          <a:bodyPr rtlCol="0" anchor="ctr"/>
+          <a:lstStyle/>
+          <a:p>
+            <a:pPr algn="ctr"/>
+          </a:p>
+        </p:txBody>
+      </p:sp>
+      <p:sp>
+        <p:nvSpPr>
+          <p:cNvPr id="9" name="TextBox 8"/>
+          <p:cNvSpPr txBox="1"/>
+          <p:nvPr/>
+        </p:nvSpPr>
+        <p:spPr>
+          <a:xfrm>
+            <a:off x="7498079" y="5120640"/>
+            <a:ext cx="4206240" cy="548640"/>
+          </a:xfrm>
+          <a:prstGeom prst="rect">
+            <a:avLst/>
+          </a:prstGeom>
+          <a:noFill/>
+        </p:spPr>
+        <p:txBody>
+          <a:bodyPr wrap="square">
+            <a:spAutoFit/>
+          </a:bodyPr>
+          <a:lstStyle/>
+          <a:p>
+            <a:pPr algn="ctr">
+              <a:defRPr sz="1400">
+                <a:solidFill>
+                  <a:srgbClr val="8892B0"/>
+                </a:solidFill>
+              </a:defRPr>
+            </a:pPr>
+            <a:r>
+              <a:t>Statistics Page Screenshot</a:t>
+            </a:r>
+          </a:p>
+        </p:txBody>
+      </p:sp>
+    </p:spTree>
+  </p:cSld>
+  <p:clrMapOvr>
+    <a:masterClrMapping/>
+  </p:clrMapOvr>
+</p:sld>
+</file>
+
+<file path=ppt/slides/slide9.xml><?xml version="1.0" encoding="utf-8"?>
+<p:sld xmlns:a="http://schemas.openxmlformats.org/drawingml/2006/main" xmlns:p="http://schemas.openxmlformats.org/presentationml/2006/main" xmlns:r="http://schemas.openxmlformats.org/officeDocument/2006/relationships">
+  <p:cSld>
+    <p:bg>
+      <p:bgPr>
+        <a:solidFill>
+          <a:srgbClr val="1A1A2E"/>
+        </a:solidFill>
+        <a:effectLst/>
+      </p:bgPr>
+    </p:bg>
+    <p:spTree>
+      <p:nvGrpSpPr>
+        <p:cNvPr id="1" name=""/>
+        <p:cNvGrpSpPr/>
+        <p:nvPr/>
+      </p:nvGrpSpPr>
+      <p:grpSpPr/>
+      <p:sp>
+        <p:nvSpPr>
+          <p:cNvPr id="2" name="Rounded Rectangle 1"/>
+          <p:cNvSpPr/>
+          <p:nvPr/>
+        </p:nvSpPr>
+        <p:spPr>
+          <a:xfrm>
+            <a:off x="457200" y="274320"/>
+            <a:ext cx="2926080" cy="548640"/>
+          </a:xfrm>
+          <a:prstGeom prst="roundRect">
+            <a:avLst/>
+          </a:prstGeom>
+          <a:solidFill>
+            <a:srgbClr val="FF6B35"/>
+          </a:solidFill>
+          <a:ln>
+            <a:noFill/>
+          </a:ln>
+          <a:effectLst/>
+        </p:spPr>
+        <p:style>
+          <a:lnRef idx="1">
+            <a:schemeClr val="accent1"/>
+          </a:lnRef>
+          <a:fillRef idx="3">
+            <a:schemeClr val="accent1"/>
+          </a:fillRef>
+          <a:effectRef idx="2">
+            <a:schemeClr val="accent1"/>
+          </a:effectRef>
+          <a:fontRef idx="minor">
+            <a:schemeClr val="lt1"/>
+          </a:fontRef>
+        </p:style>
+        <p:txBody>
+          <a:bodyPr rtlCol="0" anchor="ctr"/>
+          <a:lstStyle/>
+          <a:p>
+            <a:pPr algn="ctr"/>
+          </a:p>
+        </p:txBody>
+      </p:sp>
+      <p:sp>
+        <p:nvSpPr>
+          <p:cNvPr id="3" name="TextBox 2"/>
+          <p:cNvSpPr txBox="1"/>
+          <p:nvPr/>
+        </p:nvSpPr>
+        <p:spPr>
+          <a:xfrm>
+            <a:off x="640080" y="320040"/>
+            <a:ext cx="2743200" cy="457200"/>
+          </a:xfrm>
+          <a:prstGeom prst="rect">
+            <a:avLst/>
+          </a:prstGeom>
+          <a:noFill/>
+        </p:spPr>
+        <p:txBody>
+          <a:bodyPr wrap="square">
+            <a:spAutoFit/>
+          </a:bodyPr>
+          <a:lstStyle/>
+          <a:p>
+            <a:pPr algn="l">
+              <a:defRPr sz="2200" b="1">
+                <a:solidFill>
+                  <a:srgbClr val="FFFFFF"/>
+                </a:solidFill>
+              </a:defRPr>
+            </a:pPr>
+            <a:r>
+              <a:t>Data Insights</a:t>
+            </a:r>
+          </a:p>
+        </p:txBody>
+      </p:sp>
+      <p:sp>
+        <p:nvSpPr>
+          <p:cNvPr id="4" name="TextBox 3"/>
+          <p:cNvSpPr txBox="1"/>
+          <p:nvPr/>
+        </p:nvSpPr>
+        <p:spPr>
+          <a:xfrm>
+            <a:off x="731520" y="1097280"/>
+            <a:ext cx="10058400" cy="548640"/>
+          </a:xfrm>
+          <a:prstGeom prst="rect">
+            <a:avLst/>
+          </a:prstGeom>
+          <a:noFill/>
+        </p:spPr>
+        <p:txBody>
+          <a:bodyPr wrap="square">
+            <a:spAutoFit/>
+          </a:bodyPr>
+          <a:lstStyle/>
+          <a:p>
+            <a:pPr algn="l">
+              <a:defRPr sz="2400" b="1">
+                <a:solidFill>
+                  <a:srgbClr val="FF6B35"/>
+                </a:solidFill>
+              </a:defRPr>
+            </a:pPr>
+            <a:r>
+              <a:t>Your focus data is more intuitive than you think</a:t>
+            </a:r>
+          </a:p>
+        </p:txBody>
+      </p:sp>
+      <p:sp>
+        <p:nvSpPr>
+          <p:cNvPr id="5" name="Rounded Rectangle 4"/>
+          <p:cNvSpPr/>
+          <p:nvPr/>
+        </p:nvSpPr>
+        <p:spPr>
+          <a:xfrm>
+            <a:off x="731520" y="1828800"/>
+            <a:ext cx="2560320" cy="1371600"/>
+          </a:xfrm>
+          <a:prstGeom prst="roundRect">
+            <a:avLst/>
+          </a:prstGeom>
+          <a:solidFill>
+            <a:srgbClr val="1E2A44"/>
+          </a:solidFill>
+          <a:ln>
+            <a:noFill/>
+          </a:ln>
+          <a:effectLst/>
+        </p:spPr>
+        <p:style>
+          <a:lnRef idx="1">
+            <a:schemeClr val="accent1"/>
+          </a:lnRef>
+          <a:fillRef idx="3">
+            <a:schemeClr val="accent1"/>
+          </a:fillRef>
+          <a:effectRef idx="2">
+            <a:schemeClr val="accent1"/>
+          </a:effectRef>
+          <a:fontRef idx="minor">
+            <a:schemeClr val="lt1"/>
+          </a:fontRef>
+        </p:style>
+        <p:txBody>
+          <a:bodyPr rtlCol="0" anchor="ctr"/>
+          <a:lstStyle/>
+          <a:p>
+            <a:pPr algn="ctr"/>
+          </a:p>
+        </p:txBody>
+      </p:sp>
+      <p:sp>
+        <p:nvSpPr>
+          <p:cNvPr id="6" name="TextBox 5"/>
+          <p:cNvSpPr txBox="1"/>
+          <p:nvPr/>
+        </p:nvSpPr>
+        <p:spPr>
+          <a:xfrm>
+            <a:off x="914400" y="1920240"/>
+            <a:ext cx="2194560" cy="365760"/>
+          </a:xfrm>
+          <a:prstGeom prst="rect">
+            <a:avLst/>
+          </a:prstGeom>
+          <a:noFill/>
+        </p:spPr>
+        <p:txBody>
+          <a:bodyPr wrap="square">
+            <a:spAutoFit/>
+          </a:bodyPr>
+          <a:lstStyle/>
+          <a:p>
+            <a:pPr algn="l">
+              <a:defRPr sz="1400" b="0">
+                <a:solidFill>
+                  <a:srgbClr val="8892B0"/>
+                </a:solidFill>
+              </a:defRPr>
+            </a:pPr>
+            <a:r>
+              <a:t>Today Focus</a:t>
+            </a:r>
+          </a:p>
+        </p:txBody>
+      </p:sp>
+      <p:sp>
+        <p:nvSpPr>
+          <p:cNvPr id="7" name="TextBox 6"/>
+          <p:cNvSpPr txBox="1"/>
+          <p:nvPr/>
+        </p:nvSpPr>
+        <p:spPr>
+          <a:xfrm>
+            <a:off x="914400" y="2240280"/>
+            <a:ext cx="2194560" cy="457200"/>
+          </a:xfrm>
+          <a:prstGeom prst="rect">
+            <a:avLst/>
+          </a:prstGeom>
+          <a:noFill/>
+        </p:spPr>
+        <p:txBody>
+          <a:bodyPr wrap="square">
+            <a:spAutoFit/>
+          </a:bodyPr>
+          <a:lstStyle/>
+          <a:p>
+            <a:pPr algn="l">
+              <a:defRPr sz="2800" b="1">
+                <a:solidFill>
+                  <a:srgbClr val="27AE60"/>
+                </a:solidFill>
+              </a:defRPr>
+            </a:pPr>
+            <a:r>
+              <a:t>00:32:15</a:t>
+            </a:r>
+          </a:p>
+        </p:txBody>
+      </p:sp>
+      <p:sp>
+        <p:nvSpPr>
+          <p:cNvPr id="8" name="TextBox 7"/>
+          <p:cNvSpPr txBox="1"/>
+          <p:nvPr/>
+        </p:nvSpPr>
+        <p:spPr>
+          <a:xfrm>
+            <a:off x="914400" y="2697480"/>
+            <a:ext cx="2194560" cy="365760"/>
+          </a:xfrm>
+          <a:prstGeom prst="rect">
+            <a:avLst/>
+          </a:prstGeom>
+          <a:noFill/>
+        </p:spPr>
+        <p:txBody>
+          <a:bodyPr wrap="square">
+            <a:spAutoFit/>
+          </a:bodyPr>
+          <a:lstStyle/>
+          <a:p>
+            <a:pPr algn="l">
+              <a:defRPr sz="1100" b="0">
+                <a:solidFill>
+                  <a:srgbClr val="8892B0"/>
+                </a:solidFill>
+              </a:defRPr>
+            </a:pPr>
+            <a:r>
+              <a:t>+15% vs yesterday</a:t>
+            </a:r>
+          </a:p>
+        </p:txBody>
+      </p:sp>
+      <p:sp>
+        <p:nvSpPr>
+          <p:cNvPr id="9" name="Rounded Rectangle 8"/>
+          <p:cNvSpPr/>
+          <p:nvPr/>
+        </p:nvSpPr>
+        <p:spPr>
+          <a:xfrm>
+            <a:off x="3474720" y="1828800"/>
+            <a:ext cx="2560320" cy="1371600"/>
+          </a:xfrm>
+          <a:prstGeom prst="roundRect">
+            <a:avLst/>
+          </a:prstGeom>
+          <a:solidFill>
+            <a:srgbClr val="1E2A44"/>
+          </a:solidFill>
+          <a:ln>
+            <a:noFill/>
+          </a:ln>
+          <a:effectLst/>
+        </p:spPr>
+        <p:style>
+          <a:lnRef idx="1">
+            <a:schemeClr val="accent1"/>
+          </a:lnRef>
+          <a:fillRef idx="3">
+            <a:schemeClr val="accent1"/>
+          </a:fillRef>
+          <a:effectRef idx="2">
+            <a:schemeClr val="accent1"/>
+          </a:effectRef>
+          <a:fontRef idx="minor">
+            <a:schemeClr val="lt1"/>
+          </a:fontRef>
+        </p:style>
+        <p:txBody>
+          <a:bodyPr rtlCol="0" anchor="ctr"/>
+          <a:lstStyle/>
+          <a:p>
+            <a:pPr algn="ctr"/>
+          </a:p>
+        </p:txBody>
+      </p:sp>
+      <p:sp>
+        <p:nvSpPr>
+          <p:cNvPr id="10" name="TextBox 9"/>
+          <p:cNvSpPr txBox="1"/>
+          <p:nvPr/>
+        </p:nvSpPr>
+        <p:spPr>
+          <a:xfrm>
+            <a:off x="3657600" y="1920240"/>
+            <a:ext cx="2194560" cy="365760"/>
+          </a:xfrm>
+          <a:prstGeom prst="rect">
+            <a:avLst/>
+          </a:prstGeom>
+          <a:noFill/>
+        </p:spPr>
+        <p:txBody>
+          <a:bodyPr wrap="square">
+            <a:spAutoFit/>
+          </a:bodyPr>
+          <a:lstStyle/>
+          <a:p>
+            <a:pPr algn="l">
+              <a:defRPr sz="1400" b="0">
+                <a:solidFill>
+                  <a:srgbClr val="8892B0"/>
+                </a:solidFill>
+              </a:defRPr>
+            </a:pPr>
+            <a:r>
+              <a:t>Distractions</a:t>
+            </a:r>
+          </a:p>
+        </p:txBody>
+      </p:sp>
+      <p:sp>
+        <p:nvSpPr>
+          <p:cNvPr id="11" name="TextBox 10"/>
+          <p:cNvSpPr txBox="1"/>
+          <p:nvPr/>
+        </p:nvSpPr>
+        <p:spPr>
+          <a:xfrm>
+            <a:off x="3657600" y="2240280"/>
+            <a:ext cx="2194560" cy="457200"/>
+          </a:xfrm>
+          <a:prstGeom prst="rect">
+            <a:avLst/>
+          </a:prstGeom>
+          <a:noFill/>
+        </p:spPr>
+        <p:txBody>
+          <a:bodyPr wrap="square">
+            <a:spAutoFit/>
+          </a:bodyPr>
+          <a:lstStyle/>
+          <a:p>
+            <a:pPr algn="l">
+              <a:defRPr sz="2800" b="1">
+                <a:solidFill>
+                  <a:srgbClr val="E74C3C"/>
+                </a:solidFill>
+              </a:defRPr>
+            </a:pPr>
+            <a:r>
+              <a:t>12 times</a:t>
+            </a:r>
+          </a:p>
+        </p:txBody>
+      </p:sp>
+      <p:sp>
+        <p:nvSpPr>
+          <p:cNvPr id="12" name="TextBox 11"/>
+          <p:cNvSpPr txBox="1"/>
+          <p:nvPr/>
+        </p:nvSpPr>
+        <p:spPr>
+          <a:xfrm>
+            <a:off x="3657600" y="2697480"/>
+            <a:ext cx="2194560" cy="365760"/>
+          </a:xfrm>
+          <a:prstGeom prst="rect">
+            <a:avLst/>
+          </a:prstGeom>
+          <a:noFill/>
+        </p:spPr>
+        <p:txBody>
+          <a:bodyPr wrap="square">
+            <a:spAutoFit/>
+          </a:bodyPr>
+          <a:lstStyle/>
+          <a:p>
+            <a:pPr algn="l">
+              <a:defRPr sz="1100" b="0">
+                <a:solidFill>
+                  <a:srgbClr val="8892B0"/>
+                </a:solidFill>
+              </a:defRPr>
+            </a:pPr>
+            <a:r>
+              <a:t>Avg 2.7min each</a:t>
+            </a:r>
+          </a:p>
+        </p:txBody>
+      </p:sp>
+      <p:sp>
+        <p:nvSpPr>
+          <p:cNvPr id="13" name="Rounded Rectangle 12"/>
+          <p:cNvSpPr/>
+          <p:nvPr/>
+        </p:nvSpPr>
+        <p:spPr>
+          <a:xfrm>
+            <a:off x="6217920" y="1828800"/>
+            <a:ext cx="2560320" cy="1371600"/>
+          </a:xfrm>
+          <a:prstGeom prst="roundRect">
+            <a:avLst/>
+          </a:prstGeom>
+          <a:solidFill>
+            <a:srgbClr val="1E2A44"/>
+          </a:solidFill>
+          <a:ln>
+            <a:noFill/>
+          </a:ln>
+          <a:effectLst/>
+        </p:spPr>
+        <p:style>
+          <a:lnRef idx="1">
+            <a:schemeClr val="accent1"/>
+          </a:lnRef>
+          <a:fillRef idx="3">
+            <a:schemeClr val="accent1"/>
+          </a:fillRef>
+          <a:effectRef idx="2">
+            <a:schemeClr val="accent1"/>
+          </a:effectRef>
+          <a:fontRef idx="minor">
+            <a:schemeClr val="lt1"/>
+          </a:fontRef>
+        </p:style>
+        <p:txBody>
+          <a:bodyPr rtlCol="0" anchor="ctr"/>
+          <a:lstStyle/>
+          <a:p>
+            <a:pPr algn="ctr"/>
+          </a:p>
+        </p:txBody>
+      </p:sp>
+      <p:sp>
+        <p:nvSpPr>
+          <p:cNvPr id="14" name="TextBox 13"/>
+          <p:cNvSpPr txBox="1"/>
+          <p:nvPr/>
+        </p:nvSpPr>
+        <p:spPr>
+          <a:xfrm>
+            <a:off x="6400800" y="1920240"/>
+            <a:ext cx="2194560" cy="365760"/>
+          </a:xfrm>
+          <a:prstGeom prst="rect">
+            <a:avLst/>
+          </a:prstGeom>
+          <a:noFill/>
+        </p:spPr>
+        <p:txBody>
+          <a:bodyPr wrap="square">
+            <a:spAutoFit/>
+          </a:bodyPr>
+          <a:lstStyle/>
+          <a:p>
+            <a:pPr algn="l">
+              <a:defRPr sz="1400" b="0">
+                <a:solidFill>
+                  <a:srgbClr val="8892B0"/>
+                </a:solidFill>
+              </a:defRPr>
+            </a:pPr>
+            <a:r>
+              <a:t>Pomodoros</a:t>
+            </a:r>
+          </a:p>
+        </p:txBody>
+      </p:sp>
+      <p:sp>
+        <p:nvSpPr>
+          <p:cNvPr id="15" name="TextBox 14"/>
+          <p:cNvSpPr txBox="1"/>
+          <p:nvPr/>
+        </p:nvSpPr>
+        <p:spPr>
+          <a:xfrm>
+            <a:off x="6400800" y="2240280"/>
+            <a:ext cx="2194560" cy="457200"/>
+          </a:xfrm>
+          <a:prstGeom prst="rect">
+            <a:avLst/>
+          </a:prstGeom>
+          <a:noFill/>
+        </p:spPr>
+        <p:txBody>
+          <a:bodyPr wrap="square">
+            <a:spAutoFit/>
+          </a:bodyPr>
+          <a:lstStyle/>
+          <a:p>
+            <a:pPr algn="l">
+              <a:defRPr sz="2800" b="1">
+                <a:solidFill>
+                  <a:srgbClr val="FF6B35"/>
+                </a:solidFill>
+              </a:defRPr>
+            </a:pPr>
+            <a:r>
+              <a:t>3/5 done</a:t>
+            </a:r>
+          </a:p>
+        </p:txBody>
+      </p:sp>
+      <p:sp>
+        <p:nvSpPr>
+          <p:cNvPr id="16" name="TextBox 15"/>
+          <p:cNvSpPr txBox="1"/>
+          <p:nvPr/>
+        </p:nvSpPr>
+        <p:spPr>
+          <a:xfrm>
+            <a:off x="6400800" y="2697480"/>
+            <a:ext cx="2194560" cy="365760"/>
+          </a:xfrm>
+          <a:prstGeom prst="rect">
+            <a:avLst/>
+          </a:prstGeom>
+          <a:noFill/>
+        </p:spPr>
+        <p:txBody>
+          <a:bodyPr wrap="square">
+            <a:spAutoFit/>
+          </a:bodyPr>
+          <a:lstStyle/>
+          <a:p>
+            <a:pPr algn="l">
+              <a:defRPr sz="1100" b="0">
+                <a:solidFill>
+                  <a:srgbClr val="8892B0"/>
+                </a:solidFill>
+              </a:defRPr>
+            </a:pPr>
+            <a:r>
+              <a:t>60% completion</a:t>
+            </a:r>
+          </a:p>
+        </p:txBody>
+      </p:sp>
+      <p:sp>
+        <p:nvSpPr>
+          <p:cNvPr id="17" name="Rounded Rectangle 16"/>
+          <p:cNvSpPr/>
+          <p:nvPr/>
+        </p:nvSpPr>
+        <p:spPr>
+          <a:xfrm>
+            <a:off x="8961120" y="1828800"/>
+            <a:ext cx="2560320" cy="1371600"/>
+          </a:xfrm>
+          <a:prstGeom prst="roundRect">
+            <a:avLst/>
+          </a:prstGeom>
+          <a:solidFill>
+            <a:srgbClr val="1E2A44"/>
+          </a:solidFill>
+          <a:ln>
+            <a:noFill/>
+          </a:ln>
+          <a:effectLst/>
+        </p:spPr>
+        <p:style>
+          <a:lnRef idx="1">
+            <a:schemeClr val="accent1"/>
+          </a:lnRef>
+          <a:fillRef idx="3">
+            <a:schemeClr val="accent1"/>
+          </a:fillRef>
+          <a:effectRef idx="2">
+            <a:schemeClr val="accent1"/>
+          </a:effectRef>
+          <a:fontRef idx="minor">
+            <a:schemeClr val="lt1"/>
+          </a:fontRef>
+        </p:style>
+        <p:txBody>
+          <a:bodyPr rtlCol="0" anchor="ctr"/>
+          <a:lstStyle/>
+          <a:p>
+            <a:pPr algn="ctr"/>
+          </a:p>
+        </p:txBody>
+      </p:sp>
+      <p:sp>
+        <p:nvSpPr>
+          <p:cNvPr id="18" name="TextBox 17"/>
+          <p:cNvSpPr txBox="1"/>
+          <p:nvPr/>
+        </p:nvSpPr>
+        <p:spPr>
+          <a:xfrm>
+            <a:off x="9144000" y="1920240"/>
+            <a:ext cx="2194560" cy="365760"/>
+          </a:xfrm>
+          <a:prstGeom prst="rect">
+            <a:avLst/>
+          </a:prstGeom>
+          <a:noFill/>
+        </p:spPr>
+        <p:txBody>
+          <a:bodyPr wrap="square">
+            <a:spAutoFit/>
+          </a:bodyPr>
+          <a:lstStyle/>
+          <a:p>
+            <a:pPr algn="l">
+              <a:defRPr sz="1400" b="0">
+                <a:solidFill>
+                  <a:srgbClr val="8892B0"/>
+                </a:solidFill>
+              </a:defRPr>
+            </a:pPr>
+            <a:r>
+              <a:t>Focus Rate</a:t>
+            </a:r>
+          </a:p>
+        </p:txBody>
+      </p:sp>
+      <p:sp>
+        <p:nvSpPr>
+          <p:cNvPr id="19" name="TextBox 18"/>
+          <p:cNvSpPr txBox="1"/>
+          <p:nvPr/>
+        </p:nvSpPr>
+        <p:spPr>
+          <a:xfrm>
+            <a:off x="9144000" y="2240280"/>
+            <a:ext cx="2194560" cy="457200"/>
+          </a:xfrm>
+          <a:prstGeom prst="rect">
+            <a:avLst/>
+          </a:prstGeom>
+          <a:noFill/>
+        </p:spPr>
+        <p:txBody>
+          <a:bodyPr wrap="square">
+            <a:spAutoFit/>
+          </a:bodyPr>
+          <a:lstStyle/>
+          <a:p>
+            <a:pPr algn="l">
+              <a:defRPr sz="2800" b="1">
+                <a:solidFill>
+                  <a:srgbClr val="3498DB"/>
+                </a:solidFill>
+              </a:defRPr>
+            </a:pPr>
+            <a:r>
+              <a:t>68%</a:t>
+            </a:r>
+          </a:p>
+        </p:txBody>
+      </p:sp>
+      <p:sp>
+        <p:nvSpPr>
+          <p:cNvPr id="20" name="TextBox 19"/>
+          <p:cNvSpPr txBox="1"/>
+          <p:nvPr/>
+        </p:nvSpPr>
+        <p:spPr>
+          <a:xfrm>
+            <a:off x="9144000" y="2697480"/>
+            <a:ext cx="2194560" cy="365760"/>
+          </a:xfrm>
+          <a:prstGeom prst="rect">
+            <a:avLst/>
+          </a:prstGeom>
+          <a:noFill/>
+        </p:spPr>
+        <p:txBody>
+          <a:bodyPr wrap="square">
+            <a:spAutoFit/>
+          </a:bodyPr>
+          <a:lstStyle/>
+          <a:p>
+            <a:pPr algn="l">
+              <a:defRPr sz="1100" b="0">
+                <a:solidFill>
+                  <a:srgbClr val="8892B0"/>
+                </a:solidFill>
+              </a:defRPr>
+            </a:pPr>
+            <a:r>
+              <a:t>Week best 82%</a:t>
+            </a:r>
+          </a:p>
+        </p:txBody>
+      </p:sp>
+      <p:sp>
+        <p:nvSpPr>
+          <p:cNvPr id="21" name="Rounded Rectangle 20"/>
+          <p:cNvSpPr/>
+          <p:nvPr/>
+        </p:nvSpPr>
+        <p:spPr>
+          <a:xfrm>
+            <a:off x="731520" y="3474720"/>
+            <a:ext cx="5303520" cy="2926080"/>
+          </a:xfrm>
+          <a:prstGeom prst="roundRect">
+            <a:avLst/>
+          </a:prstGeom>
+          <a:solidFill>
+            <a:srgbClr val="202A44"/>
+          </a:solidFill>
+          <a:ln w="19050">
+            <a:solidFill>
+              <a:srgbClr val="8892B0"/>
+            </a:solidFill>
+          </a:ln>
+          <a:effectLst/>
+        </p:spPr>
+        <p:style>
+          <a:lnRef idx="1">
+            <a:schemeClr val="accent1"/>
+          </a:lnRef>
+          <a:fillRef idx="3">
+            <a:schemeClr val="accent1"/>
+          </a:fillRef>
+          <a:effectRef idx="2">
+            <a:schemeClr val="accent1"/>
+          </a:effectRef>
+          <a:fontRef idx="minor">
+            <a:schemeClr val="lt1"/>
+          </a:fontRef>
+        </p:style>
+        <p:txBody>
+          <a:bodyPr rtlCol="0" anchor="ctr"/>
+          <a:lstStyle/>
+          <a:p>
+            <a:pPr algn="ctr"/>
+          </a:p>
+        </p:txBody>
+      </p:sp>
+      <p:sp>
+        <p:nvSpPr>
+          <p:cNvPr id="22" name="TextBox 21"/>
+          <p:cNvSpPr txBox="1"/>
+          <p:nvPr/>
+        </p:nvSpPr>
+        <p:spPr>
+          <a:xfrm>
+            <a:off x="731520" y="4663440"/>
+            <a:ext cx="5303520" cy="548640"/>
+          </a:xfrm>
+          <a:prstGeom prst="rect">
+            <a:avLst/>
+          </a:prstGeom>
+          <a:noFill/>
+        </p:spPr>
+        <p:txBody>
+          <a:bodyPr wrap="square">
+            <a:spAutoFit/>
+          </a:bodyPr>
+          <a:lstStyle/>
+          <a:p>
+            <a:pPr algn="ctr">
+              <a:defRPr sz="1400">
+                <a:solidFill>
+                  <a:srgbClr val="8892B0"/>
+                </a:solidFill>
+              </a:defRPr>
+            </a:pPr>
+            <a:r>
+              <a:t>Pie Chart: Focus vs Distraction vs Away</a:t>
+            </a:r>
+          </a:p>
+        </p:txBody>
+      </p:sp>
+      <p:sp>
+        <p:nvSpPr>
+          <p:cNvPr id="23" name="Rounded Rectangle 22"/>
+          <p:cNvSpPr/>
+          <p:nvPr/>
+        </p:nvSpPr>
+        <p:spPr>
+          <a:xfrm>
+            <a:off x="6400800" y="3474720"/>
+            <a:ext cx="5303520" cy="2926080"/>
+          </a:xfrm>
+          <a:prstGeom prst="roundRect">
+            <a:avLst/>
+          </a:prstGeom>
+          <a:solidFill>
+            <a:srgbClr val="202A44"/>
+          </a:solidFill>
+          <a:ln w="19050">
+            <a:solidFill>
+              <a:srgbClr val="8892B0"/>
+            </a:solidFill>
+          </a:ln>
+          <a:effectLst/>
+        </p:spPr>
+        <p:style>
+          <a:lnRef idx="1">
+            <a:schemeClr val="accent1"/>
+          </a:lnRef>
+          <a:fillRef idx="3">
+            <a:schemeClr val="accent1"/>
+          </a:fillRef>
+          <a:effectRef idx="2">
+            <a:schemeClr val="accent1"/>
+          </a:effectRef>
+          <a:fontRef idx="minor">
+            <a:schemeClr val="lt1"/>
+          </a:fontRef>
+        </p:style>
+        <p:txBody>
+          <a:bodyPr rtlCol="0" anchor="ctr"/>
+          <a:lstStyle/>
+          <a:p>
+            <a:pPr algn="ctr"/>
+          </a:p>
+        </p:txBody>
+      </p:sp>
+      <p:sp>
+        <p:nvSpPr>
+          <p:cNvPr id="24" name="TextBox 23"/>
+          <p:cNvSpPr txBox="1"/>
+          <p:nvPr/>
+        </p:nvSpPr>
+        <p:spPr>
+          <a:xfrm>
+            <a:off x="6400800" y="4663440"/>
+            <a:ext cx="5303520" cy="548640"/>
+          </a:xfrm>
+          <a:prstGeom prst="rect">
+            <a:avLst/>
+          </a:prstGeom>
+          <a:noFill/>
+        </p:spPr>
+        <p:txBody>
+          <a:bodyPr wrap="square">
+            <a:spAutoFit/>
+          </a:bodyPr>
+          <a:lstStyle/>
+          <a:p>
+            <a:pPr algn="ctr">
+              <a:defRPr sz="1400">
+                <a:solidFill>
+                  <a:srgbClr val="8892B0"/>
+                </a:solidFill>
+              </a:defRPr>
+            </a:pPr>
+            <a:r>
+              <a:t>Bar Chart: 7-Day Focus Trend</a:t>
             </a:r>
           </a:p>
         </p:txBody>
@@ -8218,10 +10110,6 @@
       </a:style>
     </a:lnDef>
   </a:objectDefaults>
-  <a:extLst>
-    <a:ext uri="{05A4C25C-085E-4340-85A3-A5531E510DB2}">
-      <thm15:themeFamily xmlns:thm15="http://schemas.microsoft.com/office/thememl/2012/main" name="Office Theme" id="{62F939B6-93AF-4DB8-9C6B-D6C7DFDC589F}" vid="{4A3C46E8-61CC-4603-A589-7422A47A8E4A}"/>
-    </a:ext>
-  </a:extLst>
+  <a:extraClrSchemeLst/>
 </a:theme>
 </file>